--- a/LabBook/images/diagramme.pptx
+++ b/LabBook/images/diagramme.pptx
@@ -6,6 +6,7 @@
   </p:sldMasterIdLst>
   <p:sldIdLst>
     <p:sldId id="256" r:id="rId2"/>
+    <p:sldId id="257" r:id="rId3"/>
   </p:sldIdLst>
   <p:sldSz cx="12192000" cy="6858000"/>
   <p:notesSz cx="6858000" cy="9144000"/>
@@ -104,6 +105,11 @@
       </a:defRPr>
     </a:lvl9pPr>
   </p:defaultTextStyle>
+  <p:extLst>
+    <p:ext uri="{EFAFB233-063F-42B5-8137-9DF3F51BA10A}">
+      <p15:sldGuideLst xmlns:p15="http://schemas.microsoft.com/office/powerpoint/2012/main"/>
+    </p:ext>
+  </p:extLst>
 </p:presentation>
 </file>
 
@@ -254,7 +260,7 @@
           <a:p>
             <a:fld id="{3251E1E4-3A38-47F6-9719-E931542195E7}" type="datetimeFigureOut">
               <a:rPr lang="de-DE" smtClean="0"/>
-              <a:t>25.03.2026</a:t>
+              <a:t>15.06.2026</a:t>
             </a:fld>
             <a:endParaRPr lang="de-DE"/>
           </a:p>
@@ -452,7 +458,7 @@
           <a:p>
             <a:fld id="{3251E1E4-3A38-47F6-9719-E931542195E7}" type="datetimeFigureOut">
               <a:rPr lang="de-DE" smtClean="0"/>
-              <a:t>25.03.2026</a:t>
+              <a:t>15.06.2026</a:t>
             </a:fld>
             <a:endParaRPr lang="de-DE"/>
           </a:p>
@@ -660,7 +666,7 @@
           <a:p>
             <a:fld id="{3251E1E4-3A38-47F6-9719-E931542195E7}" type="datetimeFigureOut">
               <a:rPr lang="de-DE" smtClean="0"/>
-              <a:t>25.03.2026</a:t>
+              <a:t>15.06.2026</a:t>
             </a:fld>
             <a:endParaRPr lang="de-DE"/>
           </a:p>
@@ -858,7 +864,7 @@
           <a:p>
             <a:fld id="{3251E1E4-3A38-47F6-9719-E931542195E7}" type="datetimeFigureOut">
               <a:rPr lang="de-DE" smtClean="0"/>
-              <a:t>25.03.2026</a:t>
+              <a:t>15.06.2026</a:t>
             </a:fld>
             <a:endParaRPr lang="de-DE"/>
           </a:p>
@@ -1133,7 +1139,7 @@
           <a:p>
             <a:fld id="{3251E1E4-3A38-47F6-9719-E931542195E7}" type="datetimeFigureOut">
               <a:rPr lang="de-DE" smtClean="0"/>
-              <a:t>25.03.2026</a:t>
+              <a:t>15.06.2026</a:t>
             </a:fld>
             <a:endParaRPr lang="de-DE"/>
           </a:p>
@@ -1398,7 +1404,7 @@
           <a:p>
             <a:fld id="{3251E1E4-3A38-47F6-9719-E931542195E7}" type="datetimeFigureOut">
               <a:rPr lang="de-DE" smtClean="0"/>
-              <a:t>25.03.2026</a:t>
+              <a:t>15.06.2026</a:t>
             </a:fld>
             <a:endParaRPr lang="de-DE"/>
           </a:p>
@@ -1810,7 +1816,7 @@
           <a:p>
             <a:fld id="{3251E1E4-3A38-47F6-9719-E931542195E7}" type="datetimeFigureOut">
               <a:rPr lang="de-DE" smtClean="0"/>
-              <a:t>25.03.2026</a:t>
+              <a:t>15.06.2026</a:t>
             </a:fld>
             <a:endParaRPr lang="de-DE"/>
           </a:p>
@@ -1951,7 +1957,7 @@
           <a:p>
             <a:fld id="{3251E1E4-3A38-47F6-9719-E931542195E7}" type="datetimeFigureOut">
               <a:rPr lang="de-DE" smtClean="0"/>
-              <a:t>25.03.2026</a:t>
+              <a:t>15.06.2026</a:t>
             </a:fld>
             <a:endParaRPr lang="de-DE"/>
           </a:p>
@@ -2064,7 +2070,7 @@
           <a:p>
             <a:fld id="{3251E1E4-3A38-47F6-9719-E931542195E7}" type="datetimeFigureOut">
               <a:rPr lang="de-DE" smtClean="0"/>
-              <a:t>25.03.2026</a:t>
+              <a:t>15.06.2026</a:t>
             </a:fld>
             <a:endParaRPr lang="de-DE"/>
           </a:p>
@@ -2375,7 +2381,7 @@
           <a:p>
             <a:fld id="{3251E1E4-3A38-47F6-9719-E931542195E7}" type="datetimeFigureOut">
               <a:rPr lang="de-DE" smtClean="0"/>
-              <a:t>25.03.2026</a:t>
+              <a:t>15.06.2026</a:t>
             </a:fld>
             <a:endParaRPr lang="de-DE"/>
           </a:p>
@@ -2663,7 +2669,7 @@
           <a:p>
             <a:fld id="{3251E1E4-3A38-47F6-9719-E931542195E7}" type="datetimeFigureOut">
               <a:rPr lang="de-DE" smtClean="0"/>
-              <a:t>25.03.2026</a:t>
+              <a:t>15.06.2026</a:t>
             </a:fld>
             <a:endParaRPr lang="de-DE"/>
           </a:p>
@@ -2904,7 +2910,7 @@
           <a:p>
             <a:fld id="{3251E1E4-3A38-47F6-9719-E931542195E7}" type="datetimeFigureOut">
               <a:rPr lang="de-DE" smtClean="0"/>
-              <a:t>25.03.2026</a:t>
+              <a:t>15.06.2026</a:t>
             </a:fld>
             <a:endParaRPr lang="de-DE"/>
           </a:p>
@@ -3367,8 +3373,8 @@
           </a:p>
         </p:txBody>
       </p:sp>
-      <mc:AlternateContent xmlns:mc="http://schemas.openxmlformats.org/markup-compatibility/2006">
-        <mc:Choice xmlns:a14="http://schemas.microsoft.com/office/drawing/2010/main" Requires="a14">
+      <mc:AlternateContent xmlns:mc="http://schemas.openxmlformats.org/markup-compatibility/2006" xmlns:a14="http://schemas.microsoft.com/office/drawing/2010/main">
+        <mc:Choice Requires="a14">
           <p:sp>
             <p:nvSpPr>
               <p:cNvPr id="6" name="Rechteck 5">
@@ -3452,7 +3458,7 @@
             </p:txBody>
           </p:sp>
         </mc:Choice>
-        <mc:Fallback>
+        <mc:Fallback xmlns="">
           <p:sp>
             <p:nvSpPr>
               <p:cNvPr id="6" name="Rechteck 5">
@@ -4183,8 +4189,8 @@
           </a:p>
         </p:txBody>
       </p:sp>
-      <mc:AlternateContent xmlns:mc="http://schemas.openxmlformats.org/markup-compatibility/2006">
-        <mc:Choice xmlns:a14="http://schemas.microsoft.com/office/drawing/2010/main" Requires="a14">
+      <mc:AlternateContent xmlns:mc="http://schemas.openxmlformats.org/markup-compatibility/2006" xmlns:a14="http://schemas.microsoft.com/office/drawing/2010/main">
+        <mc:Choice Requires="a14">
           <p:sp>
             <p:nvSpPr>
               <p:cNvPr id="47" name="Rechteck 46">
@@ -4268,7 +4274,7 @@
             </p:txBody>
           </p:sp>
         </mc:Choice>
-        <mc:Fallback>
+        <mc:Fallback xmlns="">
           <p:sp>
             <p:nvSpPr>
               <p:cNvPr id="47" name="Rechteck 46">
@@ -4360,8 +4366,8 @@
           </a:p>
         </p:txBody>
       </p:sp>
-      <mc:AlternateContent xmlns:mc="http://schemas.openxmlformats.org/markup-compatibility/2006">
-        <mc:Choice xmlns:a14="http://schemas.microsoft.com/office/drawing/2010/main" Requires="a14">
+      <mc:AlternateContent xmlns:mc="http://schemas.openxmlformats.org/markup-compatibility/2006" xmlns:a14="http://schemas.microsoft.com/office/drawing/2010/main">
+        <mc:Choice Requires="a14">
           <p:sp>
             <p:nvSpPr>
               <p:cNvPr id="51" name="Rechteck 50">
@@ -4445,7 +4451,7 @@
             </p:txBody>
           </p:sp>
         </mc:Choice>
-        <mc:Fallback>
+        <mc:Fallback xmlns="">
           <p:sp>
             <p:nvSpPr>
               <p:cNvPr id="51" name="Rechteck 50">
@@ -4493,8 +4499,8 @@
           </p:sp>
         </mc:Fallback>
       </mc:AlternateContent>
-      <mc:AlternateContent xmlns:mc="http://schemas.openxmlformats.org/markup-compatibility/2006">
-        <mc:Choice xmlns:a14="http://schemas.microsoft.com/office/drawing/2010/main" Requires="a14">
+      <mc:AlternateContent xmlns:mc="http://schemas.openxmlformats.org/markup-compatibility/2006" xmlns:a14="http://schemas.microsoft.com/office/drawing/2010/main">
+        <mc:Choice Requires="a14">
           <p:sp>
             <p:nvSpPr>
               <p:cNvPr id="56" name="Rechteck 55">
@@ -4578,7 +4584,7 @@
             </p:txBody>
           </p:sp>
         </mc:Choice>
-        <mc:Fallback>
+        <mc:Fallback xmlns="">
           <p:sp>
             <p:nvSpPr>
               <p:cNvPr id="56" name="Rechteck 55">
@@ -4626,8 +4632,8 @@
           </p:sp>
         </mc:Fallback>
       </mc:AlternateContent>
-      <mc:AlternateContent xmlns:mc="http://schemas.openxmlformats.org/markup-compatibility/2006">
-        <mc:Choice xmlns:a14="http://schemas.microsoft.com/office/drawing/2010/main" Requires="a14">
+      <mc:AlternateContent xmlns:mc="http://schemas.openxmlformats.org/markup-compatibility/2006" xmlns:a14="http://schemas.microsoft.com/office/drawing/2010/main">
+        <mc:Choice Requires="a14">
           <p:sp>
             <p:nvSpPr>
               <p:cNvPr id="57" name="Rechteck 56">
@@ -4698,7 +4704,7 @@
             </p:txBody>
           </p:sp>
         </mc:Choice>
-        <mc:Fallback>
+        <mc:Fallback xmlns="">
           <p:sp>
             <p:nvSpPr>
               <p:cNvPr id="57" name="Rechteck 56">
@@ -4746,8 +4752,8 @@
           </p:sp>
         </mc:Fallback>
       </mc:AlternateContent>
-      <mc:AlternateContent xmlns:mc="http://schemas.openxmlformats.org/markup-compatibility/2006">
-        <mc:Choice xmlns:a14="http://schemas.microsoft.com/office/drawing/2010/main" Requires="a14">
+      <mc:AlternateContent xmlns:mc="http://schemas.openxmlformats.org/markup-compatibility/2006" xmlns:a14="http://schemas.microsoft.com/office/drawing/2010/main">
+        <mc:Choice Requires="a14">
           <p:sp>
             <p:nvSpPr>
               <p:cNvPr id="58" name="Rechteck 57">
@@ -4812,7 +4818,7 @@
             </p:txBody>
           </p:sp>
         </mc:Choice>
-        <mc:Fallback>
+        <mc:Fallback xmlns="">
           <p:sp>
             <p:nvSpPr>
               <p:cNvPr id="58" name="Rechteck 57">
@@ -4860,8 +4866,8 @@
           </p:sp>
         </mc:Fallback>
       </mc:AlternateContent>
-      <mc:AlternateContent xmlns:mc="http://schemas.openxmlformats.org/markup-compatibility/2006">
-        <mc:Choice xmlns:a14="http://schemas.microsoft.com/office/drawing/2010/main" Requires="a14">
+      <mc:AlternateContent xmlns:mc="http://schemas.openxmlformats.org/markup-compatibility/2006" xmlns:a14="http://schemas.microsoft.com/office/drawing/2010/main">
+        <mc:Choice Requires="a14">
           <p:sp>
             <p:nvSpPr>
               <p:cNvPr id="59" name="Rechteck 58">
@@ -4926,7 +4932,7 @@
             </p:txBody>
           </p:sp>
         </mc:Choice>
-        <mc:Fallback>
+        <mc:Fallback xmlns="">
           <p:sp>
             <p:nvSpPr>
               <p:cNvPr id="59" name="Rechteck 58">
@@ -4978,6 +4984,5328 @@
     <p:extLst>
       <p:ext uri="{BB962C8B-B14F-4D97-AF65-F5344CB8AC3E}">
         <p14:creationId xmlns:p14="http://schemas.microsoft.com/office/powerpoint/2010/main" val="1577972709"/>
+      </p:ext>
+    </p:extLst>
+  </p:cSld>
+  <p:clrMapOvr>
+    <a:masterClrMapping/>
+  </p:clrMapOvr>
+</p:sld>
+</file>
+
+<file path=ppt/slides/slide2.xml><?xml version="1.0" encoding="utf-8"?>
+<p:sld xmlns:a="http://schemas.openxmlformats.org/drawingml/2006/main" xmlns:r="http://schemas.openxmlformats.org/officeDocument/2006/relationships" xmlns:p="http://schemas.openxmlformats.org/presentationml/2006/main">
+  <p:cSld>
+    <p:spTree>
+      <p:nvGrpSpPr>
+        <p:cNvPr id="1" name=""/>
+        <p:cNvGrpSpPr/>
+        <p:nvPr/>
+      </p:nvGrpSpPr>
+      <p:grpSpPr>
+        <a:xfrm>
+          <a:off x="0" y="0"/>
+          <a:ext cx="0" cy="0"/>
+          <a:chOff x="0" y="0"/>
+          <a:chExt cx="0" cy="0"/>
+        </a:xfrm>
+      </p:grpSpPr>
+      <p:sp>
+        <p:nvSpPr>
+          <p:cNvPr id="4" name="Freihandform: Form 3">
+            <a:extLst>
+              <a:ext uri="{FF2B5EF4-FFF2-40B4-BE49-F238E27FC236}">
+                <a16:creationId xmlns:a16="http://schemas.microsoft.com/office/drawing/2014/main" id="{6140FC2C-88E0-D6DD-FEEC-026DF69472FC}"/>
+              </a:ext>
+            </a:extLst>
+          </p:cNvPr>
+          <p:cNvSpPr/>
+          <p:nvPr/>
+        </p:nvSpPr>
+        <p:spPr>
+          <a:xfrm>
+            <a:off x="3711157" y="1131683"/>
+            <a:ext cx="3125549" cy="4074092"/>
+          </a:xfrm>
+          <a:custGeom>
+            <a:avLst/>
+            <a:gdLst>
+              <a:gd name="csX0" fmla="*/ 0 w 2888056"/>
+              <a:gd name="csY0" fmla="*/ 4146487 h 4146487"/>
+              <a:gd name="csX1" fmla="*/ 0 w 2888056"/>
+              <a:gd name="csY1" fmla="*/ 199176 h 4146487"/>
+              <a:gd name="csX2" fmla="*/ 2879002 w 2888056"/>
+              <a:gd name="csY2" fmla="*/ 199176 h 4146487"/>
+              <a:gd name="csX3" fmla="*/ 2888056 w 2888056"/>
+              <a:gd name="csY3" fmla="*/ 0 h 4146487"/>
+              <a:gd name="csX4" fmla="*/ 2888056 w 2888056"/>
+              <a:gd name="csY4" fmla="*/ 1430447 h 4146487"/>
+              <a:gd name="csX5" fmla="*/ 289711 w 2888056"/>
+              <a:gd name="csY5" fmla="*/ 1430447 h 4146487"/>
+              <a:gd name="csX6" fmla="*/ 289711 w 2888056"/>
+              <a:gd name="csY6" fmla="*/ 4137433 h 4146487"/>
+              <a:gd name="csX7" fmla="*/ 0 w 2888056"/>
+              <a:gd name="csY7" fmla="*/ 4146487 h 4146487"/>
+              <a:gd name="csX0" fmla="*/ 0 w 2888056"/>
+              <a:gd name="csY0" fmla="*/ 3947311 h 3947311"/>
+              <a:gd name="csX1" fmla="*/ 0 w 2888056"/>
+              <a:gd name="csY1" fmla="*/ 0 h 3947311"/>
+              <a:gd name="csX2" fmla="*/ 2879002 w 2888056"/>
+              <a:gd name="csY2" fmla="*/ 0 h 3947311"/>
+              <a:gd name="csX3" fmla="*/ 2888056 w 2888056"/>
+              <a:gd name="csY3" fmla="*/ 3947311 h 3947311"/>
+              <a:gd name="csX4" fmla="*/ 2888056 w 2888056"/>
+              <a:gd name="csY4" fmla="*/ 1231271 h 3947311"/>
+              <a:gd name="csX5" fmla="*/ 289711 w 2888056"/>
+              <a:gd name="csY5" fmla="*/ 1231271 h 3947311"/>
+              <a:gd name="csX6" fmla="*/ 289711 w 2888056"/>
+              <a:gd name="csY6" fmla="*/ 3938257 h 3947311"/>
+              <a:gd name="csX7" fmla="*/ 0 w 2888056"/>
+              <a:gd name="csY7" fmla="*/ 3947311 h 3947311"/>
+              <a:gd name="csX0" fmla="*/ 0 w 2888056"/>
+              <a:gd name="csY0" fmla="*/ 3947311 h 3947311"/>
+              <a:gd name="csX1" fmla="*/ 0 w 2888056"/>
+              <a:gd name="csY1" fmla="*/ 0 h 3947311"/>
+              <a:gd name="csX2" fmla="*/ 2879002 w 2888056"/>
+              <a:gd name="csY2" fmla="*/ 0 h 3947311"/>
+              <a:gd name="csX3" fmla="*/ 2888056 w 2888056"/>
+              <a:gd name="csY3" fmla="*/ 1231271 h 3947311"/>
+              <a:gd name="csX4" fmla="*/ 289711 w 2888056"/>
+              <a:gd name="csY4" fmla="*/ 1231271 h 3947311"/>
+              <a:gd name="csX5" fmla="*/ 289711 w 2888056"/>
+              <a:gd name="csY5" fmla="*/ 3938257 h 3947311"/>
+              <a:gd name="csX6" fmla="*/ 0 w 2888056"/>
+              <a:gd name="csY6" fmla="*/ 3947311 h 3947311"/>
+              <a:gd name="csX0" fmla="*/ 0 w 2888056"/>
+              <a:gd name="csY0" fmla="*/ 3947311 h 4362760"/>
+              <a:gd name="csX1" fmla="*/ 0 w 2888056"/>
+              <a:gd name="csY1" fmla="*/ 0 h 4362760"/>
+              <a:gd name="csX2" fmla="*/ 2879002 w 2888056"/>
+              <a:gd name="csY2" fmla="*/ 0 h 4362760"/>
+              <a:gd name="csX3" fmla="*/ 2888056 w 2888056"/>
+              <a:gd name="csY3" fmla="*/ 1231271 h 4362760"/>
+              <a:gd name="csX4" fmla="*/ 289711 w 2888056"/>
+              <a:gd name="csY4" fmla="*/ 1231271 h 4362760"/>
+              <a:gd name="csX5" fmla="*/ 289711 w 2888056"/>
+              <a:gd name="csY5" fmla="*/ 3938257 h 4362760"/>
+              <a:gd name="csX6" fmla="*/ 0 w 2888056"/>
+              <a:gd name="csY6" fmla="*/ 3947311 h 4362760"/>
+              <a:gd name="csX0" fmla="*/ 224400 w 3112456"/>
+              <a:gd name="csY0" fmla="*/ 3947311 h 4362760"/>
+              <a:gd name="csX1" fmla="*/ 224400 w 3112456"/>
+              <a:gd name="csY1" fmla="*/ 0 h 4362760"/>
+              <a:gd name="csX2" fmla="*/ 3103402 w 3112456"/>
+              <a:gd name="csY2" fmla="*/ 0 h 4362760"/>
+              <a:gd name="csX3" fmla="*/ 3112456 w 3112456"/>
+              <a:gd name="csY3" fmla="*/ 1231271 h 4362760"/>
+              <a:gd name="csX4" fmla="*/ 514111 w 3112456"/>
+              <a:gd name="csY4" fmla="*/ 1231271 h 4362760"/>
+              <a:gd name="csX5" fmla="*/ 514111 w 3112456"/>
+              <a:gd name="csY5" fmla="*/ 3938257 h 4362760"/>
+              <a:gd name="csX6" fmla="*/ 224400 w 3112456"/>
+              <a:gd name="csY6" fmla="*/ 3947311 h 4362760"/>
+              <a:gd name="csX0" fmla="*/ 224400 w 3112456"/>
+              <a:gd name="csY0" fmla="*/ 3947311 h 4362760"/>
+              <a:gd name="csX1" fmla="*/ 224400 w 3112456"/>
+              <a:gd name="csY1" fmla="*/ 0 h 4362760"/>
+              <a:gd name="csX2" fmla="*/ 3103402 w 3112456"/>
+              <a:gd name="csY2" fmla="*/ 0 h 4362760"/>
+              <a:gd name="csX3" fmla="*/ 3112456 w 3112456"/>
+              <a:gd name="csY3" fmla="*/ 1231271 h 4362760"/>
+              <a:gd name="csX4" fmla="*/ 514111 w 3112456"/>
+              <a:gd name="csY4" fmla="*/ 1231271 h 4362760"/>
+              <a:gd name="csX5" fmla="*/ 514111 w 3112456"/>
+              <a:gd name="csY5" fmla="*/ 3938257 h 4362760"/>
+              <a:gd name="csX6" fmla="*/ 224400 w 3112456"/>
+              <a:gd name="csY6" fmla="*/ 3947311 h 4362760"/>
+              <a:gd name="csX0" fmla="*/ 224400 w 3450366"/>
+              <a:gd name="csY0" fmla="*/ 3947311 h 4362760"/>
+              <a:gd name="csX1" fmla="*/ 224400 w 3450366"/>
+              <a:gd name="csY1" fmla="*/ 0 h 4362760"/>
+              <a:gd name="csX2" fmla="*/ 3103402 w 3450366"/>
+              <a:gd name="csY2" fmla="*/ 0 h 4362760"/>
+              <a:gd name="csX3" fmla="*/ 3112456 w 3450366"/>
+              <a:gd name="csY3" fmla="*/ 1231271 h 4362760"/>
+              <a:gd name="csX4" fmla="*/ 514111 w 3450366"/>
+              <a:gd name="csY4" fmla="*/ 1231271 h 4362760"/>
+              <a:gd name="csX5" fmla="*/ 514111 w 3450366"/>
+              <a:gd name="csY5" fmla="*/ 3938257 h 4362760"/>
+              <a:gd name="csX6" fmla="*/ 224400 w 3450366"/>
+              <a:gd name="csY6" fmla="*/ 3947311 h 4362760"/>
+              <a:gd name="csX0" fmla="*/ 224400 w 3466512"/>
+              <a:gd name="csY0" fmla="*/ 3947311 h 4362760"/>
+              <a:gd name="csX1" fmla="*/ 224400 w 3466512"/>
+              <a:gd name="csY1" fmla="*/ 0 h 4362760"/>
+              <a:gd name="csX2" fmla="*/ 3103402 w 3466512"/>
+              <a:gd name="csY2" fmla="*/ 0 h 4362760"/>
+              <a:gd name="csX3" fmla="*/ 3112456 w 3466512"/>
+              <a:gd name="csY3" fmla="*/ 1231271 h 4362760"/>
+              <a:gd name="csX4" fmla="*/ 514111 w 3466512"/>
+              <a:gd name="csY4" fmla="*/ 1231271 h 4362760"/>
+              <a:gd name="csX5" fmla="*/ 514111 w 3466512"/>
+              <a:gd name="csY5" fmla="*/ 3938257 h 4362760"/>
+              <a:gd name="csX6" fmla="*/ 224400 w 3466512"/>
+              <a:gd name="csY6" fmla="*/ 3947311 h 4362760"/>
+              <a:gd name="csX0" fmla="*/ 372873 w 3614985"/>
+              <a:gd name="csY0" fmla="*/ 3947311 h 4362760"/>
+              <a:gd name="csX1" fmla="*/ 372873 w 3614985"/>
+              <a:gd name="csY1" fmla="*/ 0 h 4362760"/>
+              <a:gd name="csX2" fmla="*/ 3251875 w 3614985"/>
+              <a:gd name="csY2" fmla="*/ 0 h 4362760"/>
+              <a:gd name="csX3" fmla="*/ 3260929 w 3614985"/>
+              <a:gd name="csY3" fmla="*/ 1231271 h 4362760"/>
+              <a:gd name="csX4" fmla="*/ 662584 w 3614985"/>
+              <a:gd name="csY4" fmla="*/ 1231271 h 4362760"/>
+              <a:gd name="csX5" fmla="*/ 662584 w 3614985"/>
+              <a:gd name="csY5" fmla="*/ 3938257 h 4362760"/>
+              <a:gd name="csX6" fmla="*/ 372873 w 3614985"/>
+              <a:gd name="csY6" fmla="*/ 3947311 h 4362760"/>
+              <a:gd name="csX0" fmla="*/ 372873 w 3614985"/>
+              <a:gd name="csY0" fmla="*/ 3947311 h 4362760"/>
+              <a:gd name="csX1" fmla="*/ 372873 w 3614985"/>
+              <a:gd name="csY1" fmla="*/ 0 h 4362760"/>
+              <a:gd name="csX2" fmla="*/ 400035 w 3614985"/>
+              <a:gd name="csY2" fmla="*/ 9053 h 4362760"/>
+              <a:gd name="csX3" fmla="*/ 3251875 w 3614985"/>
+              <a:gd name="csY3" fmla="*/ 0 h 4362760"/>
+              <a:gd name="csX4" fmla="*/ 3260929 w 3614985"/>
+              <a:gd name="csY4" fmla="*/ 1231271 h 4362760"/>
+              <a:gd name="csX5" fmla="*/ 662584 w 3614985"/>
+              <a:gd name="csY5" fmla="*/ 1231271 h 4362760"/>
+              <a:gd name="csX6" fmla="*/ 662584 w 3614985"/>
+              <a:gd name="csY6" fmla="*/ 3938257 h 4362760"/>
+              <a:gd name="csX7" fmla="*/ 372873 w 3614985"/>
+              <a:gd name="csY7" fmla="*/ 3947311 h 4362760"/>
+              <a:gd name="csX0" fmla="*/ 34538 w 3244007"/>
+              <a:gd name="csY0" fmla="*/ 4239704 h 4655153"/>
+              <a:gd name="csX1" fmla="*/ 34538 w 3244007"/>
+              <a:gd name="csY1" fmla="*/ 292393 h 4655153"/>
+              <a:gd name="csX2" fmla="*/ 297090 w 3244007"/>
+              <a:gd name="csY2" fmla="*/ 292393 h 4655153"/>
+              <a:gd name="csX3" fmla="*/ 2913540 w 3244007"/>
+              <a:gd name="csY3" fmla="*/ 292393 h 4655153"/>
+              <a:gd name="csX4" fmla="*/ 2922594 w 3244007"/>
+              <a:gd name="csY4" fmla="*/ 1523664 h 4655153"/>
+              <a:gd name="csX5" fmla="*/ 324249 w 3244007"/>
+              <a:gd name="csY5" fmla="*/ 1523664 h 4655153"/>
+              <a:gd name="csX6" fmla="*/ 324249 w 3244007"/>
+              <a:gd name="csY6" fmla="*/ 4230650 h 4655153"/>
+              <a:gd name="csX7" fmla="*/ 34538 w 3244007"/>
+              <a:gd name="csY7" fmla="*/ 4239704 h 4655153"/>
+              <a:gd name="csX0" fmla="*/ 34538 w 3244007"/>
+              <a:gd name="csY0" fmla="*/ 4239704 h 4655153"/>
+              <a:gd name="csX1" fmla="*/ 34538 w 3244007"/>
+              <a:gd name="csY1" fmla="*/ 292393 h 4655153"/>
+              <a:gd name="csX2" fmla="*/ 297090 w 3244007"/>
+              <a:gd name="csY2" fmla="*/ 292393 h 4655153"/>
+              <a:gd name="csX3" fmla="*/ 2913540 w 3244007"/>
+              <a:gd name="csY3" fmla="*/ 292393 h 4655153"/>
+              <a:gd name="csX4" fmla="*/ 2922594 w 3244007"/>
+              <a:gd name="csY4" fmla="*/ 1523664 h 4655153"/>
+              <a:gd name="csX5" fmla="*/ 324249 w 3244007"/>
+              <a:gd name="csY5" fmla="*/ 1523664 h 4655153"/>
+              <a:gd name="csX6" fmla="*/ 324249 w 3244007"/>
+              <a:gd name="csY6" fmla="*/ 4230650 h 4655153"/>
+              <a:gd name="csX7" fmla="*/ 34538 w 3244007"/>
+              <a:gd name="csY7" fmla="*/ 4239704 h 4655153"/>
+              <a:gd name="csX0" fmla="*/ 34538 w 3244007"/>
+              <a:gd name="csY0" fmla="*/ 4239704 h 4655153"/>
+              <a:gd name="csX1" fmla="*/ 34538 w 3244007"/>
+              <a:gd name="csY1" fmla="*/ 292393 h 4655153"/>
+              <a:gd name="csX2" fmla="*/ 297090 w 3244007"/>
+              <a:gd name="csY2" fmla="*/ 292393 h 4655153"/>
+              <a:gd name="csX3" fmla="*/ 2913540 w 3244007"/>
+              <a:gd name="csY3" fmla="*/ 292393 h 4655153"/>
+              <a:gd name="csX4" fmla="*/ 2922594 w 3244007"/>
+              <a:gd name="csY4" fmla="*/ 1523664 h 4655153"/>
+              <a:gd name="csX5" fmla="*/ 324249 w 3244007"/>
+              <a:gd name="csY5" fmla="*/ 1523664 h 4655153"/>
+              <a:gd name="csX6" fmla="*/ 324249 w 3244007"/>
+              <a:gd name="csY6" fmla="*/ 4230650 h 4655153"/>
+              <a:gd name="csX7" fmla="*/ 34538 w 3244007"/>
+              <a:gd name="csY7" fmla="*/ 4239704 h 4655153"/>
+              <a:gd name="csX0" fmla="*/ 148603 w 3358072"/>
+              <a:gd name="csY0" fmla="*/ 4038517 h 4453966"/>
+              <a:gd name="csX1" fmla="*/ 148603 w 3358072"/>
+              <a:gd name="csY1" fmla="*/ 91206 h 4453966"/>
+              <a:gd name="csX2" fmla="*/ 411155 w 3358072"/>
+              <a:gd name="csY2" fmla="*/ 91206 h 4453966"/>
+              <a:gd name="csX3" fmla="*/ 3027605 w 3358072"/>
+              <a:gd name="csY3" fmla="*/ 91206 h 4453966"/>
+              <a:gd name="csX4" fmla="*/ 3036659 w 3358072"/>
+              <a:gd name="csY4" fmla="*/ 1322477 h 4453966"/>
+              <a:gd name="csX5" fmla="*/ 438314 w 3358072"/>
+              <a:gd name="csY5" fmla="*/ 1322477 h 4453966"/>
+              <a:gd name="csX6" fmla="*/ 438314 w 3358072"/>
+              <a:gd name="csY6" fmla="*/ 4029463 h 4453966"/>
+              <a:gd name="csX7" fmla="*/ 148603 w 3358072"/>
+              <a:gd name="csY7" fmla="*/ 4038517 h 4453966"/>
+              <a:gd name="csX0" fmla="*/ 57435 w 3266904"/>
+              <a:gd name="csY0" fmla="*/ 4038517 h 4453966"/>
+              <a:gd name="csX1" fmla="*/ 57435 w 3266904"/>
+              <a:gd name="csY1" fmla="*/ 91206 h 4453966"/>
+              <a:gd name="csX2" fmla="*/ 319987 w 3266904"/>
+              <a:gd name="csY2" fmla="*/ 91206 h 4453966"/>
+              <a:gd name="csX3" fmla="*/ 2936437 w 3266904"/>
+              <a:gd name="csY3" fmla="*/ 91206 h 4453966"/>
+              <a:gd name="csX4" fmla="*/ 2945491 w 3266904"/>
+              <a:gd name="csY4" fmla="*/ 1322477 h 4453966"/>
+              <a:gd name="csX5" fmla="*/ 347146 w 3266904"/>
+              <a:gd name="csY5" fmla="*/ 1322477 h 4453966"/>
+              <a:gd name="csX6" fmla="*/ 347146 w 3266904"/>
+              <a:gd name="csY6" fmla="*/ 4029463 h 4453966"/>
+              <a:gd name="csX7" fmla="*/ 57435 w 3266904"/>
+              <a:gd name="csY7" fmla="*/ 4038517 h 4453966"/>
+              <a:gd name="csX0" fmla="*/ 39095 w 3244085"/>
+              <a:gd name="csY0" fmla="*/ 4275272 h 4690721"/>
+              <a:gd name="csX1" fmla="*/ 39095 w 3244085"/>
+              <a:gd name="csY1" fmla="*/ 327961 h 4690721"/>
+              <a:gd name="csX2" fmla="*/ 374075 w 3244085"/>
+              <a:gd name="csY2" fmla="*/ 228373 h 4690721"/>
+              <a:gd name="csX3" fmla="*/ 2918097 w 3244085"/>
+              <a:gd name="csY3" fmla="*/ 327961 h 4690721"/>
+              <a:gd name="csX4" fmla="*/ 2927151 w 3244085"/>
+              <a:gd name="csY4" fmla="*/ 1559232 h 4690721"/>
+              <a:gd name="csX5" fmla="*/ 328806 w 3244085"/>
+              <a:gd name="csY5" fmla="*/ 1559232 h 4690721"/>
+              <a:gd name="csX6" fmla="*/ 328806 w 3244085"/>
+              <a:gd name="csY6" fmla="*/ 4266218 h 4690721"/>
+              <a:gd name="csX7" fmla="*/ 39095 w 3244085"/>
+              <a:gd name="csY7" fmla="*/ 4275272 h 4690721"/>
+              <a:gd name="csX0" fmla="*/ 144671 w 3349661"/>
+              <a:gd name="csY0" fmla="*/ 4080494 h 4495943"/>
+              <a:gd name="csX1" fmla="*/ 144671 w 3349661"/>
+              <a:gd name="csY1" fmla="*/ 133183 h 4495943"/>
+              <a:gd name="csX2" fmla="*/ 479651 w 3349661"/>
+              <a:gd name="csY2" fmla="*/ 33595 h 4495943"/>
+              <a:gd name="csX3" fmla="*/ 3023673 w 3349661"/>
+              <a:gd name="csY3" fmla="*/ 133183 h 4495943"/>
+              <a:gd name="csX4" fmla="*/ 3032727 w 3349661"/>
+              <a:gd name="csY4" fmla="*/ 1364454 h 4495943"/>
+              <a:gd name="csX5" fmla="*/ 434382 w 3349661"/>
+              <a:gd name="csY5" fmla="*/ 1364454 h 4495943"/>
+              <a:gd name="csX6" fmla="*/ 434382 w 3349661"/>
+              <a:gd name="csY6" fmla="*/ 4071440 h 4495943"/>
+              <a:gd name="csX7" fmla="*/ 144671 w 3349661"/>
+              <a:gd name="csY7" fmla="*/ 4080494 h 4495943"/>
+              <a:gd name="csX0" fmla="*/ 76990 w 3281980"/>
+              <a:gd name="csY0" fmla="*/ 4080494 h 4495943"/>
+              <a:gd name="csX1" fmla="*/ 76990 w 3281980"/>
+              <a:gd name="csY1" fmla="*/ 133183 h 4495943"/>
+              <a:gd name="csX2" fmla="*/ 411970 w 3281980"/>
+              <a:gd name="csY2" fmla="*/ 33595 h 4495943"/>
+              <a:gd name="csX3" fmla="*/ 2955992 w 3281980"/>
+              <a:gd name="csY3" fmla="*/ 133183 h 4495943"/>
+              <a:gd name="csX4" fmla="*/ 2965046 w 3281980"/>
+              <a:gd name="csY4" fmla="*/ 1364454 h 4495943"/>
+              <a:gd name="csX5" fmla="*/ 366701 w 3281980"/>
+              <a:gd name="csY5" fmla="*/ 1364454 h 4495943"/>
+              <a:gd name="csX6" fmla="*/ 366701 w 3281980"/>
+              <a:gd name="csY6" fmla="*/ 4071440 h 4495943"/>
+              <a:gd name="csX7" fmla="*/ 76990 w 3281980"/>
+              <a:gd name="csY7" fmla="*/ 4080494 h 4495943"/>
+              <a:gd name="csX0" fmla="*/ 41485 w 3246475"/>
+              <a:gd name="csY0" fmla="*/ 4080494 h 4495943"/>
+              <a:gd name="csX1" fmla="*/ 5273 w 3246475"/>
+              <a:gd name="csY1" fmla="*/ 4026173 h 4495943"/>
+              <a:gd name="csX2" fmla="*/ 41485 w 3246475"/>
+              <a:gd name="csY2" fmla="*/ 133183 h 4495943"/>
+              <a:gd name="csX3" fmla="*/ 376465 w 3246475"/>
+              <a:gd name="csY3" fmla="*/ 33595 h 4495943"/>
+              <a:gd name="csX4" fmla="*/ 2920487 w 3246475"/>
+              <a:gd name="csY4" fmla="*/ 133183 h 4495943"/>
+              <a:gd name="csX5" fmla="*/ 2929541 w 3246475"/>
+              <a:gd name="csY5" fmla="*/ 1364454 h 4495943"/>
+              <a:gd name="csX6" fmla="*/ 331196 w 3246475"/>
+              <a:gd name="csY6" fmla="*/ 1364454 h 4495943"/>
+              <a:gd name="csX7" fmla="*/ 331196 w 3246475"/>
+              <a:gd name="csY7" fmla="*/ 4071440 h 4495943"/>
+              <a:gd name="csX8" fmla="*/ 41485 w 3246475"/>
+              <a:gd name="csY8" fmla="*/ 4080494 h 4495943"/>
+              <a:gd name="csX0" fmla="*/ 47659 w 3252649"/>
+              <a:gd name="csY0" fmla="*/ 4263310 h 4463758"/>
+              <a:gd name="csX1" fmla="*/ 2394 w 3252649"/>
+              <a:gd name="csY1" fmla="*/ 4100347 h 4463758"/>
+              <a:gd name="csX2" fmla="*/ 47659 w 3252649"/>
+              <a:gd name="csY2" fmla="*/ 315999 h 4463758"/>
+              <a:gd name="csX3" fmla="*/ 382639 w 3252649"/>
+              <a:gd name="csY3" fmla="*/ 216411 h 4463758"/>
+              <a:gd name="csX4" fmla="*/ 2926661 w 3252649"/>
+              <a:gd name="csY4" fmla="*/ 315999 h 4463758"/>
+              <a:gd name="csX5" fmla="*/ 2935715 w 3252649"/>
+              <a:gd name="csY5" fmla="*/ 1547270 h 4463758"/>
+              <a:gd name="csX6" fmla="*/ 337370 w 3252649"/>
+              <a:gd name="csY6" fmla="*/ 1547270 h 4463758"/>
+              <a:gd name="csX7" fmla="*/ 337370 w 3252649"/>
+              <a:gd name="csY7" fmla="*/ 4254256 h 4463758"/>
+              <a:gd name="csX8" fmla="*/ 47659 w 3252649"/>
+              <a:gd name="csY8" fmla="*/ 4263310 h 4463758"/>
+              <a:gd name="csX0" fmla="*/ 47659 w 3252649"/>
+              <a:gd name="csY0" fmla="*/ 4263310 h 4457476"/>
+              <a:gd name="csX1" fmla="*/ 2394 w 3252649"/>
+              <a:gd name="csY1" fmla="*/ 4100347 h 4457476"/>
+              <a:gd name="csX2" fmla="*/ 47659 w 3252649"/>
+              <a:gd name="csY2" fmla="*/ 315999 h 4457476"/>
+              <a:gd name="csX3" fmla="*/ 382639 w 3252649"/>
+              <a:gd name="csY3" fmla="*/ 216411 h 4457476"/>
+              <a:gd name="csX4" fmla="*/ 2926661 w 3252649"/>
+              <a:gd name="csY4" fmla="*/ 315999 h 4457476"/>
+              <a:gd name="csX5" fmla="*/ 2935715 w 3252649"/>
+              <a:gd name="csY5" fmla="*/ 1547270 h 4457476"/>
+              <a:gd name="csX6" fmla="*/ 337370 w 3252649"/>
+              <a:gd name="csY6" fmla="*/ 1547270 h 4457476"/>
+              <a:gd name="csX7" fmla="*/ 337370 w 3252649"/>
+              <a:gd name="csY7" fmla="*/ 4254256 h 4457476"/>
+              <a:gd name="csX8" fmla="*/ 346425 w 3252649"/>
+              <a:gd name="csY8" fmla="*/ 4263310 h 4457476"/>
+              <a:gd name="csX9" fmla="*/ 47659 w 3252649"/>
+              <a:gd name="csY9" fmla="*/ 4263310 h 4457476"/>
+              <a:gd name="csX0" fmla="*/ 48050 w 3253040"/>
+              <a:gd name="csY0" fmla="*/ 4263310 h 4445407"/>
+              <a:gd name="csX1" fmla="*/ 2785 w 3253040"/>
+              <a:gd name="csY1" fmla="*/ 4100347 h 4445407"/>
+              <a:gd name="csX2" fmla="*/ 48050 w 3253040"/>
+              <a:gd name="csY2" fmla="*/ 315999 h 4445407"/>
+              <a:gd name="csX3" fmla="*/ 383030 w 3253040"/>
+              <a:gd name="csY3" fmla="*/ 216411 h 4445407"/>
+              <a:gd name="csX4" fmla="*/ 2927052 w 3253040"/>
+              <a:gd name="csY4" fmla="*/ 315999 h 4445407"/>
+              <a:gd name="csX5" fmla="*/ 2936106 w 3253040"/>
+              <a:gd name="csY5" fmla="*/ 1547270 h 4445407"/>
+              <a:gd name="csX6" fmla="*/ 337761 w 3253040"/>
+              <a:gd name="csY6" fmla="*/ 1547270 h 4445407"/>
+              <a:gd name="csX7" fmla="*/ 337761 w 3253040"/>
+              <a:gd name="csY7" fmla="*/ 4254256 h 4445407"/>
+              <a:gd name="csX8" fmla="*/ 392083 w 3253040"/>
+              <a:gd name="csY8" fmla="*/ 4027920 h 4445407"/>
+              <a:gd name="csX9" fmla="*/ 48050 w 3253040"/>
+              <a:gd name="csY9" fmla="*/ 4263310 h 4445407"/>
+              <a:gd name="csX0" fmla="*/ 48050 w 3253040"/>
+              <a:gd name="csY0" fmla="*/ 4263310 h 4445407"/>
+              <a:gd name="csX1" fmla="*/ 2785 w 3253040"/>
+              <a:gd name="csY1" fmla="*/ 4100347 h 4445407"/>
+              <a:gd name="csX2" fmla="*/ 48050 w 3253040"/>
+              <a:gd name="csY2" fmla="*/ 315999 h 4445407"/>
+              <a:gd name="csX3" fmla="*/ 383030 w 3253040"/>
+              <a:gd name="csY3" fmla="*/ 216411 h 4445407"/>
+              <a:gd name="csX4" fmla="*/ 2927052 w 3253040"/>
+              <a:gd name="csY4" fmla="*/ 315999 h 4445407"/>
+              <a:gd name="csX5" fmla="*/ 2936106 w 3253040"/>
+              <a:gd name="csY5" fmla="*/ 1547270 h 4445407"/>
+              <a:gd name="csX6" fmla="*/ 337761 w 3253040"/>
+              <a:gd name="csY6" fmla="*/ 1547270 h 4445407"/>
+              <a:gd name="csX7" fmla="*/ 355868 w 3253040"/>
+              <a:gd name="csY7" fmla="*/ 3991706 h 4445407"/>
+              <a:gd name="csX8" fmla="*/ 392083 w 3253040"/>
+              <a:gd name="csY8" fmla="*/ 4027920 h 4445407"/>
+              <a:gd name="csX9" fmla="*/ 48050 w 3253040"/>
+              <a:gd name="csY9" fmla="*/ 4263310 h 4445407"/>
+              <a:gd name="csX0" fmla="*/ 47660 w 3252650"/>
+              <a:gd name="csY0" fmla="*/ 4263310 h 4434228"/>
+              <a:gd name="csX1" fmla="*/ 2395 w 3252650"/>
+              <a:gd name="csY1" fmla="*/ 4100347 h 4434228"/>
+              <a:gd name="csX2" fmla="*/ 47660 w 3252650"/>
+              <a:gd name="csY2" fmla="*/ 315999 h 4434228"/>
+              <a:gd name="csX3" fmla="*/ 382640 w 3252650"/>
+              <a:gd name="csY3" fmla="*/ 216411 h 4434228"/>
+              <a:gd name="csX4" fmla="*/ 2926662 w 3252650"/>
+              <a:gd name="csY4" fmla="*/ 315999 h 4434228"/>
+              <a:gd name="csX5" fmla="*/ 2935716 w 3252650"/>
+              <a:gd name="csY5" fmla="*/ 1547270 h 4434228"/>
+              <a:gd name="csX6" fmla="*/ 337371 w 3252650"/>
+              <a:gd name="csY6" fmla="*/ 1547270 h 4434228"/>
+              <a:gd name="csX7" fmla="*/ 355478 w 3252650"/>
+              <a:gd name="csY7" fmla="*/ 3991706 h 4434228"/>
+              <a:gd name="csX8" fmla="*/ 328319 w 3252650"/>
+              <a:gd name="csY8" fmla="*/ 4263310 h 4434228"/>
+              <a:gd name="csX9" fmla="*/ 47660 w 3252650"/>
+              <a:gd name="csY9" fmla="*/ 4263310 h 4434228"/>
+              <a:gd name="csX0" fmla="*/ 47660 w 3252650"/>
+              <a:gd name="csY0" fmla="*/ 4263310 h 4434228"/>
+              <a:gd name="csX1" fmla="*/ 2395 w 3252650"/>
+              <a:gd name="csY1" fmla="*/ 4100347 h 4434228"/>
+              <a:gd name="csX2" fmla="*/ 47660 w 3252650"/>
+              <a:gd name="csY2" fmla="*/ 315999 h 4434228"/>
+              <a:gd name="csX3" fmla="*/ 382640 w 3252650"/>
+              <a:gd name="csY3" fmla="*/ 216411 h 4434228"/>
+              <a:gd name="csX4" fmla="*/ 2926662 w 3252650"/>
+              <a:gd name="csY4" fmla="*/ 315999 h 4434228"/>
+              <a:gd name="csX5" fmla="*/ 2935716 w 3252650"/>
+              <a:gd name="csY5" fmla="*/ 1547270 h 4434228"/>
+              <a:gd name="csX6" fmla="*/ 337371 w 3252650"/>
+              <a:gd name="csY6" fmla="*/ 1547270 h 4434228"/>
+              <a:gd name="csX7" fmla="*/ 346424 w 3252650"/>
+              <a:gd name="csY7" fmla="*/ 4064133 h 4434228"/>
+              <a:gd name="csX8" fmla="*/ 328319 w 3252650"/>
+              <a:gd name="csY8" fmla="*/ 4263310 h 4434228"/>
+              <a:gd name="csX9" fmla="*/ 47660 w 3252650"/>
+              <a:gd name="csY9" fmla="*/ 4263310 h 4434228"/>
+              <a:gd name="csX0" fmla="*/ 47660 w 3252650"/>
+              <a:gd name="csY0" fmla="*/ 4263310 h 4434228"/>
+              <a:gd name="csX1" fmla="*/ 2395 w 3252650"/>
+              <a:gd name="csY1" fmla="*/ 4100347 h 4434228"/>
+              <a:gd name="csX2" fmla="*/ 47660 w 3252650"/>
+              <a:gd name="csY2" fmla="*/ 315999 h 4434228"/>
+              <a:gd name="csX3" fmla="*/ 382640 w 3252650"/>
+              <a:gd name="csY3" fmla="*/ 216411 h 4434228"/>
+              <a:gd name="csX4" fmla="*/ 2926662 w 3252650"/>
+              <a:gd name="csY4" fmla="*/ 315999 h 4434228"/>
+              <a:gd name="csX5" fmla="*/ 2935716 w 3252650"/>
+              <a:gd name="csY5" fmla="*/ 1547270 h 4434228"/>
+              <a:gd name="csX6" fmla="*/ 337371 w 3252650"/>
+              <a:gd name="csY6" fmla="*/ 1547270 h 4434228"/>
+              <a:gd name="csX7" fmla="*/ 310212 w 3252650"/>
+              <a:gd name="csY7" fmla="*/ 1556325 h 4434228"/>
+              <a:gd name="csX8" fmla="*/ 346424 w 3252650"/>
+              <a:gd name="csY8" fmla="*/ 4064133 h 4434228"/>
+              <a:gd name="csX9" fmla="*/ 328319 w 3252650"/>
+              <a:gd name="csY9" fmla="*/ 4263310 h 4434228"/>
+              <a:gd name="csX10" fmla="*/ 47660 w 3252650"/>
+              <a:gd name="csY10" fmla="*/ 4263310 h 4434228"/>
+              <a:gd name="csX0" fmla="*/ 47660 w 3252650"/>
+              <a:gd name="csY0" fmla="*/ 4263310 h 4434228"/>
+              <a:gd name="csX1" fmla="*/ 2395 w 3252650"/>
+              <a:gd name="csY1" fmla="*/ 4100347 h 4434228"/>
+              <a:gd name="csX2" fmla="*/ 47660 w 3252650"/>
+              <a:gd name="csY2" fmla="*/ 315999 h 4434228"/>
+              <a:gd name="csX3" fmla="*/ 382640 w 3252650"/>
+              <a:gd name="csY3" fmla="*/ 216411 h 4434228"/>
+              <a:gd name="csX4" fmla="*/ 2926662 w 3252650"/>
+              <a:gd name="csY4" fmla="*/ 315999 h 4434228"/>
+              <a:gd name="csX5" fmla="*/ 2935716 w 3252650"/>
+              <a:gd name="csY5" fmla="*/ 1547270 h 4434228"/>
+              <a:gd name="csX6" fmla="*/ 337371 w 3252650"/>
+              <a:gd name="csY6" fmla="*/ 1547270 h 4434228"/>
+              <a:gd name="csX7" fmla="*/ 310212 w 3252650"/>
+              <a:gd name="csY7" fmla="*/ 1764555 h 4434228"/>
+              <a:gd name="csX8" fmla="*/ 346424 w 3252650"/>
+              <a:gd name="csY8" fmla="*/ 4064133 h 4434228"/>
+              <a:gd name="csX9" fmla="*/ 328319 w 3252650"/>
+              <a:gd name="csY9" fmla="*/ 4263310 h 4434228"/>
+              <a:gd name="csX10" fmla="*/ 47660 w 3252650"/>
+              <a:gd name="csY10" fmla="*/ 4263310 h 4434228"/>
+              <a:gd name="csX0" fmla="*/ 47660 w 3237901"/>
+              <a:gd name="csY0" fmla="*/ 4263310 h 4434228"/>
+              <a:gd name="csX1" fmla="*/ 2395 w 3237901"/>
+              <a:gd name="csY1" fmla="*/ 4100347 h 4434228"/>
+              <a:gd name="csX2" fmla="*/ 47660 w 3237901"/>
+              <a:gd name="csY2" fmla="*/ 315999 h 4434228"/>
+              <a:gd name="csX3" fmla="*/ 382640 w 3237901"/>
+              <a:gd name="csY3" fmla="*/ 216411 h 4434228"/>
+              <a:gd name="csX4" fmla="*/ 2926662 w 3237901"/>
+              <a:gd name="csY4" fmla="*/ 315999 h 4434228"/>
+              <a:gd name="csX5" fmla="*/ 2935716 w 3237901"/>
+              <a:gd name="csY5" fmla="*/ 1547270 h 4434228"/>
+              <a:gd name="csX6" fmla="*/ 572762 w 3237901"/>
+              <a:gd name="csY6" fmla="*/ 1547270 h 4434228"/>
+              <a:gd name="csX7" fmla="*/ 310212 w 3237901"/>
+              <a:gd name="csY7" fmla="*/ 1764555 h 4434228"/>
+              <a:gd name="csX8" fmla="*/ 346424 w 3237901"/>
+              <a:gd name="csY8" fmla="*/ 4064133 h 4434228"/>
+              <a:gd name="csX9" fmla="*/ 328319 w 3237901"/>
+              <a:gd name="csY9" fmla="*/ 4263310 h 4434228"/>
+              <a:gd name="csX10" fmla="*/ 47660 w 3237901"/>
+              <a:gd name="csY10" fmla="*/ 4263310 h 4434228"/>
+              <a:gd name="csX0" fmla="*/ 47660 w 3237901"/>
+              <a:gd name="csY0" fmla="*/ 4263310 h 4434228"/>
+              <a:gd name="csX1" fmla="*/ 2395 w 3237901"/>
+              <a:gd name="csY1" fmla="*/ 4100347 h 4434228"/>
+              <a:gd name="csX2" fmla="*/ 47660 w 3237901"/>
+              <a:gd name="csY2" fmla="*/ 315999 h 4434228"/>
+              <a:gd name="csX3" fmla="*/ 382640 w 3237901"/>
+              <a:gd name="csY3" fmla="*/ 216411 h 4434228"/>
+              <a:gd name="csX4" fmla="*/ 2926662 w 3237901"/>
+              <a:gd name="csY4" fmla="*/ 315999 h 4434228"/>
+              <a:gd name="csX5" fmla="*/ 2935716 w 3237901"/>
+              <a:gd name="csY5" fmla="*/ 1547270 h 4434228"/>
+              <a:gd name="csX6" fmla="*/ 572762 w 3237901"/>
+              <a:gd name="csY6" fmla="*/ 1547270 h 4434228"/>
+              <a:gd name="csX7" fmla="*/ 310212 w 3237901"/>
+              <a:gd name="csY7" fmla="*/ 1764555 h 4434228"/>
+              <a:gd name="csX8" fmla="*/ 346424 w 3237901"/>
+              <a:gd name="csY8" fmla="*/ 4064133 h 4434228"/>
+              <a:gd name="csX9" fmla="*/ 328319 w 3237901"/>
+              <a:gd name="csY9" fmla="*/ 4263310 h 4434228"/>
+              <a:gd name="csX10" fmla="*/ 47660 w 3237901"/>
+              <a:gd name="csY10" fmla="*/ 4263310 h 4434228"/>
+              <a:gd name="csX0" fmla="*/ 47660 w 3237901"/>
+              <a:gd name="csY0" fmla="*/ 4263310 h 4434228"/>
+              <a:gd name="csX1" fmla="*/ 2395 w 3237901"/>
+              <a:gd name="csY1" fmla="*/ 4100347 h 4434228"/>
+              <a:gd name="csX2" fmla="*/ 47660 w 3237901"/>
+              <a:gd name="csY2" fmla="*/ 315999 h 4434228"/>
+              <a:gd name="csX3" fmla="*/ 382640 w 3237901"/>
+              <a:gd name="csY3" fmla="*/ 216411 h 4434228"/>
+              <a:gd name="csX4" fmla="*/ 2926662 w 3237901"/>
+              <a:gd name="csY4" fmla="*/ 315999 h 4434228"/>
+              <a:gd name="csX5" fmla="*/ 2935716 w 3237901"/>
+              <a:gd name="csY5" fmla="*/ 1547270 h 4434228"/>
+              <a:gd name="csX6" fmla="*/ 572762 w 3237901"/>
+              <a:gd name="csY6" fmla="*/ 1547270 h 4434228"/>
+              <a:gd name="csX7" fmla="*/ 310212 w 3237901"/>
+              <a:gd name="csY7" fmla="*/ 1764555 h 4434228"/>
+              <a:gd name="csX8" fmla="*/ 346424 w 3237901"/>
+              <a:gd name="csY8" fmla="*/ 4064133 h 4434228"/>
+              <a:gd name="csX9" fmla="*/ 328319 w 3237901"/>
+              <a:gd name="csY9" fmla="*/ 4263310 h 4434228"/>
+              <a:gd name="csX10" fmla="*/ 47660 w 3237901"/>
+              <a:gd name="csY10" fmla="*/ 4263310 h 4434228"/>
+              <a:gd name="csX0" fmla="*/ 47660 w 3118841"/>
+              <a:gd name="csY0" fmla="*/ 4263310 h 4434228"/>
+              <a:gd name="csX1" fmla="*/ 2395 w 3118841"/>
+              <a:gd name="csY1" fmla="*/ 4100347 h 4434228"/>
+              <a:gd name="csX2" fmla="*/ 47660 w 3118841"/>
+              <a:gd name="csY2" fmla="*/ 315999 h 4434228"/>
+              <a:gd name="csX3" fmla="*/ 382640 w 3118841"/>
+              <a:gd name="csY3" fmla="*/ 216411 h 4434228"/>
+              <a:gd name="csX4" fmla="*/ 2926662 w 3118841"/>
+              <a:gd name="csY4" fmla="*/ 315999 h 4434228"/>
+              <a:gd name="csX5" fmla="*/ 2935716 w 3118841"/>
+              <a:gd name="csY5" fmla="*/ 1547270 h 4434228"/>
+              <a:gd name="csX6" fmla="*/ 2908558 w 3118841"/>
+              <a:gd name="csY6" fmla="*/ 1592539 h 4434228"/>
+              <a:gd name="csX7" fmla="*/ 572762 w 3118841"/>
+              <a:gd name="csY7" fmla="*/ 1547270 h 4434228"/>
+              <a:gd name="csX8" fmla="*/ 310212 w 3118841"/>
+              <a:gd name="csY8" fmla="*/ 1764555 h 4434228"/>
+              <a:gd name="csX9" fmla="*/ 346424 w 3118841"/>
+              <a:gd name="csY9" fmla="*/ 4064133 h 4434228"/>
+              <a:gd name="csX10" fmla="*/ 328319 w 3118841"/>
+              <a:gd name="csY10" fmla="*/ 4263310 h 4434228"/>
+              <a:gd name="csX11" fmla="*/ 47660 w 3118841"/>
+              <a:gd name="csY11" fmla="*/ 4263310 h 4434228"/>
+              <a:gd name="csX0" fmla="*/ 47660 w 3120911"/>
+              <a:gd name="csY0" fmla="*/ 4263310 h 4434228"/>
+              <a:gd name="csX1" fmla="*/ 2395 w 3120911"/>
+              <a:gd name="csY1" fmla="*/ 4100347 h 4434228"/>
+              <a:gd name="csX2" fmla="*/ 47660 w 3120911"/>
+              <a:gd name="csY2" fmla="*/ 315999 h 4434228"/>
+              <a:gd name="csX3" fmla="*/ 382640 w 3120911"/>
+              <a:gd name="csY3" fmla="*/ 216411 h 4434228"/>
+              <a:gd name="csX4" fmla="*/ 2926662 w 3120911"/>
+              <a:gd name="csY4" fmla="*/ 315999 h 4434228"/>
+              <a:gd name="csX5" fmla="*/ 2944771 w 3120911"/>
+              <a:gd name="csY5" fmla="*/ 316000 h 4434228"/>
+              <a:gd name="csX6" fmla="*/ 2935716 w 3120911"/>
+              <a:gd name="csY6" fmla="*/ 1547270 h 4434228"/>
+              <a:gd name="csX7" fmla="*/ 2908558 w 3120911"/>
+              <a:gd name="csY7" fmla="*/ 1592539 h 4434228"/>
+              <a:gd name="csX8" fmla="*/ 572762 w 3120911"/>
+              <a:gd name="csY8" fmla="*/ 1547270 h 4434228"/>
+              <a:gd name="csX9" fmla="*/ 310212 w 3120911"/>
+              <a:gd name="csY9" fmla="*/ 1764555 h 4434228"/>
+              <a:gd name="csX10" fmla="*/ 346424 w 3120911"/>
+              <a:gd name="csY10" fmla="*/ 4064133 h 4434228"/>
+              <a:gd name="csX11" fmla="*/ 328319 w 3120911"/>
+              <a:gd name="csY11" fmla="*/ 4263310 h 4434228"/>
+              <a:gd name="csX12" fmla="*/ 47660 w 3120911"/>
+              <a:gd name="csY12" fmla="*/ 4263310 h 4434228"/>
+              <a:gd name="csX0" fmla="*/ 47660 w 3159318"/>
+              <a:gd name="csY0" fmla="*/ 4263310 h 4434228"/>
+              <a:gd name="csX1" fmla="*/ 2395 w 3159318"/>
+              <a:gd name="csY1" fmla="*/ 4100347 h 4434228"/>
+              <a:gd name="csX2" fmla="*/ 47660 w 3159318"/>
+              <a:gd name="csY2" fmla="*/ 315999 h 4434228"/>
+              <a:gd name="csX3" fmla="*/ 382640 w 3159318"/>
+              <a:gd name="csY3" fmla="*/ 216411 h 4434228"/>
+              <a:gd name="csX4" fmla="*/ 2926662 w 3159318"/>
+              <a:gd name="csY4" fmla="*/ 315999 h 4434228"/>
+              <a:gd name="csX5" fmla="*/ 3044360 w 3159318"/>
+              <a:gd name="csY5" fmla="*/ 334107 h 4434228"/>
+              <a:gd name="csX6" fmla="*/ 2935716 w 3159318"/>
+              <a:gd name="csY6" fmla="*/ 1547270 h 4434228"/>
+              <a:gd name="csX7" fmla="*/ 2908558 w 3159318"/>
+              <a:gd name="csY7" fmla="*/ 1592539 h 4434228"/>
+              <a:gd name="csX8" fmla="*/ 572762 w 3159318"/>
+              <a:gd name="csY8" fmla="*/ 1547270 h 4434228"/>
+              <a:gd name="csX9" fmla="*/ 310212 w 3159318"/>
+              <a:gd name="csY9" fmla="*/ 1764555 h 4434228"/>
+              <a:gd name="csX10" fmla="*/ 346424 w 3159318"/>
+              <a:gd name="csY10" fmla="*/ 4064133 h 4434228"/>
+              <a:gd name="csX11" fmla="*/ 328319 w 3159318"/>
+              <a:gd name="csY11" fmla="*/ 4263310 h 4434228"/>
+              <a:gd name="csX12" fmla="*/ 47660 w 3159318"/>
+              <a:gd name="csY12" fmla="*/ 4263310 h 4434228"/>
+              <a:gd name="csX0" fmla="*/ 47660 w 3147874"/>
+              <a:gd name="csY0" fmla="*/ 4258649 h 4429567"/>
+              <a:gd name="csX1" fmla="*/ 2395 w 3147874"/>
+              <a:gd name="csY1" fmla="*/ 4095686 h 4429567"/>
+              <a:gd name="csX2" fmla="*/ 47660 w 3147874"/>
+              <a:gd name="csY2" fmla="*/ 311338 h 4429567"/>
+              <a:gd name="csX3" fmla="*/ 382640 w 3147874"/>
+              <a:gd name="csY3" fmla="*/ 211750 h 4429567"/>
+              <a:gd name="csX4" fmla="*/ 2908555 w 3147874"/>
+              <a:gd name="csY4" fmla="*/ 202696 h 4429567"/>
+              <a:gd name="csX5" fmla="*/ 3044360 w 3147874"/>
+              <a:gd name="csY5" fmla="*/ 329446 h 4429567"/>
+              <a:gd name="csX6" fmla="*/ 2935716 w 3147874"/>
+              <a:gd name="csY6" fmla="*/ 1542609 h 4429567"/>
+              <a:gd name="csX7" fmla="*/ 2908558 w 3147874"/>
+              <a:gd name="csY7" fmla="*/ 1587878 h 4429567"/>
+              <a:gd name="csX8" fmla="*/ 572762 w 3147874"/>
+              <a:gd name="csY8" fmla="*/ 1542609 h 4429567"/>
+              <a:gd name="csX9" fmla="*/ 310212 w 3147874"/>
+              <a:gd name="csY9" fmla="*/ 1759894 h 4429567"/>
+              <a:gd name="csX10" fmla="*/ 346424 w 3147874"/>
+              <a:gd name="csY10" fmla="*/ 4059472 h 4429567"/>
+              <a:gd name="csX11" fmla="*/ 328319 w 3147874"/>
+              <a:gd name="csY11" fmla="*/ 4258649 h 4429567"/>
+              <a:gd name="csX12" fmla="*/ 47660 w 3147874"/>
+              <a:gd name="csY12" fmla="*/ 4258649 h 4429567"/>
+              <a:gd name="csX0" fmla="*/ 47660 w 3085643"/>
+              <a:gd name="csY0" fmla="*/ 4258649 h 4429567"/>
+              <a:gd name="csX1" fmla="*/ 2395 w 3085643"/>
+              <a:gd name="csY1" fmla="*/ 4095686 h 4429567"/>
+              <a:gd name="csX2" fmla="*/ 47660 w 3085643"/>
+              <a:gd name="csY2" fmla="*/ 311338 h 4429567"/>
+              <a:gd name="csX3" fmla="*/ 382640 w 3085643"/>
+              <a:gd name="csY3" fmla="*/ 211750 h 4429567"/>
+              <a:gd name="csX4" fmla="*/ 2908555 w 3085643"/>
+              <a:gd name="csY4" fmla="*/ 202696 h 4429567"/>
+              <a:gd name="csX5" fmla="*/ 3044360 w 3085643"/>
+              <a:gd name="csY5" fmla="*/ 329446 h 4429567"/>
+              <a:gd name="csX6" fmla="*/ 2935716 w 3085643"/>
+              <a:gd name="csY6" fmla="*/ 1542609 h 4429567"/>
+              <a:gd name="csX7" fmla="*/ 2908558 w 3085643"/>
+              <a:gd name="csY7" fmla="*/ 1587878 h 4429567"/>
+              <a:gd name="csX8" fmla="*/ 572762 w 3085643"/>
+              <a:gd name="csY8" fmla="*/ 1542609 h 4429567"/>
+              <a:gd name="csX9" fmla="*/ 310212 w 3085643"/>
+              <a:gd name="csY9" fmla="*/ 1759894 h 4429567"/>
+              <a:gd name="csX10" fmla="*/ 346424 w 3085643"/>
+              <a:gd name="csY10" fmla="*/ 4059472 h 4429567"/>
+              <a:gd name="csX11" fmla="*/ 328319 w 3085643"/>
+              <a:gd name="csY11" fmla="*/ 4258649 h 4429567"/>
+              <a:gd name="csX12" fmla="*/ 47660 w 3085643"/>
+              <a:gd name="csY12" fmla="*/ 4258649 h 4429567"/>
+              <a:gd name="csX0" fmla="*/ 47660 w 3187527"/>
+              <a:gd name="csY0" fmla="*/ 4258649 h 4429567"/>
+              <a:gd name="csX1" fmla="*/ 2395 w 3187527"/>
+              <a:gd name="csY1" fmla="*/ 4095686 h 4429567"/>
+              <a:gd name="csX2" fmla="*/ 47660 w 3187527"/>
+              <a:gd name="csY2" fmla="*/ 311338 h 4429567"/>
+              <a:gd name="csX3" fmla="*/ 382640 w 3187527"/>
+              <a:gd name="csY3" fmla="*/ 211750 h 4429567"/>
+              <a:gd name="csX4" fmla="*/ 2908555 w 3187527"/>
+              <a:gd name="csY4" fmla="*/ 202696 h 4429567"/>
+              <a:gd name="csX5" fmla="*/ 3044360 w 3187527"/>
+              <a:gd name="csY5" fmla="*/ 329446 h 4429567"/>
+              <a:gd name="csX6" fmla="*/ 2935716 w 3187527"/>
+              <a:gd name="csY6" fmla="*/ 1542609 h 4429567"/>
+              <a:gd name="csX7" fmla="*/ 3035307 w 3187527"/>
+              <a:gd name="csY7" fmla="*/ 1560718 h 4429567"/>
+              <a:gd name="csX8" fmla="*/ 572762 w 3187527"/>
+              <a:gd name="csY8" fmla="*/ 1542609 h 4429567"/>
+              <a:gd name="csX9" fmla="*/ 310212 w 3187527"/>
+              <a:gd name="csY9" fmla="*/ 1759894 h 4429567"/>
+              <a:gd name="csX10" fmla="*/ 346424 w 3187527"/>
+              <a:gd name="csY10" fmla="*/ 4059472 h 4429567"/>
+              <a:gd name="csX11" fmla="*/ 328319 w 3187527"/>
+              <a:gd name="csY11" fmla="*/ 4258649 h 4429567"/>
+              <a:gd name="csX12" fmla="*/ 47660 w 3187527"/>
+              <a:gd name="csY12" fmla="*/ 4258649 h 4429567"/>
+              <a:gd name="csX0" fmla="*/ 47660 w 3099699"/>
+              <a:gd name="csY0" fmla="*/ 4258649 h 4429567"/>
+              <a:gd name="csX1" fmla="*/ 2395 w 3099699"/>
+              <a:gd name="csY1" fmla="*/ 4095686 h 4429567"/>
+              <a:gd name="csX2" fmla="*/ 47660 w 3099699"/>
+              <a:gd name="csY2" fmla="*/ 311338 h 4429567"/>
+              <a:gd name="csX3" fmla="*/ 382640 w 3099699"/>
+              <a:gd name="csY3" fmla="*/ 211750 h 4429567"/>
+              <a:gd name="csX4" fmla="*/ 2908555 w 3099699"/>
+              <a:gd name="csY4" fmla="*/ 202696 h 4429567"/>
+              <a:gd name="csX5" fmla="*/ 3044360 w 3099699"/>
+              <a:gd name="csY5" fmla="*/ 329446 h 4429567"/>
+              <a:gd name="csX6" fmla="*/ 2935716 w 3099699"/>
+              <a:gd name="csY6" fmla="*/ 1542609 h 4429567"/>
+              <a:gd name="csX7" fmla="*/ 2926666 w 3099699"/>
+              <a:gd name="csY7" fmla="*/ 1615039 h 4429567"/>
+              <a:gd name="csX8" fmla="*/ 572762 w 3099699"/>
+              <a:gd name="csY8" fmla="*/ 1542609 h 4429567"/>
+              <a:gd name="csX9" fmla="*/ 310212 w 3099699"/>
+              <a:gd name="csY9" fmla="*/ 1759894 h 4429567"/>
+              <a:gd name="csX10" fmla="*/ 346424 w 3099699"/>
+              <a:gd name="csY10" fmla="*/ 4059472 h 4429567"/>
+              <a:gd name="csX11" fmla="*/ 328319 w 3099699"/>
+              <a:gd name="csY11" fmla="*/ 4258649 h 4429567"/>
+              <a:gd name="csX12" fmla="*/ 47660 w 3099699"/>
+              <a:gd name="csY12" fmla="*/ 4258649 h 4429567"/>
+              <a:gd name="csX0" fmla="*/ 47660 w 3139317"/>
+              <a:gd name="csY0" fmla="*/ 4258649 h 4429567"/>
+              <a:gd name="csX1" fmla="*/ 2395 w 3139317"/>
+              <a:gd name="csY1" fmla="*/ 4095686 h 4429567"/>
+              <a:gd name="csX2" fmla="*/ 47660 w 3139317"/>
+              <a:gd name="csY2" fmla="*/ 311338 h 4429567"/>
+              <a:gd name="csX3" fmla="*/ 382640 w 3139317"/>
+              <a:gd name="csY3" fmla="*/ 211750 h 4429567"/>
+              <a:gd name="csX4" fmla="*/ 2908555 w 3139317"/>
+              <a:gd name="csY4" fmla="*/ 202696 h 4429567"/>
+              <a:gd name="csX5" fmla="*/ 3044360 w 3139317"/>
+              <a:gd name="csY5" fmla="*/ 329446 h 4429567"/>
+              <a:gd name="csX6" fmla="*/ 3062464 w 3139317"/>
+              <a:gd name="csY6" fmla="*/ 1524502 h 4429567"/>
+              <a:gd name="csX7" fmla="*/ 2926666 w 3139317"/>
+              <a:gd name="csY7" fmla="*/ 1615039 h 4429567"/>
+              <a:gd name="csX8" fmla="*/ 572762 w 3139317"/>
+              <a:gd name="csY8" fmla="*/ 1542609 h 4429567"/>
+              <a:gd name="csX9" fmla="*/ 310212 w 3139317"/>
+              <a:gd name="csY9" fmla="*/ 1759894 h 4429567"/>
+              <a:gd name="csX10" fmla="*/ 346424 w 3139317"/>
+              <a:gd name="csY10" fmla="*/ 4059472 h 4429567"/>
+              <a:gd name="csX11" fmla="*/ 328319 w 3139317"/>
+              <a:gd name="csY11" fmla="*/ 4258649 h 4429567"/>
+              <a:gd name="csX12" fmla="*/ 47660 w 3139317"/>
+              <a:gd name="csY12" fmla="*/ 4258649 h 4429567"/>
+              <a:gd name="csX0" fmla="*/ 47660 w 3144985"/>
+              <a:gd name="csY0" fmla="*/ 4258649 h 4429567"/>
+              <a:gd name="csX1" fmla="*/ 2395 w 3144985"/>
+              <a:gd name="csY1" fmla="*/ 4095686 h 4429567"/>
+              <a:gd name="csX2" fmla="*/ 47660 w 3144985"/>
+              <a:gd name="csY2" fmla="*/ 311338 h 4429567"/>
+              <a:gd name="csX3" fmla="*/ 382640 w 3144985"/>
+              <a:gd name="csY3" fmla="*/ 211750 h 4429567"/>
+              <a:gd name="csX4" fmla="*/ 2908555 w 3144985"/>
+              <a:gd name="csY4" fmla="*/ 202696 h 4429567"/>
+              <a:gd name="csX5" fmla="*/ 3044360 w 3144985"/>
+              <a:gd name="csY5" fmla="*/ 329446 h 4429567"/>
+              <a:gd name="csX6" fmla="*/ 3062464 w 3144985"/>
+              <a:gd name="csY6" fmla="*/ 1524502 h 4429567"/>
+              <a:gd name="csX7" fmla="*/ 2926666 w 3144985"/>
+              <a:gd name="csY7" fmla="*/ 1615039 h 4429567"/>
+              <a:gd name="csX8" fmla="*/ 572762 w 3144985"/>
+              <a:gd name="csY8" fmla="*/ 1542609 h 4429567"/>
+              <a:gd name="csX9" fmla="*/ 310212 w 3144985"/>
+              <a:gd name="csY9" fmla="*/ 1759894 h 4429567"/>
+              <a:gd name="csX10" fmla="*/ 346424 w 3144985"/>
+              <a:gd name="csY10" fmla="*/ 4059472 h 4429567"/>
+              <a:gd name="csX11" fmla="*/ 328319 w 3144985"/>
+              <a:gd name="csY11" fmla="*/ 4258649 h 4429567"/>
+              <a:gd name="csX12" fmla="*/ 47660 w 3144985"/>
+              <a:gd name="csY12" fmla="*/ 4258649 h 4429567"/>
+              <a:gd name="csX0" fmla="*/ 47660 w 3083569"/>
+              <a:gd name="csY0" fmla="*/ 4258649 h 4429567"/>
+              <a:gd name="csX1" fmla="*/ 2395 w 3083569"/>
+              <a:gd name="csY1" fmla="*/ 4095686 h 4429567"/>
+              <a:gd name="csX2" fmla="*/ 47660 w 3083569"/>
+              <a:gd name="csY2" fmla="*/ 311338 h 4429567"/>
+              <a:gd name="csX3" fmla="*/ 382640 w 3083569"/>
+              <a:gd name="csY3" fmla="*/ 211750 h 4429567"/>
+              <a:gd name="csX4" fmla="*/ 2908555 w 3083569"/>
+              <a:gd name="csY4" fmla="*/ 202696 h 4429567"/>
+              <a:gd name="csX5" fmla="*/ 3044360 w 3083569"/>
+              <a:gd name="csY5" fmla="*/ 329446 h 4429567"/>
+              <a:gd name="csX6" fmla="*/ 3062464 w 3083569"/>
+              <a:gd name="csY6" fmla="*/ 1524502 h 4429567"/>
+              <a:gd name="csX7" fmla="*/ 2709383 w 3083569"/>
+              <a:gd name="csY7" fmla="*/ 1578825 h 4429567"/>
+              <a:gd name="csX8" fmla="*/ 572762 w 3083569"/>
+              <a:gd name="csY8" fmla="*/ 1542609 h 4429567"/>
+              <a:gd name="csX9" fmla="*/ 310212 w 3083569"/>
+              <a:gd name="csY9" fmla="*/ 1759894 h 4429567"/>
+              <a:gd name="csX10" fmla="*/ 346424 w 3083569"/>
+              <a:gd name="csY10" fmla="*/ 4059472 h 4429567"/>
+              <a:gd name="csX11" fmla="*/ 328319 w 3083569"/>
+              <a:gd name="csY11" fmla="*/ 4258649 h 4429567"/>
+              <a:gd name="csX12" fmla="*/ 47660 w 3083569"/>
+              <a:gd name="csY12" fmla="*/ 4258649 h 4429567"/>
+              <a:gd name="csX0" fmla="*/ 47660 w 3083569"/>
+              <a:gd name="csY0" fmla="*/ 4258649 h 4429567"/>
+              <a:gd name="csX1" fmla="*/ 2395 w 3083569"/>
+              <a:gd name="csY1" fmla="*/ 4095686 h 4429567"/>
+              <a:gd name="csX2" fmla="*/ 47660 w 3083569"/>
+              <a:gd name="csY2" fmla="*/ 311338 h 4429567"/>
+              <a:gd name="csX3" fmla="*/ 382640 w 3083569"/>
+              <a:gd name="csY3" fmla="*/ 211750 h 4429567"/>
+              <a:gd name="csX4" fmla="*/ 2908555 w 3083569"/>
+              <a:gd name="csY4" fmla="*/ 202696 h 4429567"/>
+              <a:gd name="csX5" fmla="*/ 3044360 w 3083569"/>
+              <a:gd name="csY5" fmla="*/ 329446 h 4429567"/>
+              <a:gd name="csX6" fmla="*/ 3062464 w 3083569"/>
+              <a:gd name="csY6" fmla="*/ 1524502 h 4429567"/>
+              <a:gd name="csX7" fmla="*/ 2709383 w 3083569"/>
+              <a:gd name="csY7" fmla="*/ 1578825 h 4429567"/>
+              <a:gd name="csX8" fmla="*/ 572762 w 3083569"/>
+              <a:gd name="csY8" fmla="*/ 1542609 h 4429567"/>
+              <a:gd name="csX9" fmla="*/ 310212 w 3083569"/>
+              <a:gd name="csY9" fmla="*/ 1759894 h 4429567"/>
+              <a:gd name="csX10" fmla="*/ 346424 w 3083569"/>
+              <a:gd name="csY10" fmla="*/ 4059472 h 4429567"/>
+              <a:gd name="csX11" fmla="*/ 328319 w 3083569"/>
+              <a:gd name="csY11" fmla="*/ 4258649 h 4429567"/>
+              <a:gd name="csX12" fmla="*/ 47660 w 3083569"/>
+              <a:gd name="csY12" fmla="*/ 4258649 h 4429567"/>
+              <a:gd name="csX0" fmla="*/ 47660 w 3106605"/>
+              <a:gd name="csY0" fmla="*/ 4258649 h 4429567"/>
+              <a:gd name="csX1" fmla="*/ 2395 w 3106605"/>
+              <a:gd name="csY1" fmla="*/ 4095686 h 4429567"/>
+              <a:gd name="csX2" fmla="*/ 47660 w 3106605"/>
+              <a:gd name="csY2" fmla="*/ 311338 h 4429567"/>
+              <a:gd name="csX3" fmla="*/ 382640 w 3106605"/>
+              <a:gd name="csY3" fmla="*/ 211750 h 4429567"/>
+              <a:gd name="csX4" fmla="*/ 2908555 w 3106605"/>
+              <a:gd name="csY4" fmla="*/ 202696 h 4429567"/>
+              <a:gd name="csX5" fmla="*/ 3044360 w 3106605"/>
+              <a:gd name="csY5" fmla="*/ 329446 h 4429567"/>
+              <a:gd name="csX6" fmla="*/ 3089624 w 3106605"/>
+              <a:gd name="csY6" fmla="*/ 1397753 h 4429567"/>
+              <a:gd name="csX7" fmla="*/ 2709383 w 3106605"/>
+              <a:gd name="csY7" fmla="*/ 1578825 h 4429567"/>
+              <a:gd name="csX8" fmla="*/ 572762 w 3106605"/>
+              <a:gd name="csY8" fmla="*/ 1542609 h 4429567"/>
+              <a:gd name="csX9" fmla="*/ 310212 w 3106605"/>
+              <a:gd name="csY9" fmla="*/ 1759894 h 4429567"/>
+              <a:gd name="csX10" fmla="*/ 346424 w 3106605"/>
+              <a:gd name="csY10" fmla="*/ 4059472 h 4429567"/>
+              <a:gd name="csX11" fmla="*/ 328319 w 3106605"/>
+              <a:gd name="csY11" fmla="*/ 4258649 h 4429567"/>
+              <a:gd name="csX12" fmla="*/ 47660 w 3106605"/>
+              <a:gd name="csY12" fmla="*/ 4258649 h 4429567"/>
+              <a:gd name="csX0" fmla="*/ 47660 w 3090985"/>
+              <a:gd name="csY0" fmla="*/ 4258649 h 4429567"/>
+              <a:gd name="csX1" fmla="*/ 2395 w 3090985"/>
+              <a:gd name="csY1" fmla="*/ 4095686 h 4429567"/>
+              <a:gd name="csX2" fmla="*/ 47660 w 3090985"/>
+              <a:gd name="csY2" fmla="*/ 311338 h 4429567"/>
+              <a:gd name="csX3" fmla="*/ 382640 w 3090985"/>
+              <a:gd name="csY3" fmla="*/ 211750 h 4429567"/>
+              <a:gd name="csX4" fmla="*/ 2908555 w 3090985"/>
+              <a:gd name="csY4" fmla="*/ 202696 h 4429567"/>
+              <a:gd name="csX5" fmla="*/ 3044360 w 3090985"/>
+              <a:gd name="csY5" fmla="*/ 329446 h 4429567"/>
+              <a:gd name="csX6" fmla="*/ 3089624 w 3090985"/>
+              <a:gd name="csY6" fmla="*/ 1397753 h 4429567"/>
+              <a:gd name="csX7" fmla="*/ 2709383 w 3090985"/>
+              <a:gd name="csY7" fmla="*/ 1578825 h 4429567"/>
+              <a:gd name="csX8" fmla="*/ 572762 w 3090985"/>
+              <a:gd name="csY8" fmla="*/ 1542609 h 4429567"/>
+              <a:gd name="csX9" fmla="*/ 310212 w 3090985"/>
+              <a:gd name="csY9" fmla="*/ 1759894 h 4429567"/>
+              <a:gd name="csX10" fmla="*/ 346424 w 3090985"/>
+              <a:gd name="csY10" fmla="*/ 4059472 h 4429567"/>
+              <a:gd name="csX11" fmla="*/ 328319 w 3090985"/>
+              <a:gd name="csY11" fmla="*/ 4258649 h 4429567"/>
+              <a:gd name="csX12" fmla="*/ 47660 w 3090985"/>
+              <a:gd name="csY12" fmla="*/ 4258649 h 4429567"/>
+              <a:gd name="csX0" fmla="*/ 47660 w 3156177"/>
+              <a:gd name="csY0" fmla="*/ 4258649 h 4429567"/>
+              <a:gd name="csX1" fmla="*/ 2395 w 3156177"/>
+              <a:gd name="csY1" fmla="*/ 4095686 h 4429567"/>
+              <a:gd name="csX2" fmla="*/ 47660 w 3156177"/>
+              <a:gd name="csY2" fmla="*/ 311338 h 4429567"/>
+              <a:gd name="csX3" fmla="*/ 382640 w 3156177"/>
+              <a:gd name="csY3" fmla="*/ 211750 h 4429567"/>
+              <a:gd name="csX4" fmla="*/ 2908555 w 3156177"/>
+              <a:gd name="csY4" fmla="*/ 202696 h 4429567"/>
+              <a:gd name="csX5" fmla="*/ 3062467 w 3156177"/>
+              <a:gd name="csY5" fmla="*/ 374713 h 4429567"/>
+              <a:gd name="csX6" fmla="*/ 3089624 w 3156177"/>
+              <a:gd name="csY6" fmla="*/ 1397753 h 4429567"/>
+              <a:gd name="csX7" fmla="*/ 2709383 w 3156177"/>
+              <a:gd name="csY7" fmla="*/ 1578825 h 4429567"/>
+              <a:gd name="csX8" fmla="*/ 572762 w 3156177"/>
+              <a:gd name="csY8" fmla="*/ 1542609 h 4429567"/>
+              <a:gd name="csX9" fmla="*/ 310212 w 3156177"/>
+              <a:gd name="csY9" fmla="*/ 1759894 h 4429567"/>
+              <a:gd name="csX10" fmla="*/ 346424 w 3156177"/>
+              <a:gd name="csY10" fmla="*/ 4059472 h 4429567"/>
+              <a:gd name="csX11" fmla="*/ 328319 w 3156177"/>
+              <a:gd name="csY11" fmla="*/ 4258649 h 4429567"/>
+              <a:gd name="csX12" fmla="*/ 47660 w 3156177"/>
+              <a:gd name="csY12" fmla="*/ 4258649 h 4429567"/>
+              <a:gd name="csX0" fmla="*/ 47660 w 3159075"/>
+              <a:gd name="csY0" fmla="*/ 4258649 h 4429567"/>
+              <a:gd name="csX1" fmla="*/ 2395 w 3159075"/>
+              <a:gd name="csY1" fmla="*/ 4095686 h 4429567"/>
+              <a:gd name="csX2" fmla="*/ 47660 w 3159075"/>
+              <a:gd name="csY2" fmla="*/ 311338 h 4429567"/>
+              <a:gd name="csX3" fmla="*/ 382640 w 3159075"/>
+              <a:gd name="csY3" fmla="*/ 211750 h 4429567"/>
+              <a:gd name="csX4" fmla="*/ 2908555 w 3159075"/>
+              <a:gd name="csY4" fmla="*/ 202696 h 4429567"/>
+              <a:gd name="csX5" fmla="*/ 3062467 w 3159075"/>
+              <a:gd name="csY5" fmla="*/ 374713 h 4429567"/>
+              <a:gd name="csX6" fmla="*/ 3089624 w 3159075"/>
+              <a:gd name="csY6" fmla="*/ 1397753 h 4429567"/>
+              <a:gd name="csX7" fmla="*/ 2709383 w 3159075"/>
+              <a:gd name="csY7" fmla="*/ 1578825 h 4429567"/>
+              <a:gd name="csX8" fmla="*/ 572762 w 3159075"/>
+              <a:gd name="csY8" fmla="*/ 1542609 h 4429567"/>
+              <a:gd name="csX9" fmla="*/ 310212 w 3159075"/>
+              <a:gd name="csY9" fmla="*/ 1759894 h 4429567"/>
+              <a:gd name="csX10" fmla="*/ 346424 w 3159075"/>
+              <a:gd name="csY10" fmla="*/ 4059472 h 4429567"/>
+              <a:gd name="csX11" fmla="*/ 328319 w 3159075"/>
+              <a:gd name="csY11" fmla="*/ 4258649 h 4429567"/>
+              <a:gd name="csX12" fmla="*/ 47660 w 3159075"/>
+              <a:gd name="csY12" fmla="*/ 4258649 h 4429567"/>
+              <a:gd name="csX0" fmla="*/ 47660 w 3110434"/>
+              <a:gd name="csY0" fmla="*/ 4258649 h 4429567"/>
+              <a:gd name="csX1" fmla="*/ 2395 w 3110434"/>
+              <a:gd name="csY1" fmla="*/ 4095686 h 4429567"/>
+              <a:gd name="csX2" fmla="*/ 47660 w 3110434"/>
+              <a:gd name="csY2" fmla="*/ 311338 h 4429567"/>
+              <a:gd name="csX3" fmla="*/ 382640 w 3110434"/>
+              <a:gd name="csY3" fmla="*/ 211750 h 4429567"/>
+              <a:gd name="csX4" fmla="*/ 2908555 w 3110434"/>
+              <a:gd name="csY4" fmla="*/ 202696 h 4429567"/>
+              <a:gd name="csX5" fmla="*/ 3062467 w 3110434"/>
+              <a:gd name="csY5" fmla="*/ 374713 h 4429567"/>
+              <a:gd name="csX6" fmla="*/ 3089624 w 3110434"/>
+              <a:gd name="csY6" fmla="*/ 1397753 h 4429567"/>
+              <a:gd name="csX7" fmla="*/ 2709383 w 3110434"/>
+              <a:gd name="csY7" fmla="*/ 1578825 h 4429567"/>
+              <a:gd name="csX8" fmla="*/ 572762 w 3110434"/>
+              <a:gd name="csY8" fmla="*/ 1542609 h 4429567"/>
+              <a:gd name="csX9" fmla="*/ 310212 w 3110434"/>
+              <a:gd name="csY9" fmla="*/ 1759894 h 4429567"/>
+              <a:gd name="csX10" fmla="*/ 346424 w 3110434"/>
+              <a:gd name="csY10" fmla="*/ 4059472 h 4429567"/>
+              <a:gd name="csX11" fmla="*/ 328319 w 3110434"/>
+              <a:gd name="csY11" fmla="*/ 4258649 h 4429567"/>
+              <a:gd name="csX12" fmla="*/ 47660 w 3110434"/>
+              <a:gd name="csY12" fmla="*/ 4258649 h 4429567"/>
+              <a:gd name="csX0" fmla="*/ 47660 w 3172388"/>
+              <a:gd name="csY0" fmla="*/ 4258649 h 4429567"/>
+              <a:gd name="csX1" fmla="*/ 2395 w 3172388"/>
+              <a:gd name="csY1" fmla="*/ 4095686 h 4429567"/>
+              <a:gd name="csX2" fmla="*/ 47660 w 3172388"/>
+              <a:gd name="csY2" fmla="*/ 311338 h 4429567"/>
+              <a:gd name="csX3" fmla="*/ 382640 w 3172388"/>
+              <a:gd name="csY3" fmla="*/ 211750 h 4429567"/>
+              <a:gd name="csX4" fmla="*/ 2908555 w 3172388"/>
+              <a:gd name="csY4" fmla="*/ 202696 h 4429567"/>
+              <a:gd name="csX5" fmla="*/ 3089627 w 3172388"/>
+              <a:gd name="csY5" fmla="*/ 465248 h 4429567"/>
+              <a:gd name="csX6" fmla="*/ 3089624 w 3172388"/>
+              <a:gd name="csY6" fmla="*/ 1397753 h 4429567"/>
+              <a:gd name="csX7" fmla="*/ 2709383 w 3172388"/>
+              <a:gd name="csY7" fmla="*/ 1578825 h 4429567"/>
+              <a:gd name="csX8" fmla="*/ 572762 w 3172388"/>
+              <a:gd name="csY8" fmla="*/ 1542609 h 4429567"/>
+              <a:gd name="csX9" fmla="*/ 310212 w 3172388"/>
+              <a:gd name="csY9" fmla="*/ 1759894 h 4429567"/>
+              <a:gd name="csX10" fmla="*/ 346424 w 3172388"/>
+              <a:gd name="csY10" fmla="*/ 4059472 h 4429567"/>
+              <a:gd name="csX11" fmla="*/ 328319 w 3172388"/>
+              <a:gd name="csY11" fmla="*/ 4258649 h 4429567"/>
+              <a:gd name="csX12" fmla="*/ 47660 w 3172388"/>
+              <a:gd name="csY12" fmla="*/ 4258649 h 4429567"/>
+              <a:gd name="csX0" fmla="*/ 47660 w 3118129"/>
+              <a:gd name="csY0" fmla="*/ 4258265 h 4429183"/>
+              <a:gd name="csX1" fmla="*/ 2395 w 3118129"/>
+              <a:gd name="csY1" fmla="*/ 4095302 h 4429183"/>
+              <a:gd name="csX2" fmla="*/ 47660 w 3118129"/>
+              <a:gd name="csY2" fmla="*/ 310954 h 4429183"/>
+              <a:gd name="csX3" fmla="*/ 382640 w 3118129"/>
+              <a:gd name="csY3" fmla="*/ 211366 h 4429183"/>
+              <a:gd name="csX4" fmla="*/ 2709379 w 3118129"/>
+              <a:gd name="csY4" fmla="*/ 193258 h 4429183"/>
+              <a:gd name="csX5" fmla="*/ 3089627 w 3118129"/>
+              <a:gd name="csY5" fmla="*/ 464864 h 4429183"/>
+              <a:gd name="csX6" fmla="*/ 3089624 w 3118129"/>
+              <a:gd name="csY6" fmla="*/ 1397369 h 4429183"/>
+              <a:gd name="csX7" fmla="*/ 2709383 w 3118129"/>
+              <a:gd name="csY7" fmla="*/ 1578441 h 4429183"/>
+              <a:gd name="csX8" fmla="*/ 572762 w 3118129"/>
+              <a:gd name="csY8" fmla="*/ 1542225 h 4429183"/>
+              <a:gd name="csX9" fmla="*/ 310212 w 3118129"/>
+              <a:gd name="csY9" fmla="*/ 1759510 h 4429183"/>
+              <a:gd name="csX10" fmla="*/ 346424 w 3118129"/>
+              <a:gd name="csY10" fmla="*/ 4059088 h 4429183"/>
+              <a:gd name="csX11" fmla="*/ 328319 w 3118129"/>
+              <a:gd name="csY11" fmla="*/ 4258265 h 4429183"/>
+              <a:gd name="csX12" fmla="*/ 47660 w 3118129"/>
+              <a:gd name="csY12" fmla="*/ 4258265 h 4429183"/>
+              <a:gd name="csX0" fmla="*/ 47660 w 3118129"/>
+              <a:gd name="csY0" fmla="*/ 4258265 h 4429183"/>
+              <a:gd name="csX1" fmla="*/ 2395 w 3118129"/>
+              <a:gd name="csY1" fmla="*/ 4095302 h 4429183"/>
+              <a:gd name="csX2" fmla="*/ 47660 w 3118129"/>
+              <a:gd name="csY2" fmla="*/ 310954 h 4429183"/>
+              <a:gd name="csX3" fmla="*/ 382640 w 3118129"/>
+              <a:gd name="csY3" fmla="*/ 211366 h 4429183"/>
+              <a:gd name="csX4" fmla="*/ 2709379 w 3118129"/>
+              <a:gd name="csY4" fmla="*/ 193258 h 4429183"/>
+              <a:gd name="csX5" fmla="*/ 3089627 w 3118129"/>
+              <a:gd name="csY5" fmla="*/ 464864 h 4429183"/>
+              <a:gd name="csX6" fmla="*/ 3089624 w 3118129"/>
+              <a:gd name="csY6" fmla="*/ 1397369 h 4429183"/>
+              <a:gd name="csX7" fmla="*/ 2709383 w 3118129"/>
+              <a:gd name="csY7" fmla="*/ 1578441 h 4429183"/>
+              <a:gd name="csX8" fmla="*/ 572762 w 3118129"/>
+              <a:gd name="csY8" fmla="*/ 1542225 h 4429183"/>
+              <a:gd name="csX9" fmla="*/ 310212 w 3118129"/>
+              <a:gd name="csY9" fmla="*/ 1759510 h 4429183"/>
+              <a:gd name="csX10" fmla="*/ 346424 w 3118129"/>
+              <a:gd name="csY10" fmla="*/ 4059088 h 4429183"/>
+              <a:gd name="csX11" fmla="*/ 328319 w 3118129"/>
+              <a:gd name="csY11" fmla="*/ 4258265 h 4429183"/>
+              <a:gd name="csX12" fmla="*/ 47660 w 3118129"/>
+              <a:gd name="csY12" fmla="*/ 4258265 h 4429183"/>
+              <a:gd name="csX0" fmla="*/ 53819 w 3124288"/>
+              <a:gd name="csY0" fmla="*/ 4261697 h 4432615"/>
+              <a:gd name="csX1" fmla="*/ 8554 w 3124288"/>
+              <a:gd name="csY1" fmla="*/ 4098734 h 4432615"/>
+              <a:gd name="csX2" fmla="*/ 53819 w 3124288"/>
+              <a:gd name="csY2" fmla="*/ 314386 h 4432615"/>
+              <a:gd name="csX3" fmla="*/ 506494 w 3124288"/>
+              <a:gd name="csY3" fmla="*/ 205745 h 4432615"/>
+              <a:gd name="csX4" fmla="*/ 2715538 w 3124288"/>
+              <a:gd name="csY4" fmla="*/ 196690 h 4432615"/>
+              <a:gd name="csX5" fmla="*/ 3095786 w 3124288"/>
+              <a:gd name="csY5" fmla="*/ 468296 h 4432615"/>
+              <a:gd name="csX6" fmla="*/ 3095783 w 3124288"/>
+              <a:gd name="csY6" fmla="*/ 1400801 h 4432615"/>
+              <a:gd name="csX7" fmla="*/ 2715542 w 3124288"/>
+              <a:gd name="csY7" fmla="*/ 1581873 h 4432615"/>
+              <a:gd name="csX8" fmla="*/ 578921 w 3124288"/>
+              <a:gd name="csY8" fmla="*/ 1545657 h 4432615"/>
+              <a:gd name="csX9" fmla="*/ 316371 w 3124288"/>
+              <a:gd name="csY9" fmla="*/ 1762942 h 4432615"/>
+              <a:gd name="csX10" fmla="*/ 352583 w 3124288"/>
+              <a:gd name="csY10" fmla="*/ 4062520 h 4432615"/>
+              <a:gd name="csX11" fmla="*/ 334478 w 3124288"/>
+              <a:gd name="csY11" fmla="*/ 4261697 h 4432615"/>
+              <a:gd name="csX12" fmla="*/ 53819 w 3124288"/>
+              <a:gd name="csY12" fmla="*/ 4261697 h 4432615"/>
+              <a:gd name="csX0" fmla="*/ 53819 w 3124288"/>
+              <a:gd name="csY0" fmla="*/ 4261697 h 4432615"/>
+              <a:gd name="csX1" fmla="*/ 8554 w 3124288"/>
+              <a:gd name="csY1" fmla="*/ 4098734 h 4432615"/>
+              <a:gd name="csX2" fmla="*/ 53819 w 3124288"/>
+              <a:gd name="csY2" fmla="*/ 314386 h 4432615"/>
+              <a:gd name="csX3" fmla="*/ 506494 w 3124288"/>
+              <a:gd name="csY3" fmla="*/ 205745 h 4432615"/>
+              <a:gd name="csX4" fmla="*/ 2715538 w 3124288"/>
+              <a:gd name="csY4" fmla="*/ 196690 h 4432615"/>
+              <a:gd name="csX5" fmla="*/ 3095786 w 3124288"/>
+              <a:gd name="csY5" fmla="*/ 468296 h 4432615"/>
+              <a:gd name="csX6" fmla="*/ 3095783 w 3124288"/>
+              <a:gd name="csY6" fmla="*/ 1400801 h 4432615"/>
+              <a:gd name="csX7" fmla="*/ 2715542 w 3124288"/>
+              <a:gd name="csY7" fmla="*/ 1581873 h 4432615"/>
+              <a:gd name="csX8" fmla="*/ 578921 w 3124288"/>
+              <a:gd name="csY8" fmla="*/ 1545657 h 4432615"/>
+              <a:gd name="csX9" fmla="*/ 316371 w 3124288"/>
+              <a:gd name="csY9" fmla="*/ 1762942 h 4432615"/>
+              <a:gd name="csX10" fmla="*/ 352583 w 3124288"/>
+              <a:gd name="csY10" fmla="*/ 4062520 h 4432615"/>
+              <a:gd name="csX11" fmla="*/ 334478 w 3124288"/>
+              <a:gd name="csY11" fmla="*/ 4261697 h 4432615"/>
+              <a:gd name="csX12" fmla="*/ 53819 w 3124288"/>
+              <a:gd name="csY12" fmla="*/ 4261697 h 4432615"/>
+              <a:gd name="csX0" fmla="*/ 69404 w 3139873"/>
+              <a:gd name="csY0" fmla="*/ 4248474 h 4419392"/>
+              <a:gd name="csX1" fmla="*/ 24139 w 3139873"/>
+              <a:gd name="csY1" fmla="*/ 4085511 h 4419392"/>
+              <a:gd name="csX2" fmla="*/ 42243 w 3139873"/>
+              <a:gd name="csY2" fmla="*/ 319270 h 4419392"/>
+              <a:gd name="csX3" fmla="*/ 522079 w 3139873"/>
+              <a:gd name="csY3" fmla="*/ 192522 h 4419392"/>
+              <a:gd name="csX4" fmla="*/ 2731123 w 3139873"/>
+              <a:gd name="csY4" fmla="*/ 183467 h 4419392"/>
+              <a:gd name="csX5" fmla="*/ 3111371 w 3139873"/>
+              <a:gd name="csY5" fmla="*/ 455073 h 4419392"/>
+              <a:gd name="csX6" fmla="*/ 3111368 w 3139873"/>
+              <a:gd name="csY6" fmla="*/ 1387578 h 4419392"/>
+              <a:gd name="csX7" fmla="*/ 2731127 w 3139873"/>
+              <a:gd name="csY7" fmla="*/ 1568650 h 4419392"/>
+              <a:gd name="csX8" fmla="*/ 594506 w 3139873"/>
+              <a:gd name="csY8" fmla="*/ 1532434 h 4419392"/>
+              <a:gd name="csX9" fmla="*/ 331956 w 3139873"/>
+              <a:gd name="csY9" fmla="*/ 1749719 h 4419392"/>
+              <a:gd name="csX10" fmla="*/ 368168 w 3139873"/>
+              <a:gd name="csY10" fmla="*/ 4049297 h 4419392"/>
+              <a:gd name="csX11" fmla="*/ 350063 w 3139873"/>
+              <a:gd name="csY11" fmla="*/ 4248474 h 4419392"/>
+              <a:gd name="csX12" fmla="*/ 69404 w 3139873"/>
+              <a:gd name="csY12" fmla="*/ 4248474 h 4419392"/>
+              <a:gd name="csX0" fmla="*/ 45832 w 3116301"/>
+              <a:gd name="csY0" fmla="*/ 4087341 h 4258259"/>
+              <a:gd name="csX1" fmla="*/ 567 w 3116301"/>
+              <a:gd name="csY1" fmla="*/ 3924378 h 4258259"/>
+              <a:gd name="csX2" fmla="*/ 18671 w 3116301"/>
+              <a:gd name="csY2" fmla="*/ 158137 h 4258259"/>
+              <a:gd name="csX3" fmla="*/ 498507 w 3116301"/>
+              <a:gd name="csY3" fmla="*/ 31389 h 4258259"/>
+              <a:gd name="csX4" fmla="*/ 2707551 w 3116301"/>
+              <a:gd name="csY4" fmla="*/ 22334 h 4258259"/>
+              <a:gd name="csX5" fmla="*/ 3087799 w 3116301"/>
+              <a:gd name="csY5" fmla="*/ 293940 h 4258259"/>
+              <a:gd name="csX6" fmla="*/ 3087796 w 3116301"/>
+              <a:gd name="csY6" fmla="*/ 1226445 h 4258259"/>
+              <a:gd name="csX7" fmla="*/ 2707555 w 3116301"/>
+              <a:gd name="csY7" fmla="*/ 1407517 h 4258259"/>
+              <a:gd name="csX8" fmla="*/ 570934 w 3116301"/>
+              <a:gd name="csY8" fmla="*/ 1371301 h 4258259"/>
+              <a:gd name="csX9" fmla="*/ 308384 w 3116301"/>
+              <a:gd name="csY9" fmla="*/ 1588586 h 4258259"/>
+              <a:gd name="csX10" fmla="*/ 344596 w 3116301"/>
+              <a:gd name="csY10" fmla="*/ 3888164 h 4258259"/>
+              <a:gd name="csX11" fmla="*/ 326491 w 3116301"/>
+              <a:gd name="csY11" fmla="*/ 4087341 h 4258259"/>
+              <a:gd name="csX12" fmla="*/ 45832 w 3116301"/>
+              <a:gd name="csY12" fmla="*/ 4087341 h 4258259"/>
+              <a:gd name="csX0" fmla="*/ 55923 w 3126392"/>
+              <a:gd name="csY0" fmla="*/ 4091691 h 4262609"/>
+              <a:gd name="csX1" fmla="*/ 10658 w 3126392"/>
+              <a:gd name="csY1" fmla="*/ 3928728 h 4262609"/>
+              <a:gd name="csX2" fmla="*/ 1602 w 3126392"/>
+              <a:gd name="csY2" fmla="*/ 253021 h 4262609"/>
+              <a:gd name="csX3" fmla="*/ 508598 w 3126392"/>
+              <a:gd name="csY3" fmla="*/ 35739 h 4262609"/>
+              <a:gd name="csX4" fmla="*/ 2717642 w 3126392"/>
+              <a:gd name="csY4" fmla="*/ 26684 h 4262609"/>
+              <a:gd name="csX5" fmla="*/ 3097890 w 3126392"/>
+              <a:gd name="csY5" fmla="*/ 298290 h 4262609"/>
+              <a:gd name="csX6" fmla="*/ 3097887 w 3126392"/>
+              <a:gd name="csY6" fmla="*/ 1230795 h 4262609"/>
+              <a:gd name="csX7" fmla="*/ 2717646 w 3126392"/>
+              <a:gd name="csY7" fmla="*/ 1411867 h 4262609"/>
+              <a:gd name="csX8" fmla="*/ 581025 w 3126392"/>
+              <a:gd name="csY8" fmla="*/ 1375651 h 4262609"/>
+              <a:gd name="csX9" fmla="*/ 318475 w 3126392"/>
+              <a:gd name="csY9" fmla="*/ 1592936 h 4262609"/>
+              <a:gd name="csX10" fmla="*/ 354687 w 3126392"/>
+              <a:gd name="csY10" fmla="*/ 3892514 h 4262609"/>
+              <a:gd name="csX11" fmla="*/ 336582 w 3126392"/>
+              <a:gd name="csY11" fmla="*/ 4091691 h 4262609"/>
+              <a:gd name="csX12" fmla="*/ 55923 w 3126392"/>
+              <a:gd name="csY12" fmla="*/ 4091691 h 4262609"/>
+              <a:gd name="csX0" fmla="*/ 55158 w 3125627"/>
+              <a:gd name="csY0" fmla="*/ 4091691 h 4262609"/>
+              <a:gd name="csX1" fmla="*/ 9893 w 3125627"/>
+              <a:gd name="csY1" fmla="*/ 3928728 h 4262609"/>
+              <a:gd name="csX2" fmla="*/ 837 w 3125627"/>
+              <a:gd name="csY2" fmla="*/ 253021 h 4262609"/>
+              <a:gd name="csX3" fmla="*/ 507833 w 3125627"/>
+              <a:gd name="csY3" fmla="*/ 35739 h 4262609"/>
+              <a:gd name="csX4" fmla="*/ 2716877 w 3125627"/>
+              <a:gd name="csY4" fmla="*/ 26684 h 4262609"/>
+              <a:gd name="csX5" fmla="*/ 3097125 w 3125627"/>
+              <a:gd name="csY5" fmla="*/ 298290 h 4262609"/>
+              <a:gd name="csX6" fmla="*/ 3097122 w 3125627"/>
+              <a:gd name="csY6" fmla="*/ 1230795 h 4262609"/>
+              <a:gd name="csX7" fmla="*/ 2716881 w 3125627"/>
+              <a:gd name="csY7" fmla="*/ 1411867 h 4262609"/>
+              <a:gd name="csX8" fmla="*/ 580260 w 3125627"/>
+              <a:gd name="csY8" fmla="*/ 1375651 h 4262609"/>
+              <a:gd name="csX9" fmla="*/ 317710 w 3125627"/>
+              <a:gd name="csY9" fmla="*/ 1592936 h 4262609"/>
+              <a:gd name="csX10" fmla="*/ 353922 w 3125627"/>
+              <a:gd name="csY10" fmla="*/ 3892514 h 4262609"/>
+              <a:gd name="csX11" fmla="*/ 335817 w 3125627"/>
+              <a:gd name="csY11" fmla="*/ 4091691 h 4262609"/>
+              <a:gd name="csX12" fmla="*/ 55158 w 3125627"/>
+              <a:gd name="csY12" fmla="*/ 4091691 h 4262609"/>
+              <a:gd name="csX0" fmla="*/ 55158 w 3125627"/>
+              <a:gd name="csY0" fmla="*/ 4091691 h 4262609"/>
+              <a:gd name="csX1" fmla="*/ 9893 w 3125627"/>
+              <a:gd name="csY1" fmla="*/ 3928728 h 4262609"/>
+              <a:gd name="csX2" fmla="*/ 837 w 3125627"/>
+              <a:gd name="csY2" fmla="*/ 253021 h 4262609"/>
+              <a:gd name="csX3" fmla="*/ 507833 w 3125627"/>
+              <a:gd name="csY3" fmla="*/ 35739 h 4262609"/>
+              <a:gd name="csX4" fmla="*/ 2716877 w 3125627"/>
+              <a:gd name="csY4" fmla="*/ 26684 h 4262609"/>
+              <a:gd name="csX5" fmla="*/ 3097125 w 3125627"/>
+              <a:gd name="csY5" fmla="*/ 298290 h 4262609"/>
+              <a:gd name="csX6" fmla="*/ 3097122 w 3125627"/>
+              <a:gd name="csY6" fmla="*/ 1230795 h 4262609"/>
+              <a:gd name="csX7" fmla="*/ 2716881 w 3125627"/>
+              <a:gd name="csY7" fmla="*/ 1411867 h 4262609"/>
+              <a:gd name="csX8" fmla="*/ 616474 w 3125627"/>
+              <a:gd name="csY8" fmla="*/ 1420918 h 4262609"/>
+              <a:gd name="csX9" fmla="*/ 317710 w 3125627"/>
+              <a:gd name="csY9" fmla="*/ 1592936 h 4262609"/>
+              <a:gd name="csX10" fmla="*/ 353922 w 3125627"/>
+              <a:gd name="csY10" fmla="*/ 3892514 h 4262609"/>
+              <a:gd name="csX11" fmla="*/ 335817 w 3125627"/>
+              <a:gd name="csY11" fmla="*/ 4091691 h 4262609"/>
+              <a:gd name="csX12" fmla="*/ 55158 w 3125627"/>
+              <a:gd name="csY12" fmla="*/ 4091691 h 4262609"/>
+              <a:gd name="csX0" fmla="*/ 55158 w 3125627"/>
+              <a:gd name="csY0" fmla="*/ 4091691 h 4262609"/>
+              <a:gd name="csX1" fmla="*/ 9893 w 3125627"/>
+              <a:gd name="csY1" fmla="*/ 3928728 h 4262609"/>
+              <a:gd name="csX2" fmla="*/ 837 w 3125627"/>
+              <a:gd name="csY2" fmla="*/ 253021 h 4262609"/>
+              <a:gd name="csX3" fmla="*/ 507833 w 3125627"/>
+              <a:gd name="csY3" fmla="*/ 35739 h 4262609"/>
+              <a:gd name="csX4" fmla="*/ 2716877 w 3125627"/>
+              <a:gd name="csY4" fmla="*/ 26684 h 4262609"/>
+              <a:gd name="csX5" fmla="*/ 3097125 w 3125627"/>
+              <a:gd name="csY5" fmla="*/ 298290 h 4262609"/>
+              <a:gd name="csX6" fmla="*/ 3097122 w 3125627"/>
+              <a:gd name="csY6" fmla="*/ 1230795 h 4262609"/>
+              <a:gd name="csX7" fmla="*/ 2716881 w 3125627"/>
+              <a:gd name="csY7" fmla="*/ 1411867 h 4262609"/>
+              <a:gd name="csX8" fmla="*/ 616474 w 3125627"/>
+              <a:gd name="csY8" fmla="*/ 1420918 h 4262609"/>
+              <a:gd name="csX9" fmla="*/ 317710 w 3125627"/>
+              <a:gd name="csY9" fmla="*/ 1592936 h 4262609"/>
+              <a:gd name="csX10" fmla="*/ 353922 w 3125627"/>
+              <a:gd name="csY10" fmla="*/ 3892514 h 4262609"/>
+              <a:gd name="csX11" fmla="*/ 335817 w 3125627"/>
+              <a:gd name="csY11" fmla="*/ 4091691 h 4262609"/>
+              <a:gd name="csX12" fmla="*/ 55158 w 3125627"/>
+              <a:gd name="csY12" fmla="*/ 4091691 h 4262609"/>
+              <a:gd name="csX0" fmla="*/ 55158 w 3125627"/>
+              <a:gd name="csY0" fmla="*/ 4091691 h 4262609"/>
+              <a:gd name="csX1" fmla="*/ 9893 w 3125627"/>
+              <a:gd name="csY1" fmla="*/ 3928728 h 4262609"/>
+              <a:gd name="csX2" fmla="*/ 837 w 3125627"/>
+              <a:gd name="csY2" fmla="*/ 253021 h 4262609"/>
+              <a:gd name="csX3" fmla="*/ 507833 w 3125627"/>
+              <a:gd name="csY3" fmla="*/ 35739 h 4262609"/>
+              <a:gd name="csX4" fmla="*/ 2716877 w 3125627"/>
+              <a:gd name="csY4" fmla="*/ 26684 h 4262609"/>
+              <a:gd name="csX5" fmla="*/ 3097125 w 3125627"/>
+              <a:gd name="csY5" fmla="*/ 298290 h 4262609"/>
+              <a:gd name="csX6" fmla="*/ 3097122 w 3125627"/>
+              <a:gd name="csY6" fmla="*/ 1230795 h 4262609"/>
+              <a:gd name="csX7" fmla="*/ 2716881 w 3125627"/>
+              <a:gd name="csY7" fmla="*/ 1411867 h 4262609"/>
+              <a:gd name="csX8" fmla="*/ 616474 w 3125627"/>
+              <a:gd name="csY8" fmla="*/ 1420918 h 4262609"/>
+              <a:gd name="csX9" fmla="*/ 317710 w 3125627"/>
+              <a:gd name="csY9" fmla="*/ 1592936 h 4262609"/>
+              <a:gd name="csX10" fmla="*/ 353922 w 3125627"/>
+              <a:gd name="csY10" fmla="*/ 3892514 h 4262609"/>
+              <a:gd name="csX11" fmla="*/ 335817 w 3125627"/>
+              <a:gd name="csY11" fmla="*/ 4091691 h 4262609"/>
+              <a:gd name="csX12" fmla="*/ 55158 w 3125627"/>
+              <a:gd name="csY12" fmla="*/ 4091691 h 4262609"/>
+              <a:gd name="csX0" fmla="*/ 55158 w 3125627"/>
+              <a:gd name="csY0" fmla="*/ 4091691 h 4270298"/>
+              <a:gd name="csX1" fmla="*/ 9893 w 3125627"/>
+              <a:gd name="csY1" fmla="*/ 3928728 h 4270298"/>
+              <a:gd name="csX2" fmla="*/ 837 w 3125627"/>
+              <a:gd name="csY2" fmla="*/ 253021 h 4270298"/>
+              <a:gd name="csX3" fmla="*/ 507833 w 3125627"/>
+              <a:gd name="csY3" fmla="*/ 35739 h 4270298"/>
+              <a:gd name="csX4" fmla="*/ 2716877 w 3125627"/>
+              <a:gd name="csY4" fmla="*/ 26684 h 4270298"/>
+              <a:gd name="csX5" fmla="*/ 3097125 w 3125627"/>
+              <a:gd name="csY5" fmla="*/ 298290 h 4270298"/>
+              <a:gd name="csX6" fmla="*/ 3097122 w 3125627"/>
+              <a:gd name="csY6" fmla="*/ 1230795 h 4270298"/>
+              <a:gd name="csX7" fmla="*/ 2716881 w 3125627"/>
+              <a:gd name="csY7" fmla="*/ 1411867 h 4270298"/>
+              <a:gd name="csX8" fmla="*/ 616474 w 3125627"/>
+              <a:gd name="csY8" fmla="*/ 1420918 h 4270298"/>
+              <a:gd name="csX9" fmla="*/ 317710 w 3125627"/>
+              <a:gd name="csY9" fmla="*/ 1592936 h 4270298"/>
+              <a:gd name="csX10" fmla="*/ 353922 w 3125627"/>
+              <a:gd name="csY10" fmla="*/ 3892514 h 4270298"/>
+              <a:gd name="csX11" fmla="*/ 335817 w 3125627"/>
+              <a:gd name="csY11" fmla="*/ 4091691 h 4270298"/>
+              <a:gd name="csX12" fmla="*/ 55158 w 3125627"/>
+              <a:gd name="csY12" fmla="*/ 4091691 h 4270298"/>
+              <a:gd name="csX0" fmla="*/ 55158 w 3125627"/>
+              <a:gd name="csY0" fmla="*/ 4091691 h 4147794"/>
+              <a:gd name="csX1" fmla="*/ 9893 w 3125627"/>
+              <a:gd name="csY1" fmla="*/ 3928728 h 4147794"/>
+              <a:gd name="csX2" fmla="*/ 837 w 3125627"/>
+              <a:gd name="csY2" fmla="*/ 253021 h 4147794"/>
+              <a:gd name="csX3" fmla="*/ 507833 w 3125627"/>
+              <a:gd name="csY3" fmla="*/ 35739 h 4147794"/>
+              <a:gd name="csX4" fmla="*/ 2716877 w 3125627"/>
+              <a:gd name="csY4" fmla="*/ 26684 h 4147794"/>
+              <a:gd name="csX5" fmla="*/ 3097125 w 3125627"/>
+              <a:gd name="csY5" fmla="*/ 298290 h 4147794"/>
+              <a:gd name="csX6" fmla="*/ 3097122 w 3125627"/>
+              <a:gd name="csY6" fmla="*/ 1230795 h 4147794"/>
+              <a:gd name="csX7" fmla="*/ 2716881 w 3125627"/>
+              <a:gd name="csY7" fmla="*/ 1411867 h 4147794"/>
+              <a:gd name="csX8" fmla="*/ 616474 w 3125627"/>
+              <a:gd name="csY8" fmla="*/ 1420918 h 4147794"/>
+              <a:gd name="csX9" fmla="*/ 317710 w 3125627"/>
+              <a:gd name="csY9" fmla="*/ 1592936 h 4147794"/>
+              <a:gd name="csX10" fmla="*/ 353922 w 3125627"/>
+              <a:gd name="csY10" fmla="*/ 3892514 h 4147794"/>
+              <a:gd name="csX11" fmla="*/ 335817 w 3125627"/>
+              <a:gd name="csY11" fmla="*/ 4091691 h 4147794"/>
+              <a:gd name="csX12" fmla="*/ 55158 w 3125627"/>
+              <a:gd name="csY12" fmla="*/ 4091691 h 4147794"/>
+              <a:gd name="csX0" fmla="*/ 55158 w 3125627"/>
+              <a:gd name="csY0" fmla="*/ 4091691 h 4147794"/>
+              <a:gd name="csX1" fmla="*/ 9893 w 3125627"/>
+              <a:gd name="csY1" fmla="*/ 3928728 h 4147794"/>
+              <a:gd name="csX2" fmla="*/ 837 w 3125627"/>
+              <a:gd name="csY2" fmla="*/ 253021 h 4147794"/>
+              <a:gd name="csX3" fmla="*/ 507833 w 3125627"/>
+              <a:gd name="csY3" fmla="*/ 35739 h 4147794"/>
+              <a:gd name="csX4" fmla="*/ 2716877 w 3125627"/>
+              <a:gd name="csY4" fmla="*/ 26684 h 4147794"/>
+              <a:gd name="csX5" fmla="*/ 3097125 w 3125627"/>
+              <a:gd name="csY5" fmla="*/ 298290 h 4147794"/>
+              <a:gd name="csX6" fmla="*/ 3097122 w 3125627"/>
+              <a:gd name="csY6" fmla="*/ 1230795 h 4147794"/>
+              <a:gd name="csX7" fmla="*/ 2716881 w 3125627"/>
+              <a:gd name="csY7" fmla="*/ 1411867 h 4147794"/>
+              <a:gd name="csX8" fmla="*/ 616474 w 3125627"/>
+              <a:gd name="csY8" fmla="*/ 1420918 h 4147794"/>
+              <a:gd name="csX9" fmla="*/ 317710 w 3125627"/>
+              <a:gd name="csY9" fmla="*/ 1592936 h 4147794"/>
+              <a:gd name="csX10" fmla="*/ 353922 w 3125627"/>
+              <a:gd name="csY10" fmla="*/ 3892514 h 4147794"/>
+              <a:gd name="csX11" fmla="*/ 263389 w 3125627"/>
+              <a:gd name="csY11" fmla="*/ 4091691 h 4147794"/>
+              <a:gd name="csX12" fmla="*/ 55158 w 3125627"/>
+              <a:gd name="csY12" fmla="*/ 4091691 h 4147794"/>
+              <a:gd name="csX0" fmla="*/ 55158 w 3125627"/>
+              <a:gd name="csY0" fmla="*/ 4091691 h 4162453"/>
+              <a:gd name="csX1" fmla="*/ 9893 w 3125627"/>
+              <a:gd name="csY1" fmla="*/ 3928728 h 4162453"/>
+              <a:gd name="csX2" fmla="*/ 837 w 3125627"/>
+              <a:gd name="csY2" fmla="*/ 253021 h 4162453"/>
+              <a:gd name="csX3" fmla="*/ 507833 w 3125627"/>
+              <a:gd name="csY3" fmla="*/ 35739 h 4162453"/>
+              <a:gd name="csX4" fmla="*/ 2716877 w 3125627"/>
+              <a:gd name="csY4" fmla="*/ 26684 h 4162453"/>
+              <a:gd name="csX5" fmla="*/ 3097125 w 3125627"/>
+              <a:gd name="csY5" fmla="*/ 298290 h 4162453"/>
+              <a:gd name="csX6" fmla="*/ 3097122 w 3125627"/>
+              <a:gd name="csY6" fmla="*/ 1230795 h 4162453"/>
+              <a:gd name="csX7" fmla="*/ 2716881 w 3125627"/>
+              <a:gd name="csY7" fmla="*/ 1411867 h 4162453"/>
+              <a:gd name="csX8" fmla="*/ 616474 w 3125627"/>
+              <a:gd name="csY8" fmla="*/ 1420918 h 4162453"/>
+              <a:gd name="csX9" fmla="*/ 317710 w 3125627"/>
+              <a:gd name="csY9" fmla="*/ 1592936 h 4162453"/>
+              <a:gd name="csX10" fmla="*/ 335815 w 3125627"/>
+              <a:gd name="csY10" fmla="*/ 3919674 h 4162453"/>
+              <a:gd name="csX11" fmla="*/ 263389 w 3125627"/>
+              <a:gd name="csY11" fmla="*/ 4091691 h 4162453"/>
+              <a:gd name="csX12" fmla="*/ 55158 w 3125627"/>
+              <a:gd name="csY12" fmla="*/ 4091691 h 4162453"/>
+              <a:gd name="csX0" fmla="*/ 55158 w 3125627"/>
+              <a:gd name="csY0" fmla="*/ 4091691 h 4104104"/>
+              <a:gd name="csX1" fmla="*/ 9893 w 3125627"/>
+              <a:gd name="csY1" fmla="*/ 3928728 h 4104104"/>
+              <a:gd name="csX2" fmla="*/ 837 w 3125627"/>
+              <a:gd name="csY2" fmla="*/ 253021 h 4104104"/>
+              <a:gd name="csX3" fmla="*/ 507833 w 3125627"/>
+              <a:gd name="csY3" fmla="*/ 35739 h 4104104"/>
+              <a:gd name="csX4" fmla="*/ 2716877 w 3125627"/>
+              <a:gd name="csY4" fmla="*/ 26684 h 4104104"/>
+              <a:gd name="csX5" fmla="*/ 3097125 w 3125627"/>
+              <a:gd name="csY5" fmla="*/ 298290 h 4104104"/>
+              <a:gd name="csX6" fmla="*/ 3097122 w 3125627"/>
+              <a:gd name="csY6" fmla="*/ 1230795 h 4104104"/>
+              <a:gd name="csX7" fmla="*/ 2716881 w 3125627"/>
+              <a:gd name="csY7" fmla="*/ 1411867 h 4104104"/>
+              <a:gd name="csX8" fmla="*/ 616474 w 3125627"/>
+              <a:gd name="csY8" fmla="*/ 1420918 h 4104104"/>
+              <a:gd name="csX9" fmla="*/ 317710 w 3125627"/>
+              <a:gd name="csY9" fmla="*/ 1592936 h 4104104"/>
+              <a:gd name="csX10" fmla="*/ 335815 w 3125627"/>
+              <a:gd name="csY10" fmla="*/ 3919674 h 4104104"/>
+              <a:gd name="csX11" fmla="*/ 263389 w 3125627"/>
+              <a:gd name="csY11" fmla="*/ 4091691 h 4104104"/>
+              <a:gd name="csX12" fmla="*/ 55158 w 3125627"/>
+              <a:gd name="csY12" fmla="*/ 4091691 h 4104104"/>
+              <a:gd name="csX0" fmla="*/ 55158 w 3125627"/>
+              <a:gd name="csY0" fmla="*/ 4091691 h 4104104"/>
+              <a:gd name="csX1" fmla="*/ 9893 w 3125627"/>
+              <a:gd name="csY1" fmla="*/ 3928728 h 4104104"/>
+              <a:gd name="csX2" fmla="*/ 837 w 3125627"/>
+              <a:gd name="csY2" fmla="*/ 253021 h 4104104"/>
+              <a:gd name="csX3" fmla="*/ 507833 w 3125627"/>
+              <a:gd name="csY3" fmla="*/ 35739 h 4104104"/>
+              <a:gd name="csX4" fmla="*/ 2716877 w 3125627"/>
+              <a:gd name="csY4" fmla="*/ 26684 h 4104104"/>
+              <a:gd name="csX5" fmla="*/ 3097125 w 3125627"/>
+              <a:gd name="csY5" fmla="*/ 298290 h 4104104"/>
+              <a:gd name="csX6" fmla="*/ 3097122 w 3125627"/>
+              <a:gd name="csY6" fmla="*/ 1230795 h 4104104"/>
+              <a:gd name="csX7" fmla="*/ 2716881 w 3125627"/>
+              <a:gd name="csY7" fmla="*/ 1411867 h 4104104"/>
+              <a:gd name="csX8" fmla="*/ 616474 w 3125627"/>
+              <a:gd name="csY8" fmla="*/ 1420918 h 4104104"/>
+              <a:gd name="csX9" fmla="*/ 317710 w 3125627"/>
+              <a:gd name="csY9" fmla="*/ 1592936 h 4104104"/>
+              <a:gd name="csX10" fmla="*/ 335815 w 3125627"/>
+              <a:gd name="csY10" fmla="*/ 3919674 h 4104104"/>
+              <a:gd name="csX11" fmla="*/ 263389 w 3125627"/>
+              <a:gd name="csY11" fmla="*/ 4091691 h 4104104"/>
+              <a:gd name="csX12" fmla="*/ 55158 w 3125627"/>
+              <a:gd name="csY12" fmla="*/ 4091691 h 4104104"/>
+              <a:gd name="csX0" fmla="*/ 55158 w 3125627"/>
+              <a:gd name="csY0" fmla="*/ 4079295 h 4091708"/>
+              <a:gd name="csX1" fmla="*/ 9893 w 3125627"/>
+              <a:gd name="csY1" fmla="*/ 3916332 h 4091708"/>
+              <a:gd name="csX2" fmla="*/ 837 w 3125627"/>
+              <a:gd name="csY2" fmla="*/ 240625 h 4091708"/>
+              <a:gd name="csX3" fmla="*/ 507833 w 3125627"/>
+              <a:gd name="csY3" fmla="*/ 23343 h 4091708"/>
+              <a:gd name="csX4" fmla="*/ 2716877 w 3125627"/>
+              <a:gd name="csY4" fmla="*/ 14288 h 4091708"/>
+              <a:gd name="csX5" fmla="*/ 3097125 w 3125627"/>
+              <a:gd name="csY5" fmla="*/ 285894 h 4091708"/>
+              <a:gd name="csX6" fmla="*/ 3097122 w 3125627"/>
+              <a:gd name="csY6" fmla="*/ 1218399 h 4091708"/>
+              <a:gd name="csX7" fmla="*/ 2716881 w 3125627"/>
+              <a:gd name="csY7" fmla="*/ 1399471 h 4091708"/>
+              <a:gd name="csX8" fmla="*/ 616474 w 3125627"/>
+              <a:gd name="csY8" fmla="*/ 1408522 h 4091708"/>
+              <a:gd name="csX9" fmla="*/ 317710 w 3125627"/>
+              <a:gd name="csY9" fmla="*/ 1580540 h 4091708"/>
+              <a:gd name="csX10" fmla="*/ 335815 w 3125627"/>
+              <a:gd name="csY10" fmla="*/ 3907278 h 4091708"/>
+              <a:gd name="csX11" fmla="*/ 263389 w 3125627"/>
+              <a:gd name="csY11" fmla="*/ 4079295 h 4091708"/>
+              <a:gd name="csX12" fmla="*/ 55158 w 3125627"/>
+              <a:gd name="csY12" fmla="*/ 4079295 h 4091708"/>
+              <a:gd name="csX0" fmla="*/ 55158 w 3125627"/>
+              <a:gd name="csY0" fmla="*/ 4067644 h 4080057"/>
+              <a:gd name="csX1" fmla="*/ 9893 w 3125627"/>
+              <a:gd name="csY1" fmla="*/ 3904681 h 4080057"/>
+              <a:gd name="csX2" fmla="*/ 837 w 3125627"/>
+              <a:gd name="csY2" fmla="*/ 228974 h 4080057"/>
+              <a:gd name="csX3" fmla="*/ 507833 w 3125627"/>
+              <a:gd name="csY3" fmla="*/ 11692 h 4080057"/>
+              <a:gd name="csX4" fmla="*/ 2716877 w 3125627"/>
+              <a:gd name="csY4" fmla="*/ 2637 h 4080057"/>
+              <a:gd name="csX5" fmla="*/ 3097125 w 3125627"/>
+              <a:gd name="csY5" fmla="*/ 274243 h 4080057"/>
+              <a:gd name="csX6" fmla="*/ 3097122 w 3125627"/>
+              <a:gd name="csY6" fmla="*/ 1206748 h 4080057"/>
+              <a:gd name="csX7" fmla="*/ 2716881 w 3125627"/>
+              <a:gd name="csY7" fmla="*/ 1387820 h 4080057"/>
+              <a:gd name="csX8" fmla="*/ 616474 w 3125627"/>
+              <a:gd name="csY8" fmla="*/ 1396871 h 4080057"/>
+              <a:gd name="csX9" fmla="*/ 317710 w 3125627"/>
+              <a:gd name="csY9" fmla="*/ 1568889 h 4080057"/>
+              <a:gd name="csX10" fmla="*/ 335815 w 3125627"/>
+              <a:gd name="csY10" fmla="*/ 3895627 h 4080057"/>
+              <a:gd name="csX11" fmla="*/ 263389 w 3125627"/>
+              <a:gd name="csY11" fmla="*/ 4067644 h 4080057"/>
+              <a:gd name="csX12" fmla="*/ 55158 w 3125627"/>
+              <a:gd name="csY12" fmla="*/ 4067644 h 4080057"/>
+              <a:gd name="csX0" fmla="*/ 55158 w 3125627"/>
+              <a:gd name="csY0" fmla="*/ 4065007 h 4077420"/>
+              <a:gd name="csX1" fmla="*/ 9893 w 3125627"/>
+              <a:gd name="csY1" fmla="*/ 3902044 h 4077420"/>
+              <a:gd name="csX2" fmla="*/ 837 w 3125627"/>
+              <a:gd name="csY2" fmla="*/ 226337 h 4077420"/>
+              <a:gd name="csX3" fmla="*/ 507833 w 3125627"/>
+              <a:gd name="csY3" fmla="*/ 9055 h 4077420"/>
+              <a:gd name="csX4" fmla="*/ 2716877 w 3125627"/>
+              <a:gd name="csY4" fmla="*/ 0 h 4077420"/>
+              <a:gd name="csX5" fmla="*/ 3097125 w 3125627"/>
+              <a:gd name="csY5" fmla="*/ 271606 h 4077420"/>
+              <a:gd name="csX6" fmla="*/ 3097122 w 3125627"/>
+              <a:gd name="csY6" fmla="*/ 1204111 h 4077420"/>
+              <a:gd name="csX7" fmla="*/ 2716881 w 3125627"/>
+              <a:gd name="csY7" fmla="*/ 1385183 h 4077420"/>
+              <a:gd name="csX8" fmla="*/ 616474 w 3125627"/>
+              <a:gd name="csY8" fmla="*/ 1394234 h 4077420"/>
+              <a:gd name="csX9" fmla="*/ 317710 w 3125627"/>
+              <a:gd name="csY9" fmla="*/ 1566252 h 4077420"/>
+              <a:gd name="csX10" fmla="*/ 335815 w 3125627"/>
+              <a:gd name="csY10" fmla="*/ 3892990 h 4077420"/>
+              <a:gd name="csX11" fmla="*/ 263389 w 3125627"/>
+              <a:gd name="csY11" fmla="*/ 4065007 h 4077420"/>
+              <a:gd name="csX12" fmla="*/ 55158 w 3125627"/>
+              <a:gd name="csY12" fmla="*/ 4065007 h 4077420"/>
+              <a:gd name="csX0" fmla="*/ 55158 w 3125627"/>
+              <a:gd name="csY0" fmla="*/ 4065007 h 4077420"/>
+              <a:gd name="csX1" fmla="*/ 9893 w 3125627"/>
+              <a:gd name="csY1" fmla="*/ 3902044 h 4077420"/>
+              <a:gd name="csX2" fmla="*/ 837 w 3125627"/>
+              <a:gd name="csY2" fmla="*/ 226337 h 4077420"/>
+              <a:gd name="csX3" fmla="*/ 507833 w 3125627"/>
+              <a:gd name="csY3" fmla="*/ 9055 h 4077420"/>
+              <a:gd name="csX4" fmla="*/ 2716877 w 3125627"/>
+              <a:gd name="csY4" fmla="*/ 0 h 4077420"/>
+              <a:gd name="csX5" fmla="*/ 3097125 w 3125627"/>
+              <a:gd name="csY5" fmla="*/ 271606 h 4077420"/>
+              <a:gd name="csX6" fmla="*/ 3097122 w 3125627"/>
+              <a:gd name="csY6" fmla="*/ 1204111 h 4077420"/>
+              <a:gd name="csX7" fmla="*/ 2716881 w 3125627"/>
+              <a:gd name="csY7" fmla="*/ 1385183 h 4077420"/>
+              <a:gd name="csX8" fmla="*/ 616474 w 3125627"/>
+              <a:gd name="csY8" fmla="*/ 1394234 h 4077420"/>
+              <a:gd name="csX9" fmla="*/ 317710 w 3125627"/>
+              <a:gd name="csY9" fmla="*/ 1566252 h 4077420"/>
+              <a:gd name="csX10" fmla="*/ 308655 w 3125627"/>
+              <a:gd name="csY10" fmla="*/ 3883936 h 4077420"/>
+              <a:gd name="csX11" fmla="*/ 263389 w 3125627"/>
+              <a:gd name="csY11" fmla="*/ 4065007 h 4077420"/>
+              <a:gd name="csX12" fmla="*/ 55158 w 3125627"/>
+              <a:gd name="csY12" fmla="*/ 4065007 h 4077420"/>
+              <a:gd name="csX0" fmla="*/ 55158 w 3125627"/>
+              <a:gd name="csY0" fmla="*/ 4065007 h 4135506"/>
+              <a:gd name="csX1" fmla="*/ 9893 w 3125627"/>
+              <a:gd name="csY1" fmla="*/ 3902044 h 4135506"/>
+              <a:gd name="csX2" fmla="*/ 837 w 3125627"/>
+              <a:gd name="csY2" fmla="*/ 226337 h 4135506"/>
+              <a:gd name="csX3" fmla="*/ 507833 w 3125627"/>
+              <a:gd name="csY3" fmla="*/ 9055 h 4135506"/>
+              <a:gd name="csX4" fmla="*/ 2716877 w 3125627"/>
+              <a:gd name="csY4" fmla="*/ 0 h 4135506"/>
+              <a:gd name="csX5" fmla="*/ 3097125 w 3125627"/>
+              <a:gd name="csY5" fmla="*/ 271606 h 4135506"/>
+              <a:gd name="csX6" fmla="*/ 3097122 w 3125627"/>
+              <a:gd name="csY6" fmla="*/ 1204111 h 4135506"/>
+              <a:gd name="csX7" fmla="*/ 2716881 w 3125627"/>
+              <a:gd name="csY7" fmla="*/ 1385183 h 4135506"/>
+              <a:gd name="csX8" fmla="*/ 616474 w 3125627"/>
+              <a:gd name="csY8" fmla="*/ 1394234 h 4135506"/>
+              <a:gd name="csX9" fmla="*/ 317710 w 3125627"/>
+              <a:gd name="csY9" fmla="*/ 1566252 h 4135506"/>
+              <a:gd name="csX10" fmla="*/ 308655 w 3125627"/>
+              <a:gd name="csY10" fmla="*/ 3883936 h 4135506"/>
+              <a:gd name="csX11" fmla="*/ 218121 w 3125627"/>
+              <a:gd name="csY11" fmla="*/ 4074061 h 4135506"/>
+              <a:gd name="csX12" fmla="*/ 55158 w 3125627"/>
+              <a:gd name="csY12" fmla="*/ 4065007 h 4135506"/>
+              <a:gd name="csX0" fmla="*/ 55158 w 3125627"/>
+              <a:gd name="csY0" fmla="*/ 4065007 h 4081083"/>
+              <a:gd name="csX1" fmla="*/ 9893 w 3125627"/>
+              <a:gd name="csY1" fmla="*/ 3902044 h 4081083"/>
+              <a:gd name="csX2" fmla="*/ 837 w 3125627"/>
+              <a:gd name="csY2" fmla="*/ 226337 h 4081083"/>
+              <a:gd name="csX3" fmla="*/ 507833 w 3125627"/>
+              <a:gd name="csY3" fmla="*/ 9055 h 4081083"/>
+              <a:gd name="csX4" fmla="*/ 2716877 w 3125627"/>
+              <a:gd name="csY4" fmla="*/ 0 h 4081083"/>
+              <a:gd name="csX5" fmla="*/ 3097125 w 3125627"/>
+              <a:gd name="csY5" fmla="*/ 271606 h 4081083"/>
+              <a:gd name="csX6" fmla="*/ 3097122 w 3125627"/>
+              <a:gd name="csY6" fmla="*/ 1204111 h 4081083"/>
+              <a:gd name="csX7" fmla="*/ 2716881 w 3125627"/>
+              <a:gd name="csY7" fmla="*/ 1385183 h 4081083"/>
+              <a:gd name="csX8" fmla="*/ 616474 w 3125627"/>
+              <a:gd name="csY8" fmla="*/ 1394234 h 4081083"/>
+              <a:gd name="csX9" fmla="*/ 317710 w 3125627"/>
+              <a:gd name="csY9" fmla="*/ 1566252 h 4081083"/>
+              <a:gd name="csX10" fmla="*/ 308655 w 3125627"/>
+              <a:gd name="csY10" fmla="*/ 3883936 h 4081083"/>
+              <a:gd name="csX11" fmla="*/ 218121 w 3125627"/>
+              <a:gd name="csY11" fmla="*/ 4074061 h 4081083"/>
+              <a:gd name="csX12" fmla="*/ 55158 w 3125627"/>
+              <a:gd name="csY12" fmla="*/ 4065007 h 4081083"/>
+              <a:gd name="csX0" fmla="*/ 55158 w 3125627"/>
+              <a:gd name="csY0" fmla="*/ 4065007 h 4081083"/>
+              <a:gd name="csX1" fmla="*/ 9893 w 3125627"/>
+              <a:gd name="csY1" fmla="*/ 3902044 h 4081083"/>
+              <a:gd name="csX2" fmla="*/ 837 w 3125627"/>
+              <a:gd name="csY2" fmla="*/ 226337 h 4081083"/>
+              <a:gd name="csX3" fmla="*/ 507833 w 3125627"/>
+              <a:gd name="csY3" fmla="*/ 9055 h 4081083"/>
+              <a:gd name="csX4" fmla="*/ 2716877 w 3125627"/>
+              <a:gd name="csY4" fmla="*/ 0 h 4081083"/>
+              <a:gd name="csX5" fmla="*/ 3097125 w 3125627"/>
+              <a:gd name="csY5" fmla="*/ 271606 h 4081083"/>
+              <a:gd name="csX6" fmla="*/ 3097122 w 3125627"/>
+              <a:gd name="csY6" fmla="*/ 1204111 h 4081083"/>
+              <a:gd name="csX7" fmla="*/ 2716881 w 3125627"/>
+              <a:gd name="csY7" fmla="*/ 1385183 h 4081083"/>
+              <a:gd name="csX8" fmla="*/ 616474 w 3125627"/>
+              <a:gd name="csY8" fmla="*/ 1394234 h 4081083"/>
+              <a:gd name="csX9" fmla="*/ 317710 w 3125627"/>
+              <a:gd name="csY9" fmla="*/ 1566252 h 4081083"/>
+              <a:gd name="csX10" fmla="*/ 308655 w 3125627"/>
+              <a:gd name="csY10" fmla="*/ 3883936 h 4081083"/>
+              <a:gd name="csX11" fmla="*/ 218121 w 3125627"/>
+              <a:gd name="csY11" fmla="*/ 4074061 h 4081083"/>
+              <a:gd name="csX12" fmla="*/ 55158 w 3125627"/>
+              <a:gd name="csY12" fmla="*/ 4065007 h 4081083"/>
+              <a:gd name="csX0" fmla="*/ 55158 w 3125627"/>
+              <a:gd name="csY0" fmla="*/ 4065007 h 4081083"/>
+              <a:gd name="csX1" fmla="*/ 9893 w 3125627"/>
+              <a:gd name="csY1" fmla="*/ 3902044 h 4081083"/>
+              <a:gd name="csX2" fmla="*/ 837 w 3125627"/>
+              <a:gd name="csY2" fmla="*/ 226337 h 4081083"/>
+              <a:gd name="csX3" fmla="*/ 507833 w 3125627"/>
+              <a:gd name="csY3" fmla="*/ 9055 h 4081083"/>
+              <a:gd name="csX4" fmla="*/ 2716877 w 3125627"/>
+              <a:gd name="csY4" fmla="*/ 0 h 4081083"/>
+              <a:gd name="csX5" fmla="*/ 3097125 w 3125627"/>
+              <a:gd name="csY5" fmla="*/ 271606 h 4081083"/>
+              <a:gd name="csX6" fmla="*/ 3097122 w 3125627"/>
+              <a:gd name="csY6" fmla="*/ 1204111 h 4081083"/>
+              <a:gd name="csX7" fmla="*/ 2716881 w 3125627"/>
+              <a:gd name="csY7" fmla="*/ 1385183 h 4081083"/>
+              <a:gd name="csX8" fmla="*/ 616474 w 3125627"/>
+              <a:gd name="csY8" fmla="*/ 1394234 h 4081083"/>
+              <a:gd name="csX9" fmla="*/ 317710 w 3125627"/>
+              <a:gd name="csY9" fmla="*/ 1566252 h 4081083"/>
+              <a:gd name="csX10" fmla="*/ 308655 w 3125627"/>
+              <a:gd name="csY10" fmla="*/ 3883936 h 4081083"/>
+              <a:gd name="csX11" fmla="*/ 218121 w 3125627"/>
+              <a:gd name="csY11" fmla="*/ 4074061 h 4081083"/>
+              <a:gd name="csX12" fmla="*/ 55158 w 3125627"/>
+              <a:gd name="csY12" fmla="*/ 4065007 h 4081083"/>
+              <a:gd name="csX0" fmla="*/ 218121 w 3125627"/>
+              <a:gd name="csY0" fmla="*/ 4074061 h 4240567"/>
+              <a:gd name="csX1" fmla="*/ 9893 w 3125627"/>
+              <a:gd name="csY1" fmla="*/ 3902044 h 4240567"/>
+              <a:gd name="csX2" fmla="*/ 837 w 3125627"/>
+              <a:gd name="csY2" fmla="*/ 226337 h 4240567"/>
+              <a:gd name="csX3" fmla="*/ 507833 w 3125627"/>
+              <a:gd name="csY3" fmla="*/ 9055 h 4240567"/>
+              <a:gd name="csX4" fmla="*/ 2716877 w 3125627"/>
+              <a:gd name="csY4" fmla="*/ 0 h 4240567"/>
+              <a:gd name="csX5" fmla="*/ 3097125 w 3125627"/>
+              <a:gd name="csY5" fmla="*/ 271606 h 4240567"/>
+              <a:gd name="csX6" fmla="*/ 3097122 w 3125627"/>
+              <a:gd name="csY6" fmla="*/ 1204111 h 4240567"/>
+              <a:gd name="csX7" fmla="*/ 2716881 w 3125627"/>
+              <a:gd name="csY7" fmla="*/ 1385183 h 4240567"/>
+              <a:gd name="csX8" fmla="*/ 616474 w 3125627"/>
+              <a:gd name="csY8" fmla="*/ 1394234 h 4240567"/>
+              <a:gd name="csX9" fmla="*/ 317710 w 3125627"/>
+              <a:gd name="csY9" fmla="*/ 1566252 h 4240567"/>
+              <a:gd name="csX10" fmla="*/ 308655 w 3125627"/>
+              <a:gd name="csY10" fmla="*/ 3883936 h 4240567"/>
+              <a:gd name="csX11" fmla="*/ 218121 w 3125627"/>
+              <a:gd name="csY11" fmla="*/ 4074061 h 4240567"/>
+              <a:gd name="csX0" fmla="*/ 149064 w 3125627"/>
+              <a:gd name="csY0" fmla="*/ 4074061 h 4240567"/>
+              <a:gd name="csX1" fmla="*/ 9893 w 3125627"/>
+              <a:gd name="csY1" fmla="*/ 3902044 h 4240567"/>
+              <a:gd name="csX2" fmla="*/ 837 w 3125627"/>
+              <a:gd name="csY2" fmla="*/ 226337 h 4240567"/>
+              <a:gd name="csX3" fmla="*/ 507833 w 3125627"/>
+              <a:gd name="csY3" fmla="*/ 9055 h 4240567"/>
+              <a:gd name="csX4" fmla="*/ 2716877 w 3125627"/>
+              <a:gd name="csY4" fmla="*/ 0 h 4240567"/>
+              <a:gd name="csX5" fmla="*/ 3097125 w 3125627"/>
+              <a:gd name="csY5" fmla="*/ 271606 h 4240567"/>
+              <a:gd name="csX6" fmla="*/ 3097122 w 3125627"/>
+              <a:gd name="csY6" fmla="*/ 1204111 h 4240567"/>
+              <a:gd name="csX7" fmla="*/ 2716881 w 3125627"/>
+              <a:gd name="csY7" fmla="*/ 1385183 h 4240567"/>
+              <a:gd name="csX8" fmla="*/ 616474 w 3125627"/>
+              <a:gd name="csY8" fmla="*/ 1394234 h 4240567"/>
+              <a:gd name="csX9" fmla="*/ 317710 w 3125627"/>
+              <a:gd name="csY9" fmla="*/ 1566252 h 4240567"/>
+              <a:gd name="csX10" fmla="*/ 308655 w 3125627"/>
+              <a:gd name="csY10" fmla="*/ 3883936 h 4240567"/>
+              <a:gd name="csX11" fmla="*/ 149064 w 3125627"/>
+              <a:gd name="csY11" fmla="*/ 4074061 h 4240567"/>
+              <a:gd name="csX0" fmla="*/ 149064 w 3125627"/>
+              <a:gd name="csY0" fmla="*/ 4074061 h 4240567"/>
+              <a:gd name="csX1" fmla="*/ 9893 w 3125627"/>
+              <a:gd name="csY1" fmla="*/ 3902044 h 4240567"/>
+              <a:gd name="csX2" fmla="*/ 837 w 3125627"/>
+              <a:gd name="csY2" fmla="*/ 226337 h 4240567"/>
+              <a:gd name="csX3" fmla="*/ 507833 w 3125627"/>
+              <a:gd name="csY3" fmla="*/ 9055 h 4240567"/>
+              <a:gd name="csX4" fmla="*/ 2716877 w 3125627"/>
+              <a:gd name="csY4" fmla="*/ 0 h 4240567"/>
+              <a:gd name="csX5" fmla="*/ 3097125 w 3125627"/>
+              <a:gd name="csY5" fmla="*/ 271606 h 4240567"/>
+              <a:gd name="csX6" fmla="*/ 3097122 w 3125627"/>
+              <a:gd name="csY6" fmla="*/ 1204111 h 4240567"/>
+              <a:gd name="csX7" fmla="*/ 2716881 w 3125627"/>
+              <a:gd name="csY7" fmla="*/ 1385183 h 4240567"/>
+              <a:gd name="csX8" fmla="*/ 616474 w 3125627"/>
+              <a:gd name="csY8" fmla="*/ 1394234 h 4240567"/>
+              <a:gd name="csX9" fmla="*/ 317710 w 3125627"/>
+              <a:gd name="csY9" fmla="*/ 1566252 h 4240567"/>
+              <a:gd name="csX10" fmla="*/ 308655 w 3125627"/>
+              <a:gd name="csY10" fmla="*/ 3883936 h 4240567"/>
+              <a:gd name="csX11" fmla="*/ 149064 w 3125627"/>
+              <a:gd name="csY11" fmla="*/ 4074061 h 4240567"/>
+              <a:gd name="csX0" fmla="*/ 149064 w 3125627"/>
+              <a:gd name="csY0" fmla="*/ 4074061 h 4240567"/>
+              <a:gd name="csX1" fmla="*/ 9893 w 3125627"/>
+              <a:gd name="csY1" fmla="*/ 3902044 h 4240567"/>
+              <a:gd name="csX2" fmla="*/ 837 w 3125627"/>
+              <a:gd name="csY2" fmla="*/ 226337 h 4240567"/>
+              <a:gd name="csX3" fmla="*/ 507833 w 3125627"/>
+              <a:gd name="csY3" fmla="*/ 9055 h 4240567"/>
+              <a:gd name="csX4" fmla="*/ 2716877 w 3125627"/>
+              <a:gd name="csY4" fmla="*/ 0 h 4240567"/>
+              <a:gd name="csX5" fmla="*/ 3097125 w 3125627"/>
+              <a:gd name="csY5" fmla="*/ 271606 h 4240567"/>
+              <a:gd name="csX6" fmla="*/ 3097122 w 3125627"/>
+              <a:gd name="csY6" fmla="*/ 1204111 h 4240567"/>
+              <a:gd name="csX7" fmla="*/ 2716881 w 3125627"/>
+              <a:gd name="csY7" fmla="*/ 1385183 h 4240567"/>
+              <a:gd name="csX8" fmla="*/ 616474 w 3125627"/>
+              <a:gd name="csY8" fmla="*/ 1394234 h 4240567"/>
+              <a:gd name="csX9" fmla="*/ 317710 w 3125627"/>
+              <a:gd name="csY9" fmla="*/ 1566252 h 4240567"/>
+              <a:gd name="csX10" fmla="*/ 308655 w 3125627"/>
+              <a:gd name="csY10" fmla="*/ 3883936 h 4240567"/>
+              <a:gd name="csX11" fmla="*/ 149064 w 3125627"/>
+              <a:gd name="csY11" fmla="*/ 4074061 h 4240567"/>
+              <a:gd name="csX0" fmla="*/ 149064 w 3125627"/>
+              <a:gd name="csY0" fmla="*/ 4074061 h 4241006"/>
+              <a:gd name="csX1" fmla="*/ 9893 w 3125627"/>
+              <a:gd name="csY1" fmla="*/ 3902044 h 4241006"/>
+              <a:gd name="csX2" fmla="*/ 837 w 3125627"/>
+              <a:gd name="csY2" fmla="*/ 226337 h 4241006"/>
+              <a:gd name="csX3" fmla="*/ 507833 w 3125627"/>
+              <a:gd name="csY3" fmla="*/ 9055 h 4241006"/>
+              <a:gd name="csX4" fmla="*/ 2716877 w 3125627"/>
+              <a:gd name="csY4" fmla="*/ 0 h 4241006"/>
+              <a:gd name="csX5" fmla="*/ 3097125 w 3125627"/>
+              <a:gd name="csY5" fmla="*/ 271606 h 4241006"/>
+              <a:gd name="csX6" fmla="*/ 3097122 w 3125627"/>
+              <a:gd name="csY6" fmla="*/ 1204111 h 4241006"/>
+              <a:gd name="csX7" fmla="*/ 2716881 w 3125627"/>
+              <a:gd name="csY7" fmla="*/ 1385183 h 4241006"/>
+              <a:gd name="csX8" fmla="*/ 616474 w 3125627"/>
+              <a:gd name="csY8" fmla="*/ 1394234 h 4241006"/>
+              <a:gd name="csX9" fmla="*/ 317710 w 3125627"/>
+              <a:gd name="csY9" fmla="*/ 1566252 h 4241006"/>
+              <a:gd name="csX10" fmla="*/ 308655 w 3125627"/>
+              <a:gd name="csY10" fmla="*/ 3883936 h 4241006"/>
+              <a:gd name="csX11" fmla="*/ 149064 w 3125627"/>
+              <a:gd name="csY11" fmla="*/ 4074061 h 4241006"/>
+              <a:gd name="csX0" fmla="*/ 154142 w 3130705"/>
+              <a:gd name="csY0" fmla="*/ 4074061 h 4074210"/>
+              <a:gd name="csX1" fmla="*/ 14971 w 3130705"/>
+              <a:gd name="csY1" fmla="*/ 3902044 h 4074210"/>
+              <a:gd name="csX2" fmla="*/ 5915 w 3130705"/>
+              <a:gd name="csY2" fmla="*/ 226337 h 4074210"/>
+              <a:gd name="csX3" fmla="*/ 512911 w 3130705"/>
+              <a:gd name="csY3" fmla="*/ 9055 h 4074210"/>
+              <a:gd name="csX4" fmla="*/ 2721955 w 3130705"/>
+              <a:gd name="csY4" fmla="*/ 0 h 4074210"/>
+              <a:gd name="csX5" fmla="*/ 3102203 w 3130705"/>
+              <a:gd name="csY5" fmla="*/ 271606 h 4074210"/>
+              <a:gd name="csX6" fmla="*/ 3102200 w 3130705"/>
+              <a:gd name="csY6" fmla="*/ 1204111 h 4074210"/>
+              <a:gd name="csX7" fmla="*/ 2721959 w 3130705"/>
+              <a:gd name="csY7" fmla="*/ 1385183 h 4074210"/>
+              <a:gd name="csX8" fmla="*/ 621552 w 3130705"/>
+              <a:gd name="csY8" fmla="*/ 1394234 h 4074210"/>
+              <a:gd name="csX9" fmla="*/ 322788 w 3130705"/>
+              <a:gd name="csY9" fmla="*/ 1566252 h 4074210"/>
+              <a:gd name="csX10" fmla="*/ 313733 w 3130705"/>
+              <a:gd name="csY10" fmla="*/ 3883936 h 4074210"/>
+              <a:gd name="csX11" fmla="*/ 154142 w 3130705"/>
+              <a:gd name="csY11" fmla="*/ 4074061 h 4074210"/>
+              <a:gd name="csX0" fmla="*/ 149358 w 3125921"/>
+              <a:gd name="csY0" fmla="*/ 4074061 h 4074210"/>
+              <a:gd name="csX1" fmla="*/ 10187 w 3125921"/>
+              <a:gd name="csY1" fmla="*/ 3902044 h 4074210"/>
+              <a:gd name="csX2" fmla="*/ 1131 w 3125921"/>
+              <a:gd name="csY2" fmla="*/ 226337 h 4074210"/>
+              <a:gd name="csX3" fmla="*/ 508127 w 3125921"/>
+              <a:gd name="csY3" fmla="*/ 9055 h 4074210"/>
+              <a:gd name="csX4" fmla="*/ 2717171 w 3125921"/>
+              <a:gd name="csY4" fmla="*/ 0 h 4074210"/>
+              <a:gd name="csX5" fmla="*/ 3097419 w 3125921"/>
+              <a:gd name="csY5" fmla="*/ 271606 h 4074210"/>
+              <a:gd name="csX6" fmla="*/ 3097416 w 3125921"/>
+              <a:gd name="csY6" fmla="*/ 1204111 h 4074210"/>
+              <a:gd name="csX7" fmla="*/ 2717175 w 3125921"/>
+              <a:gd name="csY7" fmla="*/ 1385183 h 4074210"/>
+              <a:gd name="csX8" fmla="*/ 616768 w 3125921"/>
+              <a:gd name="csY8" fmla="*/ 1394234 h 4074210"/>
+              <a:gd name="csX9" fmla="*/ 318004 w 3125921"/>
+              <a:gd name="csY9" fmla="*/ 1566252 h 4074210"/>
+              <a:gd name="csX10" fmla="*/ 308949 w 3125921"/>
+              <a:gd name="csY10" fmla="*/ 3883936 h 4074210"/>
+              <a:gd name="csX11" fmla="*/ 149358 w 3125921"/>
+              <a:gd name="csY11" fmla="*/ 4074061 h 4074210"/>
+              <a:gd name="csX0" fmla="*/ 149358 w 3125921"/>
+              <a:gd name="csY0" fmla="*/ 4074061 h 4074482"/>
+              <a:gd name="csX1" fmla="*/ 10187 w 3125921"/>
+              <a:gd name="csY1" fmla="*/ 3902044 h 4074482"/>
+              <a:gd name="csX2" fmla="*/ 1131 w 3125921"/>
+              <a:gd name="csY2" fmla="*/ 226337 h 4074482"/>
+              <a:gd name="csX3" fmla="*/ 508127 w 3125921"/>
+              <a:gd name="csY3" fmla="*/ 9055 h 4074482"/>
+              <a:gd name="csX4" fmla="*/ 2717171 w 3125921"/>
+              <a:gd name="csY4" fmla="*/ 0 h 4074482"/>
+              <a:gd name="csX5" fmla="*/ 3097419 w 3125921"/>
+              <a:gd name="csY5" fmla="*/ 271606 h 4074482"/>
+              <a:gd name="csX6" fmla="*/ 3097416 w 3125921"/>
+              <a:gd name="csY6" fmla="*/ 1204111 h 4074482"/>
+              <a:gd name="csX7" fmla="*/ 2717175 w 3125921"/>
+              <a:gd name="csY7" fmla="*/ 1385183 h 4074482"/>
+              <a:gd name="csX8" fmla="*/ 616768 w 3125921"/>
+              <a:gd name="csY8" fmla="*/ 1394234 h 4074482"/>
+              <a:gd name="csX9" fmla="*/ 318004 w 3125921"/>
+              <a:gd name="csY9" fmla="*/ 1566252 h 4074482"/>
+              <a:gd name="csX10" fmla="*/ 308949 w 3125921"/>
+              <a:gd name="csY10" fmla="*/ 3883936 h 4074482"/>
+              <a:gd name="csX11" fmla="*/ 149358 w 3125921"/>
+              <a:gd name="csY11" fmla="*/ 4074061 h 4074482"/>
+              <a:gd name="csX0" fmla="*/ 149358 w 3125921"/>
+              <a:gd name="csY0" fmla="*/ 4074061 h 4074210"/>
+              <a:gd name="csX1" fmla="*/ 10187 w 3125921"/>
+              <a:gd name="csY1" fmla="*/ 3902044 h 4074210"/>
+              <a:gd name="csX2" fmla="*/ 1131 w 3125921"/>
+              <a:gd name="csY2" fmla="*/ 226337 h 4074210"/>
+              <a:gd name="csX3" fmla="*/ 508127 w 3125921"/>
+              <a:gd name="csY3" fmla="*/ 9055 h 4074210"/>
+              <a:gd name="csX4" fmla="*/ 2717171 w 3125921"/>
+              <a:gd name="csY4" fmla="*/ 0 h 4074210"/>
+              <a:gd name="csX5" fmla="*/ 3097419 w 3125921"/>
+              <a:gd name="csY5" fmla="*/ 271606 h 4074210"/>
+              <a:gd name="csX6" fmla="*/ 3097416 w 3125921"/>
+              <a:gd name="csY6" fmla="*/ 1204111 h 4074210"/>
+              <a:gd name="csX7" fmla="*/ 2717175 w 3125921"/>
+              <a:gd name="csY7" fmla="*/ 1385183 h 4074210"/>
+              <a:gd name="csX8" fmla="*/ 616768 w 3125921"/>
+              <a:gd name="csY8" fmla="*/ 1394234 h 4074210"/>
+              <a:gd name="csX9" fmla="*/ 318004 w 3125921"/>
+              <a:gd name="csY9" fmla="*/ 1566252 h 4074210"/>
+              <a:gd name="csX10" fmla="*/ 308949 w 3125921"/>
+              <a:gd name="csY10" fmla="*/ 3883936 h 4074210"/>
+              <a:gd name="csX11" fmla="*/ 149358 w 3125921"/>
+              <a:gd name="csY11" fmla="*/ 4074061 h 4074210"/>
+              <a:gd name="csX0" fmla="*/ 149358 w 3125921"/>
+              <a:gd name="csY0" fmla="*/ 4074061 h 4074068"/>
+              <a:gd name="csX1" fmla="*/ 10187 w 3125921"/>
+              <a:gd name="csY1" fmla="*/ 3902044 h 4074068"/>
+              <a:gd name="csX2" fmla="*/ 1131 w 3125921"/>
+              <a:gd name="csY2" fmla="*/ 226337 h 4074068"/>
+              <a:gd name="csX3" fmla="*/ 508127 w 3125921"/>
+              <a:gd name="csY3" fmla="*/ 9055 h 4074068"/>
+              <a:gd name="csX4" fmla="*/ 2717171 w 3125921"/>
+              <a:gd name="csY4" fmla="*/ 0 h 4074068"/>
+              <a:gd name="csX5" fmla="*/ 3097419 w 3125921"/>
+              <a:gd name="csY5" fmla="*/ 271606 h 4074068"/>
+              <a:gd name="csX6" fmla="*/ 3097416 w 3125921"/>
+              <a:gd name="csY6" fmla="*/ 1204111 h 4074068"/>
+              <a:gd name="csX7" fmla="*/ 2717175 w 3125921"/>
+              <a:gd name="csY7" fmla="*/ 1385183 h 4074068"/>
+              <a:gd name="csX8" fmla="*/ 616768 w 3125921"/>
+              <a:gd name="csY8" fmla="*/ 1394234 h 4074068"/>
+              <a:gd name="csX9" fmla="*/ 318004 w 3125921"/>
+              <a:gd name="csY9" fmla="*/ 1566252 h 4074068"/>
+              <a:gd name="csX10" fmla="*/ 308949 w 3125921"/>
+              <a:gd name="csY10" fmla="*/ 3883936 h 4074068"/>
+              <a:gd name="csX11" fmla="*/ 149358 w 3125921"/>
+              <a:gd name="csY11" fmla="*/ 4074061 h 4074068"/>
+              <a:gd name="csX0" fmla="*/ 149358 w 3125921"/>
+              <a:gd name="csY0" fmla="*/ 4074061 h 4074068"/>
+              <a:gd name="csX1" fmla="*/ 10187 w 3125921"/>
+              <a:gd name="csY1" fmla="*/ 3902044 h 4074068"/>
+              <a:gd name="csX2" fmla="*/ 1131 w 3125921"/>
+              <a:gd name="csY2" fmla="*/ 226337 h 4074068"/>
+              <a:gd name="csX3" fmla="*/ 508127 w 3125921"/>
+              <a:gd name="csY3" fmla="*/ 9055 h 4074068"/>
+              <a:gd name="csX4" fmla="*/ 2717171 w 3125921"/>
+              <a:gd name="csY4" fmla="*/ 0 h 4074068"/>
+              <a:gd name="csX5" fmla="*/ 3097419 w 3125921"/>
+              <a:gd name="csY5" fmla="*/ 271606 h 4074068"/>
+              <a:gd name="csX6" fmla="*/ 3097416 w 3125921"/>
+              <a:gd name="csY6" fmla="*/ 1204111 h 4074068"/>
+              <a:gd name="csX7" fmla="*/ 2717175 w 3125921"/>
+              <a:gd name="csY7" fmla="*/ 1385183 h 4074068"/>
+              <a:gd name="csX8" fmla="*/ 616768 w 3125921"/>
+              <a:gd name="csY8" fmla="*/ 1394234 h 4074068"/>
+              <a:gd name="csX9" fmla="*/ 318004 w 3125921"/>
+              <a:gd name="csY9" fmla="*/ 1566252 h 4074068"/>
+              <a:gd name="csX10" fmla="*/ 306568 w 3125921"/>
+              <a:gd name="csY10" fmla="*/ 3898223 h 4074068"/>
+              <a:gd name="csX11" fmla="*/ 149358 w 3125921"/>
+              <a:gd name="csY11" fmla="*/ 4074061 h 4074068"/>
+              <a:gd name="csX0" fmla="*/ 164722 w 3131760"/>
+              <a:gd name="csY0" fmla="*/ 4074061 h 4239866"/>
+              <a:gd name="csX1" fmla="*/ 16026 w 3131760"/>
+              <a:gd name="csY1" fmla="*/ 3902044 h 4239866"/>
+              <a:gd name="csX2" fmla="*/ 6970 w 3131760"/>
+              <a:gd name="csY2" fmla="*/ 226337 h 4239866"/>
+              <a:gd name="csX3" fmla="*/ 513966 w 3131760"/>
+              <a:gd name="csY3" fmla="*/ 9055 h 4239866"/>
+              <a:gd name="csX4" fmla="*/ 2723010 w 3131760"/>
+              <a:gd name="csY4" fmla="*/ 0 h 4239866"/>
+              <a:gd name="csX5" fmla="*/ 3103258 w 3131760"/>
+              <a:gd name="csY5" fmla="*/ 271606 h 4239866"/>
+              <a:gd name="csX6" fmla="*/ 3103255 w 3131760"/>
+              <a:gd name="csY6" fmla="*/ 1204111 h 4239866"/>
+              <a:gd name="csX7" fmla="*/ 2723014 w 3131760"/>
+              <a:gd name="csY7" fmla="*/ 1385183 h 4239866"/>
+              <a:gd name="csX8" fmla="*/ 622607 w 3131760"/>
+              <a:gd name="csY8" fmla="*/ 1394234 h 4239866"/>
+              <a:gd name="csX9" fmla="*/ 323843 w 3131760"/>
+              <a:gd name="csY9" fmla="*/ 1566252 h 4239866"/>
+              <a:gd name="csX10" fmla="*/ 312407 w 3131760"/>
+              <a:gd name="csY10" fmla="*/ 3898223 h 4239866"/>
+              <a:gd name="csX11" fmla="*/ 164722 w 3131760"/>
+              <a:gd name="csY11" fmla="*/ 4074061 h 4239866"/>
+              <a:gd name="csX0" fmla="*/ 158299 w 3125337"/>
+              <a:gd name="csY0" fmla="*/ 4074061 h 4143595"/>
+              <a:gd name="csX1" fmla="*/ 9603 w 3125337"/>
+              <a:gd name="csY1" fmla="*/ 3902044 h 4143595"/>
+              <a:gd name="csX2" fmla="*/ 547 w 3125337"/>
+              <a:gd name="csY2" fmla="*/ 226337 h 4143595"/>
+              <a:gd name="csX3" fmla="*/ 507543 w 3125337"/>
+              <a:gd name="csY3" fmla="*/ 9055 h 4143595"/>
+              <a:gd name="csX4" fmla="*/ 2716587 w 3125337"/>
+              <a:gd name="csY4" fmla="*/ 0 h 4143595"/>
+              <a:gd name="csX5" fmla="*/ 3096835 w 3125337"/>
+              <a:gd name="csY5" fmla="*/ 271606 h 4143595"/>
+              <a:gd name="csX6" fmla="*/ 3096832 w 3125337"/>
+              <a:gd name="csY6" fmla="*/ 1204111 h 4143595"/>
+              <a:gd name="csX7" fmla="*/ 2716591 w 3125337"/>
+              <a:gd name="csY7" fmla="*/ 1385183 h 4143595"/>
+              <a:gd name="csX8" fmla="*/ 616184 w 3125337"/>
+              <a:gd name="csY8" fmla="*/ 1394234 h 4143595"/>
+              <a:gd name="csX9" fmla="*/ 317420 w 3125337"/>
+              <a:gd name="csY9" fmla="*/ 1566252 h 4143595"/>
+              <a:gd name="csX10" fmla="*/ 305984 w 3125337"/>
+              <a:gd name="csY10" fmla="*/ 3898223 h 4143595"/>
+              <a:gd name="csX11" fmla="*/ 158299 w 3125337"/>
+              <a:gd name="csY11" fmla="*/ 4074061 h 4143595"/>
+              <a:gd name="csX0" fmla="*/ 158511 w 3125549"/>
+              <a:gd name="csY0" fmla="*/ 4074061 h 4143595"/>
+              <a:gd name="csX1" fmla="*/ 9815 w 3125549"/>
+              <a:gd name="csY1" fmla="*/ 3902044 h 4143595"/>
+              <a:gd name="csX2" fmla="*/ 759 w 3125549"/>
+              <a:gd name="csY2" fmla="*/ 226337 h 4143595"/>
+              <a:gd name="csX3" fmla="*/ 507755 w 3125549"/>
+              <a:gd name="csY3" fmla="*/ 9055 h 4143595"/>
+              <a:gd name="csX4" fmla="*/ 2716799 w 3125549"/>
+              <a:gd name="csY4" fmla="*/ 0 h 4143595"/>
+              <a:gd name="csX5" fmla="*/ 3097047 w 3125549"/>
+              <a:gd name="csY5" fmla="*/ 271606 h 4143595"/>
+              <a:gd name="csX6" fmla="*/ 3097044 w 3125549"/>
+              <a:gd name="csY6" fmla="*/ 1204111 h 4143595"/>
+              <a:gd name="csX7" fmla="*/ 2716803 w 3125549"/>
+              <a:gd name="csY7" fmla="*/ 1385183 h 4143595"/>
+              <a:gd name="csX8" fmla="*/ 616396 w 3125549"/>
+              <a:gd name="csY8" fmla="*/ 1394234 h 4143595"/>
+              <a:gd name="csX9" fmla="*/ 317632 w 3125549"/>
+              <a:gd name="csY9" fmla="*/ 1566252 h 4143595"/>
+              <a:gd name="csX10" fmla="*/ 306196 w 3125549"/>
+              <a:gd name="csY10" fmla="*/ 3898223 h 4143595"/>
+              <a:gd name="csX11" fmla="*/ 158511 w 3125549"/>
+              <a:gd name="csY11" fmla="*/ 4074061 h 4143595"/>
+              <a:gd name="csX0" fmla="*/ 158511 w 3125549"/>
+              <a:gd name="csY0" fmla="*/ 4074061 h 4074092"/>
+              <a:gd name="csX1" fmla="*/ 9815 w 3125549"/>
+              <a:gd name="csY1" fmla="*/ 3902044 h 4074092"/>
+              <a:gd name="csX2" fmla="*/ 759 w 3125549"/>
+              <a:gd name="csY2" fmla="*/ 226337 h 4074092"/>
+              <a:gd name="csX3" fmla="*/ 507755 w 3125549"/>
+              <a:gd name="csY3" fmla="*/ 9055 h 4074092"/>
+              <a:gd name="csX4" fmla="*/ 2716799 w 3125549"/>
+              <a:gd name="csY4" fmla="*/ 0 h 4074092"/>
+              <a:gd name="csX5" fmla="*/ 3097047 w 3125549"/>
+              <a:gd name="csY5" fmla="*/ 271606 h 4074092"/>
+              <a:gd name="csX6" fmla="*/ 3097044 w 3125549"/>
+              <a:gd name="csY6" fmla="*/ 1204111 h 4074092"/>
+              <a:gd name="csX7" fmla="*/ 2716803 w 3125549"/>
+              <a:gd name="csY7" fmla="*/ 1385183 h 4074092"/>
+              <a:gd name="csX8" fmla="*/ 616396 w 3125549"/>
+              <a:gd name="csY8" fmla="*/ 1394234 h 4074092"/>
+              <a:gd name="csX9" fmla="*/ 317632 w 3125549"/>
+              <a:gd name="csY9" fmla="*/ 1566252 h 4074092"/>
+              <a:gd name="csX10" fmla="*/ 306196 w 3125549"/>
+              <a:gd name="csY10" fmla="*/ 3898223 h 4074092"/>
+              <a:gd name="csX11" fmla="*/ 158511 w 3125549"/>
+              <a:gd name="csY11" fmla="*/ 4074061 h 4074092"/>
+              <a:gd name="csX0" fmla="*/ 158511 w 3125549"/>
+              <a:gd name="csY0" fmla="*/ 4074061 h 4074092"/>
+              <a:gd name="csX1" fmla="*/ 9815 w 3125549"/>
+              <a:gd name="csY1" fmla="*/ 3902044 h 4074092"/>
+              <a:gd name="csX2" fmla="*/ 759 w 3125549"/>
+              <a:gd name="csY2" fmla="*/ 226337 h 4074092"/>
+              <a:gd name="csX3" fmla="*/ 507755 w 3125549"/>
+              <a:gd name="csY3" fmla="*/ 9055 h 4074092"/>
+              <a:gd name="csX4" fmla="*/ 2716799 w 3125549"/>
+              <a:gd name="csY4" fmla="*/ 0 h 4074092"/>
+              <a:gd name="csX5" fmla="*/ 3097047 w 3125549"/>
+              <a:gd name="csY5" fmla="*/ 271606 h 4074092"/>
+              <a:gd name="csX6" fmla="*/ 3097044 w 3125549"/>
+              <a:gd name="csY6" fmla="*/ 1204111 h 4074092"/>
+              <a:gd name="csX7" fmla="*/ 2716803 w 3125549"/>
+              <a:gd name="csY7" fmla="*/ 1385183 h 4074092"/>
+              <a:gd name="csX8" fmla="*/ 616396 w 3125549"/>
+              <a:gd name="csY8" fmla="*/ 1394234 h 4074092"/>
+              <a:gd name="csX9" fmla="*/ 317632 w 3125549"/>
+              <a:gd name="csY9" fmla="*/ 1566252 h 4074092"/>
+              <a:gd name="csX10" fmla="*/ 306196 w 3125549"/>
+              <a:gd name="csY10" fmla="*/ 3898223 h 4074092"/>
+              <a:gd name="csX11" fmla="*/ 158511 w 3125549"/>
+              <a:gd name="csY11" fmla="*/ 4074061 h 4074092"/>
+            </a:gdLst>
+            <a:ahLst/>
+            <a:cxnLst>
+              <a:cxn ang="0">
+                <a:pos x="csX0" y="csY0"/>
+              </a:cxn>
+              <a:cxn ang="0">
+                <a:pos x="csX1" y="csY1"/>
+              </a:cxn>
+              <a:cxn ang="0">
+                <a:pos x="csX2" y="csY2"/>
+              </a:cxn>
+              <a:cxn ang="0">
+                <a:pos x="csX3" y="csY3"/>
+              </a:cxn>
+              <a:cxn ang="0">
+                <a:pos x="csX4" y="csY4"/>
+              </a:cxn>
+              <a:cxn ang="0">
+                <a:pos x="csX5" y="csY5"/>
+              </a:cxn>
+              <a:cxn ang="0">
+                <a:pos x="csX6" y="csY6"/>
+              </a:cxn>
+              <a:cxn ang="0">
+                <a:pos x="csX7" y="csY7"/>
+              </a:cxn>
+              <a:cxn ang="0">
+                <a:pos x="csX8" y="csY8"/>
+              </a:cxn>
+              <a:cxn ang="0">
+                <a:pos x="csX9" y="csY9"/>
+              </a:cxn>
+              <a:cxn ang="0">
+                <a:pos x="csX10" y="csY10"/>
+              </a:cxn>
+              <a:cxn ang="0">
+                <a:pos x="csX11" y="csY11"/>
+              </a:cxn>
+            </a:cxnLst>
+            <a:rect l="l" t="t" r="r" b="b"/>
+            <a:pathLst>
+              <a:path w="3125549" h="4074092">
+                <a:moveTo>
+                  <a:pt x="158511" y="4074061"/>
+                </a:moveTo>
+                <a:cubicBezTo>
+                  <a:pt x="109114" y="4074698"/>
+                  <a:pt x="9369" y="4067096"/>
+                  <a:pt x="9815" y="3902044"/>
+                </a:cubicBezTo>
+                <a:cubicBezTo>
+                  <a:pt x="11549" y="3260280"/>
+                  <a:pt x="-3489" y="880440"/>
+                  <a:pt x="759" y="226337"/>
+                </a:cubicBezTo>
+                <a:cubicBezTo>
+                  <a:pt x="2268" y="-6035"/>
+                  <a:pt x="254156" y="6790"/>
+                  <a:pt x="507755" y="9055"/>
+                </a:cubicBezTo>
+                <a:lnTo>
+                  <a:pt x="2716799" y="0"/>
+                </a:lnTo>
+                <a:cubicBezTo>
+                  <a:pt x="2985385" y="7545"/>
+                  <a:pt x="3104592" y="102608"/>
+                  <a:pt x="3097047" y="271606"/>
+                </a:cubicBezTo>
+                <a:cubicBezTo>
+                  <a:pt x="3098556" y="476818"/>
+                  <a:pt x="3160418" y="1018515"/>
+                  <a:pt x="3097044" y="1204111"/>
+                </a:cubicBezTo>
+                <a:cubicBezTo>
+                  <a:pt x="3033670" y="1389707"/>
+                  <a:pt x="2893346" y="1376130"/>
+                  <a:pt x="2716803" y="1385183"/>
+                </a:cubicBezTo>
+                <a:lnTo>
+                  <a:pt x="616396" y="1394234"/>
+                </a:lnTo>
+                <a:cubicBezTo>
+                  <a:pt x="369982" y="1395176"/>
+                  <a:pt x="307070" y="1364058"/>
+                  <a:pt x="317632" y="1566252"/>
+                </a:cubicBezTo>
+                <a:cubicBezTo>
+                  <a:pt x="319141" y="1985729"/>
+                  <a:pt x="319444" y="3467718"/>
+                  <a:pt x="306196" y="3898223"/>
+                </a:cubicBezTo>
+                <a:cubicBezTo>
+                  <a:pt x="301248" y="4059020"/>
+                  <a:pt x="207908" y="4073424"/>
+                  <a:pt x="158511" y="4074061"/>
+                </a:cubicBezTo>
+                <a:close/>
+              </a:path>
+            </a:pathLst>
+          </a:custGeom>
+          <a:noFill/>
+          <a:ln>
+            <a:solidFill>
+              <a:srgbClr val="00B050"/>
+            </a:solidFill>
+          </a:ln>
+        </p:spPr>
+        <p:style>
+          <a:lnRef idx="2">
+            <a:schemeClr val="accent1">
+              <a:shade val="15000"/>
+            </a:schemeClr>
+          </a:lnRef>
+          <a:fillRef idx="1">
+            <a:schemeClr val="accent1"/>
+          </a:fillRef>
+          <a:effectRef idx="0">
+            <a:schemeClr val="accent1"/>
+          </a:effectRef>
+          <a:fontRef idx="minor">
+            <a:schemeClr val="lt1"/>
+          </a:fontRef>
+        </p:style>
+        <p:txBody>
+          <a:bodyPr rtlCol="0" anchor="ctr"/>
+          <a:lstStyle/>
+          <a:p>
+            <a:pPr algn="ctr"/>
+            <a:endParaRPr lang="de-DE"/>
+          </a:p>
+        </p:txBody>
+      </p:sp>
+      <p:sp>
+        <p:nvSpPr>
+          <p:cNvPr id="6" name="Ellipse 5">
+            <a:extLst>
+              <a:ext uri="{FF2B5EF4-FFF2-40B4-BE49-F238E27FC236}">
+                <a16:creationId xmlns:a16="http://schemas.microsoft.com/office/drawing/2014/main" id="{4B797748-B39C-C38F-EAF2-7B370B28066E}"/>
+              </a:ext>
+            </a:extLst>
+          </p:cNvPr>
+          <p:cNvSpPr/>
+          <p:nvPr/>
+        </p:nvSpPr>
+        <p:spPr>
+          <a:xfrm>
+            <a:off x="3757188" y="1222218"/>
+            <a:ext cx="199176" cy="199176"/>
+          </a:xfrm>
+          <a:prstGeom prst="ellipse">
+            <a:avLst/>
+          </a:prstGeom>
+          <a:solidFill>
+            <a:schemeClr val="accent6">
+              <a:lumMod val="20000"/>
+              <a:lumOff val="80000"/>
+            </a:schemeClr>
+          </a:solidFill>
+          <a:ln>
+            <a:solidFill>
+              <a:schemeClr val="tx1"/>
+            </a:solidFill>
+          </a:ln>
+        </p:spPr>
+        <p:style>
+          <a:lnRef idx="2">
+            <a:schemeClr val="accent1">
+              <a:shade val="15000"/>
+            </a:schemeClr>
+          </a:lnRef>
+          <a:fillRef idx="1">
+            <a:schemeClr val="accent1"/>
+          </a:fillRef>
+          <a:effectRef idx="0">
+            <a:schemeClr val="accent1"/>
+          </a:effectRef>
+          <a:fontRef idx="minor">
+            <a:schemeClr val="lt1"/>
+          </a:fontRef>
+        </p:style>
+        <p:txBody>
+          <a:bodyPr rtlCol="0" anchor="ctr"/>
+          <a:lstStyle/>
+          <a:p>
+            <a:pPr algn="ctr"/>
+            <a:endParaRPr lang="de-DE"/>
+          </a:p>
+        </p:txBody>
+      </p:sp>
+      <p:sp>
+        <p:nvSpPr>
+          <p:cNvPr id="7" name="Ellipse 6">
+            <a:extLst>
+              <a:ext uri="{FF2B5EF4-FFF2-40B4-BE49-F238E27FC236}">
+                <a16:creationId xmlns:a16="http://schemas.microsoft.com/office/drawing/2014/main" id="{95F0AD8C-C1B3-A314-3E0B-017ED6EF3E04}"/>
+              </a:ext>
+            </a:extLst>
+          </p:cNvPr>
+          <p:cNvSpPr/>
+          <p:nvPr/>
+        </p:nvSpPr>
+        <p:spPr>
+          <a:xfrm>
+            <a:off x="6516986" y="1222218"/>
+            <a:ext cx="199176" cy="199176"/>
+          </a:xfrm>
+          <a:prstGeom prst="ellipse">
+            <a:avLst/>
+          </a:prstGeom>
+          <a:solidFill>
+            <a:schemeClr val="accent6">
+              <a:lumMod val="20000"/>
+              <a:lumOff val="80000"/>
+            </a:schemeClr>
+          </a:solidFill>
+          <a:ln>
+            <a:solidFill>
+              <a:schemeClr val="tx1"/>
+            </a:solidFill>
+          </a:ln>
+        </p:spPr>
+        <p:style>
+          <a:lnRef idx="2">
+            <a:schemeClr val="accent1">
+              <a:shade val="15000"/>
+            </a:schemeClr>
+          </a:lnRef>
+          <a:fillRef idx="1">
+            <a:schemeClr val="accent1"/>
+          </a:fillRef>
+          <a:effectRef idx="0">
+            <a:schemeClr val="accent1"/>
+          </a:effectRef>
+          <a:fontRef idx="minor">
+            <a:schemeClr val="lt1"/>
+          </a:fontRef>
+        </p:style>
+        <p:txBody>
+          <a:bodyPr rtlCol="0" anchor="ctr"/>
+          <a:lstStyle/>
+          <a:p>
+            <a:pPr algn="ctr"/>
+            <a:endParaRPr lang="de-DE"/>
+          </a:p>
+        </p:txBody>
+      </p:sp>
+      <p:sp>
+        <p:nvSpPr>
+          <p:cNvPr id="8" name="Ellipse 7">
+            <a:extLst>
+              <a:ext uri="{FF2B5EF4-FFF2-40B4-BE49-F238E27FC236}">
+                <a16:creationId xmlns:a16="http://schemas.microsoft.com/office/drawing/2014/main" id="{0F6A5635-6887-65F8-8117-F19FBF511D98}"/>
+              </a:ext>
+            </a:extLst>
+          </p:cNvPr>
+          <p:cNvSpPr/>
+          <p:nvPr/>
+        </p:nvSpPr>
+        <p:spPr>
+          <a:xfrm>
+            <a:off x="6516986" y="2252804"/>
+            <a:ext cx="199176" cy="199176"/>
+          </a:xfrm>
+          <a:prstGeom prst="ellipse">
+            <a:avLst/>
+          </a:prstGeom>
+          <a:solidFill>
+            <a:schemeClr val="accent6">
+              <a:lumMod val="20000"/>
+              <a:lumOff val="80000"/>
+            </a:schemeClr>
+          </a:solidFill>
+          <a:ln>
+            <a:solidFill>
+              <a:schemeClr val="tx1"/>
+            </a:solidFill>
+          </a:ln>
+        </p:spPr>
+        <p:style>
+          <a:lnRef idx="2">
+            <a:schemeClr val="accent1">
+              <a:shade val="15000"/>
+            </a:schemeClr>
+          </a:lnRef>
+          <a:fillRef idx="1">
+            <a:schemeClr val="accent1"/>
+          </a:fillRef>
+          <a:effectRef idx="0">
+            <a:schemeClr val="accent1"/>
+          </a:effectRef>
+          <a:fontRef idx="minor">
+            <a:schemeClr val="lt1"/>
+          </a:fontRef>
+        </p:style>
+        <p:txBody>
+          <a:bodyPr rtlCol="0" anchor="ctr"/>
+          <a:lstStyle/>
+          <a:p>
+            <a:pPr algn="ctr"/>
+            <a:endParaRPr lang="de-DE"/>
+          </a:p>
+        </p:txBody>
+      </p:sp>
+      <p:sp>
+        <p:nvSpPr>
+          <p:cNvPr id="9" name="Ellipse 8">
+            <a:extLst>
+              <a:ext uri="{FF2B5EF4-FFF2-40B4-BE49-F238E27FC236}">
+                <a16:creationId xmlns:a16="http://schemas.microsoft.com/office/drawing/2014/main" id="{C2DA8800-D1DF-8439-DEDB-330AEB7A3A86}"/>
+              </a:ext>
+            </a:extLst>
+          </p:cNvPr>
+          <p:cNvSpPr/>
+          <p:nvPr/>
+        </p:nvSpPr>
+        <p:spPr>
+          <a:xfrm>
+            <a:off x="4061988" y="2559113"/>
+            <a:ext cx="199176" cy="199176"/>
+          </a:xfrm>
+          <a:prstGeom prst="ellipse">
+            <a:avLst/>
+          </a:prstGeom>
+          <a:solidFill>
+            <a:schemeClr val="accent6">
+              <a:lumMod val="20000"/>
+              <a:lumOff val="80000"/>
+            </a:schemeClr>
+          </a:solidFill>
+          <a:ln>
+            <a:solidFill>
+              <a:schemeClr val="tx1"/>
+            </a:solidFill>
+          </a:ln>
+        </p:spPr>
+        <p:style>
+          <a:lnRef idx="2">
+            <a:schemeClr val="accent1">
+              <a:shade val="15000"/>
+            </a:schemeClr>
+          </a:lnRef>
+          <a:fillRef idx="1">
+            <a:schemeClr val="accent1"/>
+          </a:fillRef>
+          <a:effectRef idx="0">
+            <a:schemeClr val="accent1"/>
+          </a:effectRef>
+          <a:fontRef idx="minor">
+            <a:schemeClr val="lt1"/>
+          </a:fontRef>
+        </p:style>
+        <p:txBody>
+          <a:bodyPr rtlCol="0" anchor="ctr"/>
+          <a:lstStyle/>
+          <a:p>
+            <a:pPr algn="ctr"/>
+            <a:endParaRPr lang="de-DE"/>
+          </a:p>
+        </p:txBody>
+      </p:sp>
+      <p:sp>
+        <p:nvSpPr>
+          <p:cNvPr id="10" name="Ellipse 9">
+            <a:extLst>
+              <a:ext uri="{FF2B5EF4-FFF2-40B4-BE49-F238E27FC236}">
+                <a16:creationId xmlns:a16="http://schemas.microsoft.com/office/drawing/2014/main" id="{5B06E4EA-F2A0-3513-9975-ED0F8DA7E6F9}"/>
+              </a:ext>
+            </a:extLst>
+          </p:cNvPr>
+          <p:cNvSpPr/>
+          <p:nvPr/>
+        </p:nvSpPr>
+        <p:spPr>
+          <a:xfrm>
+            <a:off x="3757188" y="4979750"/>
+            <a:ext cx="199176" cy="199176"/>
+          </a:xfrm>
+          <a:prstGeom prst="ellipse">
+            <a:avLst/>
+          </a:prstGeom>
+          <a:solidFill>
+            <a:schemeClr val="accent6">
+              <a:lumMod val="20000"/>
+              <a:lumOff val="80000"/>
+            </a:schemeClr>
+          </a:solidFill>
+          <a:ln>
+            <a:solidFill>
+              <a:schemeClr val="tx1"/>
+            </a:solidFill>
+          </a:ln>
+        </p:spPr>
+        <p:style>
+          <a:lnRef idx="2">
+            <a:schemeClr val="accent1">
+              <a:shade val="15000"/>
+            </a:schemeClr>
+          </a:lnRef>
+          <a:fillRef idx="1">
+            <a:schemeClr val="accent1"/>
+          </a:fillRef>
+          <a:effectRef idx="0">
+            <a:schemeClr val="accent1"/>
+          </a:effectRef>
+          <a:fontRef idx="minor">
+            <a:schemeClr val="lt1"/>
+          </a:fontRef>
+        </p:style>
+        <p:txBody>
+          <a:bodyPr rtlCol="0" anchor="ctr"/>
+          <a:lstStyle/>
+          <a:p>
+            <a:pPr algn="ctr"/>
+            <a:endParaRPr lang="de-DE"/>
+          </a:p>
+        </p:txBody>
+      </p:sp>
+      <p:sp>
+        <p:nvSpPr>
+          <p:cNvPr id="11" name="Freihandform: Form 10">
+            <a:extLst>
+              <a:ext uri="{FF2B5EF4-FFF2-40B4-BE49-F238E27FC236}">
+                <a16:creationId xmlns:a16="http://schemas.microsoft.com/office/drawing/2014/main" id="{F227ABF7-3240-A3DB-1730-417737D7F925}"/>
+              </a:ext>
+            </a:extLst>
+          </p:cNvPr>
+          <p:cNvSpPr/>
+          <p:nvPr/>
+        </p:nvSpPr>
+        <p:spPr>
+          <a:xfrm flipH="1">
+            <a:off x="4005262" y="1086728"/>
+            <a:ext cx="3125549" cy="4074092"/>
+          </a:xfrm>
+          <a:custGeom>
+            <a:avLst/>
+            <a:gdLst>
+              <a:gd name="csX0" fmla="*/ 0 w 2888056"/>
+              <a:gd name="csY0" fmla="*/ 4146487 h 4146487"/>
+              <a:gd name="csX1" fmla="*/ 0 w 2888056"/>
+              <a:gd name="csY1" fmla="*/ 199176 h 4146487"/>
+              <a:gd name="csX2" fmla="*/ 2879002 w 2888056"/>
+              <a:gd name="csY2" fmla="*/ 199176 h 4146487"/>
+              <a:gd name="csX3" fmla="*/ 2888056 w 2888056"/>
+              <a:gd name="csY3" fmla="*/ 0 h 4146487"/>
+              <a:gd name="csX4" fmla="*/ 2888056 w 2888056"/>
+              <a:gd name="csY4" fmla="*/ 1430447 h 4146487"/>
+              <a:gd name="csX5" fmla="*/ 289711 w 2888056"/>
+              <a:gd name="csY5" fmla="*/ 1430447 h 4146487"/>
+              <a:gd name="csX6" fmla="*/ 289711 w 2888056"/>
+              <a:gd name="csY6" fmla="*/ 4137433 h 4146487"/>
+              <a:gd name="csX7" fmla="*/ 0 w 2888056"/>
+              <a:gd name="csY7" fmla="*/ 4146487 h 4146487"/>
+              <a:gd name="csX0" fmla="*/ 0 w 2888056"/>
+              <a:gd name="csY0" fmla="*/ 3947311 h 3947311"/>
+              <a:gd name="csX1" fmla="*/ 0 w 2888056"/>
+              <a:gd name="csY1" fmla="*/ 0 h 3947311"/>
+              <a:gd name="csX2" fmla="*/ 2879002 w 2888056"/>
+              <a:gd name="csY2" fmla="*/ 0 h 3947311"/>
+              <a:gd name="csX3" fmla="*/ 2888056 w 2888056"/>
+              <a:gd name="csY3" fmla="*/ 3947311 h 3947311"/>
+              <a:gd name="csX4" fmla="*/ 2888056 w 2888056"/>
+              <a:gd name="csY4" fmla="*/ 1231271 h 3947311"/>
+              <a:gd name="csX5" fmla="*/ 289711 w 2888056"/>
+              <a:gd name="csY5" fmla="*/ 1231271 h 3947311"/>
+              <a:gd name="csX6" fmla="*/ 289711 w 2888056"/>
+              <a:gd name="csY6" fmla="*/ 3938257 h 3947311"/>
+              <a:gd name="csX7" fmla="*/ 0 w 2888056"/>
+              <a:gd name="csY7" fmla="*/ 3947311 h 3947311"/>
+              <a:gd name="csX0" fmla="*/ 0 w 2888056"/>
+              <a:gd name="csY0" fmla="*/ 3947311 h 3947311"/>
+              <a:gd name="csX1" fmla="*/ 0 w 2888056"/>
+              <a:gd name="csY1" fmla="*/ 0 h 3947311"/>
+              <a:gd name="csX2" fmla="*/ 2879002 w 2888056"/>
+              <a:gd name="csY2" fmla="*/ 0 h 3947311"/>
+              <a:gd name="csX3" fmla="*/ 2888056 w 2888056"/>
+              <a:gd name="csY3" fmla="*/ 1231271 h 3947311"/>
+              <a:gd name="csX4" fmla="*/ 289711 w 2888056"/>
+              <a:gd name="csY4" fmla="*/ 1231271 h 3947311"/>
+              <a:gd name="csX5" fmla="*/ 289711 w 2888056"/>
+              <a:gd name="csY5" fmla="*/ 3938257 h 3947311"/>
+              <a:gd name="csX6" fmla="*/ 0 w 2888056"/>
+              <a:gd name="csY6" fmla="*/ 3947311 h 3947311"/>
+              <a:gd name="csX0" fmla="*/ 0 w 2888056"/>
+              <a:gd name="csY0" fmla="*/ 3947311 h 4362760"/>
+              <a:gd name="csX1" fmla="*/ 0 w 2888056"/>
+              <a:gd name="csY1" fmla="*/ 0 h 4362760"/>
+              <a:gd name="csX2" fmla="*/ 2879002 w 2888056"/>
+              <a:gd name="csY2" fmla="*/ 0 h 4362760"/>
+              <a:gd name="csX3" fmla="*/ 2888056 w 2888056"/>
+              <a:gd name="csY3" fmla="*/ 1231271 h 4362760"/>
+              <a:gd name="csX4" fmla="*/ 289711 w 2888056"/>
+              <a:gd name="csY4" fmla="*/ 1231271 h 4362760"/>
+              <a:gd name="csX5" fmla="*/ 289711 w 2888056"/>
+              <a:gd name="csY5" fmla="*/ 3938257 h 4362760"/>
+              <a:gd name="csX6" fmla="*/ 0 w 2888056"/>
+              <a:gd name="csY6" fmla="*/ 3947311 h 4362760"/>
+              <a:gd name="csX0" fmla="*/ 224400 w 3112456"/>
+              <a:gd name="csY0" fmla="*/ 3947311 h 4362760"/>
+              <a:gd name="csX1" fmla="*/ 224400 w 3112456"/>
+              <a:gd name="csY1" fmla="*/ 0 h 4362760"/>
+              <a:gd name="csX2" fmla="*/ 3103402 w 3112456"/>
+              <a:gd name="csY2" fmla="*/ 0 h 4362760"/>
+              <a:gd name="csX3" fmla="*/ 3112456 w 3112456"/>
+              <a:gd name="csY3" fmla="*/ 1231271 h 4362760"/>
+              <a:gd name="csX4" fmla="*/ 514111 w 3112456"/>
+              <a:gd name="csY4" fmla="*/ 1231271 h 4362760"/>
+              <a:gd name="csX5" fmla="*/ 514111 w 3112456"/>
+              <a:gd name="csY5" fmla="*/ 3938257 h 4362760"/>
+              <a:gd name="csX6" fmla="*/ 224400 w 3112456"/>
+              <a:gd name="csY6" fmla="*/ 3947311 h 4362760"/>
+              <a:gd name="csX0" fmla="*/ 224400 w 3112456"/>
+              <a:gd name="csY0" fmla="*/ 3947311 h 4362760"/>
+              <a:gd name="csX1" fmla="*/ 224400 w 3112456"/>
+              <a:gd name="csY1" fmla="*/ 0 h 4362760"/>
+              <a:gd name="csX2" fmla="*/ 3103402 w 3112456"/>
+              <a:gd name="csY2" fmla="*/ 0 h 4362760"/>
+              <a:gd name="csX3" fmla="*/ 3112456 w 3112456"/>
+              <a:gd name="csY3" fmla="*/ 1231271 h 4362760"/>
+              <a:gd name="csX4" fmla="*/ 514111 w 3112456"/>
+              <a:gd name="csY4" fmla="*/ 1231271 h 4362760"/>
+              <a:gd name="csX5" fmla="*/ 514111 w 3112456"/>
+              <a:gd name="csY5" fmla="*/ 3938257 h 4362760"/>
+              <a:gd name="csX6" fmla="*/ 224400 w 3112456"/>
+              <a:gd name="csY6" fmla="*/ 3947311 h 4362760"/>
+              <a:gd name="csX0" fmla="*/ 224400 w 3450366"/>
+              <a:gd name="csY0" fmla="*/ 3947311 h 4362760"/>
+              <a:gd name="csX1" fmla="*/ 224400 w 3450366"/>
+              <a:gd name="csY1" fmla="*/ 0 h 4362760"/>
+              <a:gd name="csX2" fmla="*/ 3103402 w 3450366"/>
+              <a:gd name="csY2" fmla="*/ 0 h 4362760"/>
+              <a:gd name="csX3" fmla="*/ 3112456 w 3450366"/>
+              <a:gd name="csY3" fmla="*/ 1231271 h 4362760"/>
+              <a:gd name="csX4" fmla="*/ 514111 w 3450366"/>
+              <a:gd name="csY4" fmla="*/ 1231271 h 4362760"/>
+              <a:gd name="csX5" fmla="*/ 514111 w 3450366"/>
+              <a:gd name="csY5" fmla="*/ 3938257 h 4362760"/>
+              <a:gd name="csX6" fmla="*/ 224400 w 3450366"/>
+              <a:gd name="csY6" fmla="*/ 3947311 h 4362760"/>
+              <a:gd name="csX0" fmla="*/ 224400 w 3466512"/>
+              <a:gd name="csY0" fmla="*/ 3947311 h 4362760"/>
+              <a:gd name="csX1" fmla="*/ 224400 w 3466512"/>
+              <a:gd name="csY1" fmla="*/ 0 h 4362760"/>
+              <a:gd name="csX2" fmla="*/ 3103402 w 3466512"/>
+              <a:gd name="csY2" fmla="*/ 0 h 4362760"/>
+              <a:gd name="csX3" fmla="*/ 3112456 w 3466512"/>
+              <a:gd name="csY3" fmla="*/ 1231271 h 4362760"/>
+              <a:gd name="csX4" fmla="*/ 514111 w 3466512"/>
+              <a:gd name="csY4" fmla="*/ 1231271 h 4362760"/>
+              <a:gd name="csX5" fmla="*/ 514111 w 3466512"/>
+              <a:gd name="csY5" fmla="*/ 3938257 h 4362760"/>
+              <a:gd name="csX6" fmla="*/ 224400 w 3466512"/>
+              <a:gd name="csY6" fmla="*/ 3947311 h 4362760"/>
+              <a:gd name="csX0" fmla="*/ 372873 w 3614985"/>
+              <a:gd name="csY0" fmla="*/ 3947311 h 4362760"/>
+              <a:gd name="csX1" fmla="*/ 372873 w 3614985"/>
+              <a:gd name="csY1" fmla="*/ 0 h 4362760"/>
+              <a:gd name="csX2" fmla="*/ 3251875 w 3614985"/>
+              <a:gd name="csY2" fmla="*/ 0 h 4362760"/>
+              <a:gd name="csX3" fmla="*/ 3260929 w 3614985"/>
+              <a:gd name="csY3" fmla="*/ 1231271 h 4362760"/>
+              <a:gd name="csX4" fmla="*/ 662584 w 3614985"/>
+              <a:gd name="csY4" fmla="*/ 1231271 h 4362760"/>
+              <a:gd name="csX5" fmla="*/ 662584 w 3614985"/>
+              <a:gd name="csY5" fmla="*/ 3938257 h 4362760"/>
+              <a:gd name="csX6" fmla="*/ 372873 w 3614985"/>
+              <a:gd name="csY6" fmla="*/ 3947311 h 4362760"/>
+              <a:gd name="csX0" fmla="*/ 372873 w 3614985"/>
+              <a:gd name="csY0" fmla="*/ 3947311 h 4362760"/>
+              <a:gd name="csX1" fmla="*/ 372873 w 3614985"/>
+              <a:gd name="csY1" fmla="*/ 0 h 4362760"/>
+              <a:gd name="csX2" fmla="*/ 400035 w 3614985"/>
+              <a:gd name="csY2" fmla="*/ 9053 h 4362760"/>
+              <a:gd name="csX3" fmla="*/ 3251875 w 3614985"/>
+              <a:gd name="csY3" fmla="*/ 0 h 4362760"/>
+              <a:gd name="csX4" fmla="*/ 3260929 w 3614985"/>
+              <a:gd name="csY4" fmla="*/ 1231271 h 4362760"/>
+              <a:gd name="csX5" fmla="*/ 662584 w 3614985"/>
+              <a:gd name="csY5" fmla="*/ 1231271 h 4362760"/>
+              <a:gd name="csX6" fmla="*/ 662584 w 3614985"/>
+              <a:gd name="csY6" fmla="*/ 3938257 h 4362760"/>
+              <a:gd name="csX7" fmla="*/ 372873 w 3614985"/>
+              <a:gd name="csY7" fmla="*/ 3947311 h 4362760"/>
+              <a:gd name="csX0" fmla="*/ 34538 w 3244007"/>
+              <a:gd name="csY0" fmla="*/ 4239704 h 4655153"/>
+              <a:gd name="csX1" fmla="*/ 34538 w 3244007"/>
+              <a:gd name="csY1" fmla="*/ 292393 h 4655153"/>
+              <a:gd name="csX2" fmla="*/ 297090 w 3244007"/>
+              <a:gd name="csY2" fmla="*/ 292393 h 4655153"/>
+              <a:gd name="csX3" fmla="*/ 2913540 w 3244007"/>
+              <a:gd name="csY3" fmla="*/ 292393 h 4655153"/>
+              <a:gd name="csX4" fmla="*/ 2922594 w 3244007"/>
+              <a:gd name="csY4" fmla="*/ 1523664 h 4655153"/>
+              <a:gd name="csX5" fmla="*/ 324249 w 3244007"/>
+              <a:gd name="csY5" fmla="*/ 1523664 h 4655153"/>
+              <a:gd name="csX6" fmla="*/ 324249 w 3244007"/>
+              <a:gd name="csY6" fmla="*/ 4230650 h 4655153"/>
+              <a:gd name="csX7" fmla="*/ 34538 w 3244007"/>
+              <a:gd name="csY7" fmla="*/ 4239704 h 4655153"/>
+              <a:gd name="csX0" fmla="*/ 34538 w 3244007"/>
+              <a:gd name="csY0" fmla="*/ 4239704 h 4655153"/>
+              <a:gd name="csX1" fmla="*/ 34538 w 3244007"/>
+              <a:gd name="csY1" fmla="*/ 292393 h 4655153"/>
+              <a:gd name="csX2" fmla="*/ 297090 w 3244007"/>
+              <a:gd name="csY2" fmla="*/ 292393 h 4655153"/>
+              <a:gd name="csX3" fmla="*/ 2913540 w 3244007"/>
+              <a:gd name="csY3" fmla="*/ 292393 h 4655153"/>
+              <a:gd name="csX4" fmla="*/ 2922594 w 3244007"/>
+              <a:gd name="csY4" fmla="*/ 1523664 h 4655153"/>
+              <a:gd name="csX5" fmla="*/ 324249 w 3244007"/>
+              <a:gd name="csY5" fmla="*/ 1523664 h 4655153"/>
+              <a:gd name="csX6" fmla="*/ 324249 w 3244007"/>
+              <a:gd name="csY6" fmla="*/ 4230650 h 4655153"/>
+              <a:gd name="csX7" fmla="*/ 34538 w 3244007"/>
+              <a:gd name="csY7" fmla="*/ 4239704 h 4655153"/>
+              <a:gd name="csX0" fmla="*/ 34538 w 3244007"/>
+              <a:gd name="csY0" fmla="*/ 4239704 h 4655153"/>
+              <a:gd name="csX1" fmla="*/ 34538 w 3244007"/>
+              <a:gd name="csY1" fmla="*/ 292393 h 4655153"/>
+              <a:gd name="csX2" fmla="*/ 297090 w 3244007"/>
+              <a:gd name="csY2" fmla="*/ 292393 h 4655153"/>
+              <a:gd name="csX3" fmla="*/ 2913540 w 3244007"/>
+              <a:gd name="csY3" fmla="*/ 292393 h 4655153"/>
+              <a:gd name="csX4" fmla="*/ 2922594 w 3244007"/>
+              <a:gd name="csY4" fmla="*/ 1523664 h 4655153"/>
+              <a:gd name="csX5" fmla="*/ 324249 w 3244007"/>
+              <a:gd name="csY5" fmla="*/ 1523664 h 4655153"/>
+              <a:gd name="csX6" fmla="*/ 324249 w 3244007"/>
+              <a:gd name="csY6" fmla="*/ 4230650 h 4655153"/>
+              <a:gd name="csX7" fmla="*/ 34538 w 3244007"/>
+              <a:gd name="csY7" fmla="*/ 4239704 h 4655153"/>
+              <a:gd name="csX0" fmla="*/ 148603 w 3358072"/>
+              <a:gd name="csY0" fmla="*/ 4038517 h 4453966"/>
+              <a:gd name="csX1" fmla="*/ 148603 w 3358072"/>
+              <a:gd name="csY1" fmla="*/ 91206 h 4453966"/>
+              <a:gd name="csX2" fmla="*/ 411155 w 3358072"/>
+              <a:gd name="csY2" fmla="*/ 91206 h 4453966"/>
+              <a:gd name="csX3" fmla="*/ 3027605 w 3358072"/>
+              <a:gd name="csY3" fmla="*/ 91206 h 4453966"/>
+              <a:gd name="csX4" fmla="*/ 3036659 w 3358072"/>
+              <a:gd name="csY4" fmla="*/ 1322477 h 4453966"/>
+              <a:gd name="csX5" fmla="*/ 438314 w 3358072"/>
+              <a:gd name="csY5" fmla="*/ 1322477 h 4453966"/>
+              <a:gd name="csX6" fmla="*/ 438314 w 3358072"/>
+              <a:gd name="csY6" fmla="*/ 4029463 h 4453966"/>
+              <a:gd name="csX7" fmla="*/ 148603 w 3358072"/>
+              <a:gd name="csY7" fmla="*/ 4038517 h 4453966"/>
+              <a:gd name="csX0" fmla="*/ 57435 w 3266904"/>
+              <a:gd name="csY0" fmla="*/ 4038517 h 4453966"/>
+              <a:gd name="csX1" fmla="*/ 57435 w 3266904"/>
+              <a:gd name="csY1" fmla="*/ 91206 h 4453966"/>
+              <a:gd name="csX2" fmla="*/ 319987 w 3266904"/>
+              <a:gd name="csY2" fmla="*/ 91206 h 4453966"/>
+              <a:gd name="csX3" fmla="*/ 2936437 w 3266904"/>
+              <a:gd name="csY3" fmla="*/ 91206 h 4453966"/>
+              <a:gd name="csX4" fmla="*/ 2945491 w 3266904"/>
+              <a:gd name="csY4" fmla="*/ 1322477 h 4453966"/>
+              <a:gd name="csX5" fmla="*/ 347146 w 3266904"/>
+              <a:gd name="csY5" fmla="*/ 1322477 h 4453966"/>
+              <a:gd name="csX6" fmla="*/ 347146 w 3266904"/>
+              <a:gd name="csY6" fmla="*/ 4029463 h 4453966"/>
+              <a:gd name="csX7" fmla="*/ 57435 w 3266904"/>
+              <a:gd name="csY7" fmla="*/ 4038517 h 4453966"/>
+              <a:gd name="csX0" fmla="*/ 39095 w 3244085"/>
+              <a:gd name="csY0" fmla="*/ 4275272 h 4690721"/>
+              <a:gd name="csX1" fmla="*/ 39095 w 3244085"/>
+              <a:gd name="csY1" fmla="*/ 327961 h 4690721"/>
+              <a:gd name="csX2" fmla="*/ 374075 w 3244085"/>
+              <a:gd name="csY2" fmla="*/ 228373 h 4690721"/>
+              <a:gd name="csX3" fmla="*/ 2918097 w 3244085"/>
+              <a:gd name="csY3" fmla="*/ 327961 h 4690721"/>
+              <a:gd name="csX4" fmla="*/ 2927151 w 3244085"/>
+              <a:gd name="csY4" fmla="*/ 1559232 h 4690721"/>
+              <a:gd name="csX5" fmla="*/ 328806 w 3244085"/>
+              <a:gd name="csY5" fmla="*/ 1559232 h 4690721"/>
+              <a:gd name="csX6" fmla="*/ 328806 w 3244085"/>
+              <a:gd name="csY6" fmla="*/ 4266218 h 4690721"/>
+              <a:gd name="csX7" fmla="*/ 39095 w 3244085"/>
+              <a:gd name="csY7" fmla="*/ 4275272 h 4690721"/>
+              <a:gd name="csX0" fmla="*/ 144671 w 3349661"/>
+              <a:gd name="csY0" fmla="*/ 4080494 h 4495943"/>
+              <a:gd name="csX1" fmla="*/ 144671 w 3349661"/>
+              <a:gd name="csY1" fmla="*/ 133183 h 4495943"/>
+              <a:gd name="csX2" fmla="*/ 479651 w 3349661"/>
+              <a:gd name="csY2" fmla="*/ 33595 h 4495943"/>
+              <a:gd name="csX3" fmla="*/ 3023673 w 3349661"/>
+              <a:gd name="csY3" fmla="*/ 133183 h 4495943"/>
+              <a:gd name="csX4" fmla="*/ 3032727 w 3349661"/>
+              <a:gd name="csY4" fmla="*/ 1364454 h 4495943"/>
+              <a:gd name="csX5" fmla="*/ 434382 w 3349661"/>
+              <a:gd name="csY5" fmla="*/ 1364454 h 4495943"/>
+              <a:gd name="csX6" fmla="*/ 434382 w 3349661"/>
+              <a:gd name="csY6" fmla="*/ 4071440 h 4495943"/>
+              <a:gd name="csX7" fmla="*/ 144671 w 3349661"/>
+              <a:gd name="csY7" fmla="*/ 4080494 h 4495943"/>
+              <a:gd name="csX0" fmla="*/ 76990 w 3281980"/>
+              <a:gd name="csY0" fmla="*/ 4080494 h 4495943"/>
+              <a:gd name="csX1" fmla="*/ 76990 w 3281980"/>
+              <a:gd name="csY1" fmla="*/ 133183 h 4495943"/>
+              <a:gd name="csX2" fmla="*/ 411970 w 3281980"/>
+              <a:gd name="csY2" fmla="*/ 33595 h 4495943"/>
+              <a:gd name="csX3" fmla="*/ 2955992 w 3281980"/>
+              <a:gd name="csY3" fmla="*/ 133183 h 4495943"/>
+              <a:gd name="csX4" fmla="*/ 2965046 w 3281980"/>
+              <a:gd name="csY4" fmla="*/ 1364454 h 4495943"/>
+              <a:gd name="csX5" fmla="*/ 366701 w 3281980"/>
+              <a:gd name="csY5" fmla="*/ 1364454 h 4495943"/>
+              <a:gd name="csX6" fmla="*/ 366701 w 3281980"/>
+              <a:gd name="csY6" fmla="*/ 4071440 h 4495943"/>
+              <a:gd name="csX7" fmla="*/ 76990 w 3281980"/>
+              <a:gd name="csY7" fmla="*/ 4080494 h 4495943"/>
+              <a:gd name="csX0" fmla="*/ 41485 w 3246475"/>
+              <a:gd name="csY0" fmla="*/ 4080494 h 4495943"/>
+              <a:gd name="csX1" fmla="*/ 5273 w 3246475"/>
+              <a:gd name="csY1" fmla="*/ 4026173 h 4495943"/>
+              <a:gd name="csX2" fmla="*/ 41485 w 3246475"/>
+              <a:gd name="csY2" fmla="*/ 133183 h 4495943"/>
+              <a:gd name="csX3" fmla="*/ 376465 w 3246475"/>
+              <a:gd name="csY3" fmla="*/ 33595 h 4495943"/>
+              <a:gd name="csX4" fmla="*/ 2920487 w 3246475"/>
+              <a:gd name="csY4" fmla="*/ 133183 h 4495943"/>
+              <a:gd name="csX5" fmla="*/ 2929541 w 3246475"/>
+              <a:gd name="csY5" fmla="*/ 1364454 h 4495943"/>
+              <a:gd name="csX6" fmla="*/ 331196 w 3246475"/>
+              <a:gd name="csY6" fmla="*/ 1364454 h 4495943"/>
+              <a:gd name="csX7" fmla="*/ 331196 w 3246475"/>
+              <a:gd name="csY7" fmla="*/ 4071440 h 4495943"/>
+              <a:gd name="csX8" fmla="*/ 41485 w 3246475"/>
+              <a:gd name="csY8" fmla="*/ 4080494 h 4495943"/>
+              <a:gd name="csX0" fmla="*/ 47659 w 3252649"/>
+              <a:gd name="csY0" fmla="*/ 4263310 h 4463758"/>
+              <a:gd name="csX1" fmla="*/ 2394 w 3252649"/>
+              <a:gd name="csY1" fmla="*/ 4100347 h 4463758"/>
+              <a:gd name="csX2" fmla="*/ 47659 w 3252649"/>
+              <a:gd name="csY2" fmla="*/ 315999 h 4463758"/>
+              <a:gd name="csX3" fmla="*/ 382639 w 3252649"/>
+              <a:gd name="csY3" fmla="*/ 216411 h 4463758"/>
+              <a:gd name="csX4" fmla="*/ 2926661 w 3252649"/>
+              <a:gd name="csY4" fmla="*/ 315999 h 4463758"/>
+              <a:gd name="csX5" fmla="*/ 2935715 w 3252649"/>
+              <a:gd name="csY5" fmla="*/ 1547270 h 4463758"/>
+              <a:gd name="csX6" fmla="*/ 337370 w 3252649"/>
+              <a:gd name="csY6" fmla="*/ 1547270 h 4463758"/>
+              <a:gd name="csX7" fmla="*/ 337370 w 3252649"/>
+              <a:gd name="csY7" fmla="*/ 4254256 h 4463758"/>
+              <a:gd name="csX8" fmla="*/ 47659 w 3252649"/>
+              <a:gd name="csY8" fmla="*/ 4263310 h 4463758"/>
+              <a:gd name="csX0" fmla="*/ 47659 w 3252649"/>
+              <a:gd name="csY0" fmla="*/ 4263310 h 4457476"/>
+              <a:gd name="csX1" fmla="*/ 2394 w 3252649"/>
+              <a:gd name="csY1" fmla="*/ 4100347 h 4457476"/>
+              <a:gd name="csX2" fmla="*/ 47659 w 3252649"/>
+              <a:gd name="csY2" fmla="*/ 315999 h 4457476"/>
+              <a:gd name="csX3" fmla="*/ 382639 w 3252649"/>
+              <a:gd name="csY3" fmla="*/ 216411 h 4457476"/>
+              <a:gd name="csX4" fmla="*/ 2926661 w 3252649"/>
+              <a:gd name="csY4" fmla="*/ 315999 h 4457476"/>
+              <a:gd name="csX5" fmla="*/ 2935715 w 3252649"/>
+              <a:gd name="csY5" fmla="*/ 1547270 h 4457476"/>
+              <a:gd name="csX6" fmla="*/ 337370 w 3252649"/>
+              <a:gd name="csY6" fmla="*/ 1547270 h 4457476"/>
+              <a:gd name="csX7" fmla="*/ 337370 w 3252649"/>
+              <a:gd name="csY7" fmla="*/ 4254256 h 4457476"/>
+              <a:gd name="csX8" fmla="*/ 346425 w 3252649"/>
+              <a:gd name="csY8" fmla="*/ 4263310 h 4457476"/>
+              <a:gd name="csX9" fmla="*/ 47659 w 3252649"/>
+              <a:gd name="csY9" fmla="*/ 4263310 h 4457476"/>
+              <a:gd name="csX0" fmla="*/ 48050 w 3253040"/>
+              <a:gd name="csY0" fmla="*/ 4263310 h 4445407"/>
+              <a:gd name="csX1" fmla="*/ 2785 w 3253040"/>
+              <a:gd name="csY1" fmla="*/ 4100347 h 4445407"/>
+              <a:gd name="csX2" fmla="*/ 48050 w 3253040"/>
+              <a:gd name="csY2" fmla="*/ 315999 h 4445407"/>
+              <a:gd name="csX3" fmla="*/ 383030 w 3253040"/>
+              <a:gd name="csY3" fmla="*/ 216411 h 4445407"/>
+              <a:gd name="csX4" fmla="*/ 2927052 w 3253040"/>
+              <a:gd name="csY4" fmla="*/ 315999 h 4445407"/>
+              <a:gd name="csX5" fmla="*/ 2936106 w 3253040"/>
+              <a:gd name="csY5" fmla="*/ 1547270 h 4445407"/>
+              <a:gd name="csX6" fmla="*/ 337761 w 3253040"/>
+              <a:gd name="csY6" fmla="*/ 1547270 h 4445407"/>
+              <a:gd name="csX7" fmla="*/ 337761 w 3253040"/>
+              <a:gd name="csY7" fmla="*/ 4254256 h 4445407"/>
+              <a:gd name="csX8" fmla="*/ 392083 w 3253040"/>
+              <a:gd name="csY8" fmla="*/ 4027920 h 4445407"/>
+              <a:gd name="csX9" fmla="*/ 48050 w 3253040"/>
+              <a:gd name="csY9" fmla="*/ 4263310 h 4445407"/>
+              <a:gd name="csX0" fmla="*/ 48050 w 3253040"/>
+              <a:gd name="csY0" fmla="*/ 4263310 h 4445407"/>
+              <a:gd name="csX1" fmla="*/ 2785 w 3253040"/>
+              <a:gd name="csY1" fmla="*/ 4100347 h 4445407"/>
+              <a:gd name="csX2" fmla="*/ 48050 w 3253040"/>
+              <a:gd name="csY2" fmla="*/ 315999 h 4445407"/>
+              <a:gd name="csX3" fmla="*/ 383030 w 3253040"/>
+              <a:gd name="csY3" fmla="*/ 216411 h 4445407"/>
+              <a:gd name="csX4" fmla="*/ 2927052 w 3253040"/>
+              <a:gd name="csY4" fmla="*/ 315999 h 4445407"/>
+              <a:gd name="csX5" fmla="*/ 2936106 w 3253040"/>
+              <a:gd name="csY5" fmla="*/ 1547270 h 4445407"/>
+              <a:gd name="csX6" fmla="*/ 337761 w 3253040"/>
+              <a:gd name="csY6" fmla="*/ 1547270 h 4445407"/>
+              <a:gd name="csX7" fmla="*/ 355868 w 3253040"/>
+              <a:gd name="csY7" fmla="*/ 3991706 h 4445407"/>
+              <a:gd name="csX8" fmla="*/ 392083 w 3253040"/>
+              <a:gd name="csY8" fmla="*/ 4027920 h 4445407"/>
+              <a:gd name="csX9" fmla="*/ 48050 w 3253040"/>
+              <a:gd name="csY9" fmla="*/ 4263310 h 4445407"/>
+              <a:gd name="csX0" fmla="*/ 47660 w 3252650"/>
+              <a:gd name="csY0" fmla="*/ 4263310 h 4434228"/>
+              <a:gd name="csX1" fmla="*/ 2395 w 3252650"/>
+              <a:gd name="csY1" fmla="*/ 4100347 h 4434228"/>
+              <a:gd name="csX2" fmla="*/ 47660 w 3252650"/>
+              <a:gd name="csY2" fmla="*/ 315999 h 4434228"/>
+              <a:gd name="csX3" fmla="*/ 382640 w 3252650"/>
+              <a:gd name="csY3" fmla="*/ 216411 h 4434228"/>
+              <a:gd name="csX4" fmla="*/ 2926662 w 3252650"/>
+              <a:gd name="csY4" fmla="*/ 315999 h 4434228"/>
+              <a:gd name="csX5" fmla="*/ 2935716 w 3252650"/>
+              <a:gd name="csY5" fmla="*/ 1547270 h 4434228"/>
+              <a:gd name="csX6" fmla="*/ 337371 w 3252650"/>
+              <a:gd name="csY6" fmla="*/ 1547270 h 4434228"/>
+              <a:gd name="csX7" fmla="*/ 355478 w 3252650"/>
+              <a:gd name="csY7" fmla="*/ 3991706 h 4434228"/>
+              <a:gd name="csX8" fmla="*/ 328319 w 3252650"/>
+              <a:gd name="csY8" fmla="*/ 4263310 h 4434228"/>
+              <a:gd name="csX9" fmla="*/ 47660 w 3252650"/>
+              <a:gd name="csY9" fmla="*/ 4263310 h 4434228"/>
+              <a:gd name="csX0" fmla="*/ 47660 w 3252650"/>
+              <a:gd name="csY0" fmla="*/ 4263310 h 4434228"/>
+              <a:gd name="csX1" fmla="*/ 2395 w 3252650"/>
+              <a:gd name="csY1" fmla="*/ 4100347 h 4434228"/>
+              <a:gd name="csX2" fmla="*/ 47660 w 3252650"/>
+              <a:gd name="csY2" fmla="*/ 315999 h 4434228"/>
+              <a:gd name="csX3" fmla="*/ 382640 w 3252650"/>
+              <a:gd name="csY3" fmla="*/ 216411 h 4434228"/>
+              <a:gd name="csX4" fmla="*/ 2926662 w 3252650"/>
+              <a:gd name="csY4" fmla="*/ 315999 h 4434228"/>
+              <a:gd name="csX5" fmla="*/ 2935716 w 3252650"/>
+              <a:gd name="csY5" fmla="*/ 1547270 h 4434228"/>
+              <a:gd name="csX6" fmla="*/ 337371 w 3252650"/>
+              <a:gd name="csY6" fmla="*/ 1547270 h 4434228"/>
+              <a:gd name="csX7" fmla="*/ 346424 w 3252650"/>
+              <a:gd name="csY7" fmla="*/ 4064133 h 4434228"/>
+              <a:gd name="csX8" fmla="*/ 328319 w 3252650"/>
+              <a:gd name="csY8" fmla="*/ 4263310 h 4434228"/>
+              <a:gd name="csX9" fmla="*/ 47660 w 3252650"/>
+              <a:gd name="csY9" fmla="*/ 4263310 h 4434228"/>
+              <a:gd name="csX0" fmla="*/ 47660 w 3252650"/>
+              <a:gd name="csY0" fmla="*/ 4263310 h 4434228"/>
+              <a:gd name="csX1" fmla="*/ 2395 w 3252650"/>
+              <a:gd name="csY1" fmla="*/ 4100347 h 4434228"/>
+              <a:gd name="csX2" fmla="*/ 47660 w 3252650"/>
+              <a:gd name="csY2" fmla="*/ 315999 h 4434228"/>
+              <a:gd name="csX3" fmla="*/ 382640 w 3252650"/>
+              <a:gd name="csY3" fmla="*/ 216411 h 4434228"/>
+              <a:gd name="csX4" fmla="*/ 2926662 w 3252650"/>
+              <a:gd name="csY4" fmla="*/ 315999 h 4434228"/>
+              <a:gd name="csX5" fmla="*/ 2935716 w 3252650"/>
+              <a:gd name="csY5" fmla="*/ 1547270 h 4434228"/>
+              <a:gd name="csX6" fmla="*/ 337371 w 3252650"/>
+              <a:gd name="csY6" fmla="*/ 1547270 h 4434228"/>
+              <a:gd name="csX7" fmla="*/ 310212 w 3252650"/>
+              <a:gd name="csY7" fmla="*/ 1556325 h 4434228"/>
+              <a:gd name="csX8" fmla="*/ 346424 w 3252650"/>
+              <a:gd name="csY8" fmla="*/ 4064133 h 4434228"/>
+              <a:gd name="csX9" fmla="*/ 328319 w 3252650"/>
+              <a:gd name="csY9" fmla="*/ 4263310 h 4434228"/>
+              <a:gd name="csX10" fmla="*/ 47660 w 3252650"/>
+              <a:gd name="csY10" fmla="*/ 4263310 h 4434228"/>
+              <a:gd name="csX0" fmla="*/ 47660 w 3252650"/>
+              <a:gd name="csY0" fmla="*/ 4263310 h 4434228"/>
+              <a:gd name="csX1" fmla="*/ 2395 w 3252650"/>
+              <a:gd name="csY1" fmla="*/ 4100347 h 4434228"/>
+              <a:gd name="csX2" fmla="*/ 47660 w 3252650"/>
+              <a:gd name="csY2" fmla="*/ 315999 h 4434228"/>
+              <a:gd name="csX3" fmla="*/ 382640 w 3252650"/>
+              <a:gd name="csY3" fmla="*/ 216411 h 4434228"/>
+              <a:gd name="csX4" fmla="*/ 2926662 w 3252650"/>
+              <a:gd name="csY4" fmla="*/ 315999 h 4434228"/>
+              <a:gd name="csX5" fmla="*/ 2935716 w 3252650"/>
+              <a:gd name="csY5" fmla="*/ 1547270 h 4434228"/>
+              <a:gd name="csX6" fmla="*/ 337371 w 3252650"/>
+              <a:gd name="csY6" fmla="*/ 1547270 h 4434228"/>
+              <a:gd name="csX7" fmla="*/ 310212 w 3252650"/>
+              <a:gd name="csY7" fmla="*/ 1764555 h 4434228"/>
+              <a:gd name="csX8" fmla="*/ 346424 w 3252650"/>
+              <a:gd name="csY8" fmla="*/ 4064133 h 4434228"/>
+              <a:gd name="csX9" fmla="*/ 328319 w 3252650"/>
+              <a:gd name="csY9" fmla="*/ 4263310 h 4434228"/>
+              <a:gd name="csX10" fmla="*/ 47660 w 3252650"/>
+              <a:gd name="csY10" fmla="*/ 4263310 h 4434228"/>
+              <a:gd name="csX0" fmla="*/ 47660 w 3237901"/>
+              <a:gd name="csY0" fmla="*/ 4263310 h 4434228"/>
+              <a:gd name="csX1" fmla="*/ 2395 w 3237901"/>
+              <a:gd name="csY1" fmla="*/ 4100347 h 4434228"/>
+              <a:gd name="csX2" fmla="*/ 47660 w 3237901"/>
+              <a:gd name="csY2" fmla="*/ 315999 h 4434228"/>
+              <a:gd name="csX3" fmla="*/ 382640 w 3237901"/>
+              <a:gd name="csY3" fmla="*/ 216411 h 4434228"/>
+              <a:gd name="csX4" fmla="*/ 2926662 w 3237901"/>
+              <a:gd name="csY4" fmla="*/ 315999 h 4434228"/>
+              <a:gd name="csX5" fmla="*/ 2935716 w 3237901"/>
+              <a:gd name="csY5" fmla="*/ 1547270 h 4434228"/>
+              <a:gd name="csX6" fmla="*/ 572762 w 3237901"/>
+              <a:gd name="csY6" fmla="*/ 1547270 h 4434228"/>
+              <a:gd name="csX7" fmla="*/ 310212 w 3237901"/>
+              <a:gd name="csY7" fmla="*/ 1764555 h 4434228"/>
+              <a:gd name="csX8" fmla="*/ 346424 w 3237901"/>
+              <a:gd name="csY8" fmla="*/ 4064133 h 4434228"/>
+              <a:gd name="csX9" fmla="*/ 328319 w 3237901"/>
+              <a:gd name="csY9" fmla="*/ 4263310 h 4434228"/>
+              <a:gd name="csX10" fmla="*/ 47660 w 3237901"/>
+              <a:gd name="csY10" fmla="*/ 4263310 h 4434228"/>
+              <a:gd name="csX0" fmla="*/ 47660 w 3237901"/>
+              <a:gd name="csY0" fmla="*/ 4263310 h 4434228"/>
+              <a:gd name="csX1" fmla="*/ 2395 w 3237901"/>
+              <a:gd name="csY1" fmla="*/ 4100347 h 4434228"/>
+              <a:gd name="csX2" fmla="*/ 47660 w 3237901"/>
+              <a:gd name="csY2" fmla="*/ 315999 h 4434228"/>
+              <a:gd name="csX3" fmla="*/ 382640 w 3237901"/>
+              <a:gd name="csY3" fmla="*/ 216411 h 4434228"/>
+              <a:gd name="csX4" fmla="*/ 2926662 w 3237901"/>
+              <a:gd name="csY4" fmla="*/ 315999 h 4434228"/>
+              <a:gd name="csX5" fmla="*/ 2935716 w 3237901"/>
+              <a:gd name="csY5" fmla="*/ 1547270 h 4434228"/>
+              <a:gd name="csX6" fmla="*/ 572762 w 3237901"/>
+              <a:gd name="csY6" fmla="*/ 1547270 h 4434228"/>
+              <a:gd name="csX7" fmla="*/ 310212 w 3237901"/>
+              <a:gd name="csY7" fmla="*/ 1764555 h 4434228"/>
+              <a:gd name="csX8" fmla="*/ 346424 w 3237901"/>
+              <a:gd name="csY8" fmla="*/ 4064133 h 4434228"/>
+              <a:gd name="csX9" fmla="*/ 328319 w 3237901"/>
+              <a:gd name="csY9" fmla="*/ 4263310 h 4434228"/>
+              <a:gd name="csX10" fmla="*/ 47660 w 3237901"/>
+              <a:gd name="csY10" fmla="*/ 4263310 h 4434228"/>
+              <a:gd name="csX0" fmla="*/ 47660 w 3237901"/>
+              <a:gd name="csY0" fmla="*/ 4263310 h 4434228"/>
+              <a:gd name="csX1" fmla="*/ 2395 w 3237901"/>
+              <a:gd name="csY1" fmla="*/ 4100347 h 4434228"/>
+              <a:gd name="csX2" fmla="*/ 47660 w 3237901"/>
+              <a:gd name="csY2" fmla="*/ 315999 h 4434228"/>
+              <a:gd name="csX3" fmla="*/ 382640 w 3237901"/>
+              <a:gd name="csY3" fmla="*/ 216411 h 4434228"/>
+              <a:gd name="csX4" fmla="*/ 2926662 w 3237901"/>
+              <a:gd name="csY4" fmla="*/ 315999 h 4434228"/>
+              <a:gd name="csX5" fmla="*/ 2935716 w 3237901"/>
+              <a:gd name="csY5" fmla="*/ 1547270 h 4434228"/>
+              <a:gd name="csX6" fmla="*/ 572762 w 3237901"/>
+              <a:gd name="csY6" fmla="*/ 1547270 h 4434228"/>
+              <a:gd name="csX7" fmla="*/ 310212 w 3237901"/>
+              <a:gd name="csY7" fmla="*/ 1764555 h 4434228"/>
+              <a:gd name="csX8" fmla="*/ 346424 w 3237901"/>
+              <a:gd name="csY8" fmla="*/ 4064133 h 4434228"/>
+              <a:gd name="csX9" fmla="*/ 328319 w 3237901"/>
+              <a:gd name="csY9" fmla="*/ 4263310 h 4434228"/>
+              <a:gd name="csX10" fmla="*/ 47660 w 3237901"/>
+              <a:gd name="csY10" fmla="*/ 4263310 h 4434228"/>
+              <a:gd name="csX0" fmla="*/ 47660 w 3118841"/>
+              <a:gd name="csY0" fmla="*/ 4263310 h 4434228"/>
+              <a:gd name="csX1" fmla="*/ 2395 w 3118841"/>
+              <a:gd name="csY1" fmla="*/ 4100347 h 4434228"/>
+              <a:gd name="csX2" fmla="*/ 47660 w 3118841"/>
+              <a:gd name="csY2" fmla="*/ 315999 h 4434228"/>
+              <a:gd name="csX3" fmla="*/ 382640 w 3118841"/>
+              <a:gd name="csY3" fmla="*/ 216411 h 4434228"/>
+              <a:gd name="csX4" fmla="*/ 2926662 w 3118841"/>
+              <a:gd name="csY4" fmla="*/ 315999 h 4434228"/>
+              <a:gd name="csX5" fmla="*/ 2935716 w 3118841"/>
+              <a:gd name="csY5" fmla="*/ 1547270 h 4434228"/>
+              <a:gd name="csX6" fmla="*/ 2908558 w 3118841"/>
+              <a:gd name="csY6" fmla="*/ 1592539 h 4434228"/>
+              <a:gd name="csX7" fmla="*/ 572762 w 3118841"/>
+              <a:gd name="csY7" fmla="*/ 1547270 h 4434228"/>
+              <a:gd name="csX8" fmla="*/ 310212 w 3118841"/>
+              <a:gd name="csY8" fmla="*/ 1764555 h 4434228"/>
+              <a:gd name="csX9" fmla="*/ 346424 w 3118841"/>
+              <a:gd name="csY9" fmla="*/ 4064133 h 4434228"/>
+              <a:gd name="csX10" fmla="*/ 328319 w 3118841"/>
+              <a:gd name="csY10" fmla="*/ 4263310 h 4434228"/>
+              <a:gd name="csX11" fmla="*/ 47660 w 3118841"/>
+              <a:gd name="csY11" fmla="*/ 4263310 h 4434228"/>
+              <a:gd name="csX0" fmla="*/ 47660 w 3120911"/>
+              <a:gd name="csY0" fmla="*/ 4263310 h 4434228"/>
+              <a:gd name="csX1" fmla="*/ 2395 w 3120911"/>
+              <a:gd name="csY1" fmla="*/ 4100347 h 4434228"/>
+              <a:gd name="csX2" fmla="*/ 47660 w 3120911"/>
+              <a:gd name="csY2" fmla="*/ 315999 h 4434228"/>
+              <a:gd name="csX3" fmla="*/ 382640 w 3120911"/>
+              <a:gd name="csY3" fmla="*/ 216411 h 4434228"/>
+              <a:gd name="csX4" fmla="*/ 2926662 w 3120911"/>
+              <a:gd name="csY4" fmla="*/ 315999 h 4434228"/>
+              <a:gd name="csX5" fmla="*/ 2944771 w 3120911"/>
+              <a:gd name="csY5" fmla="*/ 316000 h 4434228"/>
+              <a:gd name="csX6" fmla="*/ 2935716 w 3120911"/>
+              <a:gd name="csY6" fmla="*/ 1547270 h 4434228"/>
+              <a:gd name="csX7" fmla="*/ 2908558 w 3120911"/>
+              <a:gd name="csY7" fmla="*/ 1592539 h 4434228"/>
+              <a:gd name="csX8" fmla="*/ 572762 w 3120911"/>
+              <a:gd name="csY8" fmla="*/ 1547270 h 4434228"/>
+              <a:gd name="csX9" fmla="*/ 310212 w 3120911"/>
+              <a:gd name="csY9" fmla="*/ 1764555 h 4434228"/>
+              <a:gd name="csX10" fmla="*/ 346424 w 3120911"/>
+              <a:gd name="csY10" fmla="*/ 4064133 h 4434228"/>
+              <a:gd name="csX11" fmla="*/ 328319 w 3120911"/>
+              <a:gd name="csY11" fmla="*/ 4263310 h 4434228"/>
+              <a:gd name="csX12" fmla="*/ 47660 w 3120911"/>
+              <a:gd name="csY12" fmla="*/ 4263310 h 4434228"/>
+              <a:gd name="csX0" fmla="*/ 47660 w 3159318"/>
+              <a:gd name="csY0" fmla="*/ 4263310 h 4434228"/>
+              <a:gd name="csX1" fmla="*/ 2395 w 3159318"/>
+              <a:gd name="csY1" fmla="*/ 4100347 h 4434228"/>
+              <a:gd name="csX2" fmla="*/ 47660 w 3159318"/>
+              <a:gd name="csY2" fmla="*/ 315999 h 4434228"/>
+              <a:gd name="csX3" fmla="*/ 382640 w 3159318"/>
+              <a:gd name="csY3" fmla="*/ 216411 h 4434228"/>
+              <a:gd name="csX4" fmla="*/ 2926662 w 3159318"/>
+              <a:gd name="csY4" fmla="*/ 315999 h 4434228"/>
+              <a:gd name="csX5" fmla="*/ 3044360 w 3159318"/>
+              <a:gd name="csY5" fmla="*/ 334107 h 4434228"/>
+              <a:gd name="csX6" fmla="*/ 2935716 w 3159318"/>
+              <a:gd name="csY6" fmla="*/ 1547270 h 4434228"/>
+              <a:gd name="csX7" fmla="*/ 2908558 w 3159318"/>
+              <a:gd name="csY7" fmla="*/ 1592539 h 4434228"/>
+              <a:gd name="csX8" fmla="*/ 572762 w 3159318"/>
+              <a:gd name="csY8" fmla="*/ 1547270 h 4434228"/>
+              <a:gd name="csX9" fmla="*/ 310212 w 3159318"/>
+              <a:gd name="csY9" fmla="*/ 1764555 h 4434228"/>
+              <a:gd name="csX10" fmla="*/ 346424 w 3159318"/>
+              <a:gd name="csY10" fmla="*/ 4064133 h 4434228"/>
+              <a:gd name="csX11" fmla="*/ 328319 w 3159318"/>
+              <a:gd name="csY11" fmla="*/ 4263310 h 4434228"/>
+              <a:gd name="csX12" fmla="*/ 47660 w 3159318"/>
+              <a:gd name="csY12" fmla="*/ 4263310 h 4434228"/>
+              <a:gd name="csX0" fmla="*/ 47660 w 3147874"/>
+              <a:gd name="csY0" fmla="*/ 4258649 h 4429567"/>
+              <a:gd name="csX1" fmla="*/ 2395 w 3147874"/>
+              <a:gd name="csY1" fmla="*/ 4095686 h 4429567"/>
+              <a:gd name="csX2" fmla="*/ 47660 w 3147874"/>
+              <a:gd name="csY2" fmla="*/ 311338 h 4429567"/>
+              <a:gd name="csX3" fmla="*/ 382640 w 3147874"/>
+              <a:gd name="csY3" fmla="*/ 211750 h 4429567"/>
+              <a:gd name="csX4" fmla="*/ 2908555 w 3147874"/>
+              <a:gd name="csY4" fmla="*/ 202696 h 4429567"/>
+              <a:gd name="csX5" fmla="*/ 3044360 w 3147874"/>
+              <a:gd name="csY5" fmla="*/ 329446 h 4429567"/>
+              <a:gd name="csX6" fmla="*/ 2935716 w 3147874"/>
+              <a:gd name="csY6" fmla="*/ 1542609 h 4429567"/>
+              <a:gd name="csX7" fmla="*/ 2908558 w 3147874"/>
+              <a:gd name="csY7" fmla="*/ 1587878 h 4429567"/>
+              <a:gd name="csX8" fmla="*/ 572762 w 3147874"/>
+              <a:gd name="csY8" fmla="*/ 1542609 h 4429567"/>
+              <a:gd name="csX9" fmla="*/ 310212 w 3147874"/>
+              <a:gd name="csY9" fmla="*/ 1759894 h 4429567"/>
+              <a:gd name="csX10" fmla="*/ 346424 w 3147874"/>
+              <a:gd name="csY10" fmla="*/ 4059472 h 4429567"/>
+              <a:gd name="csX11" fmla="*/ 328319 w 3147874"/>
+              <a:gd name="csY11" fmla="*/ 4258649 h 4429567"/>
+              <a:gd name="csX12" fmla="*/ 47660 w 3147874"/>
+              <a:gd name="csY12" fmla="*/ 4258649 h 4429567"/>
+              <a:gd name="csX0" fmla="*/ 47660 w 3085643"/>
+              <a:gd name="csY0" fmla="*/ 4258649 h 4429567"/>
+              <a:gd name="csX1" fmla="*/ 2395 w 3085643"/>
+              <a:gd name="csY1" fmla="*/ 4095686 h 4429567"/>
+              <a:gd name="csX2" fmla="*/ 47660 w 3085643"/>
+              <a:gd name="csY2" fmla="*/ 311338 h 4429567"/>
+              <a:gd name="csX3" fmla="*/ 382640 w 3085643"/>
+              <a:gd name="csY3" fmla="*/ 211750 h 4429567"/>
+              <a:gd name="csX4" fmla="*/ 2908555 w 3085643"/>
+              <a:gd name="csY4" fmla="*/ 202696 h 4429567"/>
+              <a:gd name="csX5" fmla="*/ 3044360 w 3085643"/>
+              <a:gd name="csY5" fmla="*/ 329446 h 4429567"/>
+              <a:gd name="csX6" fmla="*/ 2935716 w 3085643"/>
+              <a:gd name="csY6" fmla="*/ 1542609 h 4429567"/>
+              <a:gd name="csX7" fmla="*/ 2908558 w 3085643"/>
+              <a:gd name="csY7" fmla="*/ 1587878 h 4429567"/>
+              <a:gd name="csX8" fmla="*/ 572762 w 3085643"/>
+              <a:gd name="csY8" fmla="*/ 1542609 h 4429567"/>
+              <a:gd name="csX9" fmla="*/ 310212 w 3085643"/>
+              <a:gd name="csY9" fmla="*/ 1759894 h 4429567"/>
+              <a:gd name="csX10" fmla="*/ 346424 w 3085643"/>
+              <a:gd name="csY10" fmla="*/ 4059472 h 4429567"/>
+              <a:gd name="csX11" fmla="*/ 328319 w 3085643"/>
+              <a:gd name="csY11" fmla="*/ 4258649 h 4429567"/>
+              <a:gd name="csX12" fmla="*/ 47660 w 3085643"/>
+              <a:gd name="csY12" fmla="*/ 4258649 h 4429567"/>
+              <a:gd name="csX0" fmla="*/ 47660 w 3187527"/>
+              <a:gd name="csY0" fmla="*/ 4258649 h 4429567"/>
+              <a:gd name="csX1" fmla="*/ 2395 w 3187527"/>
+              <a:gd name="csY1" fmla="*/ 4095686 h 4429567"/>
+              <a:gd name="csX2" fmla="*/ 47660 w 3187527"/>
+              <a:gd name="csY2" fmla="*/ 311338 h 4429567"/>
+              <a:gd name="csX3" fmla="*/ 382640 w 3187527"/>
+              <a:gd name="csY3" fmla="*/ 211750 h 4429567"/>
+              <a:gd name="csX4" fmla="*/ 2908555 w 3187527"/>
+              <a:gd name="csY4" fmla="*/ 202696 h 4429567"/>
+              <a:gd name="csX5" fmla="*/ 3044360 w 3187527"/>
+              <a:gd name="csY5" fmla="*/ 329446 h 4429567"/>
+              <a:gd name="csX6" fmla="*/ 2935716 w 3187527"/>
+              <a:gd name="csY6" fmla="*/ 1542609 h 4429567"/>
+              <a:gd name="csX7" fmla="*/ 3035307 w 3187527"/>
+              <a:gd name="csY7" fmla="*/ 1560718 h 4429567"/>
+              <a:gd name="csX8" fmla="*/ 572762 w 3187527"/>
+              <a:gd name="csY8" fmla="*/ 1542609 h 4429567"/>
+              <a:gd name="csX9" fmla="*/ 310212 w 3187527"/>
+              <a:gd name="csY9" fmla="*/ 1759894 h 4429567"/>
+              <a:gd name="csX10" fmla="*/ 346424 w 3187527"/>
+              <a:gd name="csY10" fmla="*/ 4059472 h 4429567"/>
+              <a:gd name="csX11" fmla="*/ 328319 w 3187527"/>
+              <a:gd name="csY11" fmla="*/ 4258649 h 4429567"/>
+              <a:gd name="csX12" fmla="*/ 47660 w 3187527"/>
+              <a:gd name="csY12" fmla="*/ 4258649 h 4429567"/>
+              <a:gd name="csX0" fmla="*/ 47660 w 3099699"/>
+              <a:gd name="csY0" fmla="*/ 4258649 h 4429567"/>
+              <a:gd name="csX1" fmla="*/ 2395 w 3099699"/>
+              <a:gd name="csY1" fmla="*/ 4095686 h 4429567"/>
+              <a:gd name="csX2" fmla="*/ 47660 w 3099699"/>
+              <a:gd name="csY2" fmla="*/ 311338 h 4429567"/>
+              <a:gd name="csX3" fmla="*/ 382640 w 3099699"/>
+              <a:gd name="csY3" fmla="*/ 211750 h 4429567"/>
+              <a:gd name="csX4" fmla="*/ 2908555 w 3099699"/>
+              <a:gd name="csY4" fmla="*/ 202696 h 4429567"/>
+              <a:gd name="csX5" fmla="*/ 3044360 w 3099699"/>
+              <a:gd name="csY5" fmla="*/ 329446 h 4429567"/>
+              <a:gd name="csX6" fmla="*/ 2935716 w 3099699"/>
+              <a:gd name="csY6" fmla="*/ 1542609 h 4429567"/>
+              <a:gd name="csX7" fmla="*/ 2926666 w 3099699"/>
+              <a:gd name="csY7" fmla="*/ 1615039 h 4429567"/>
+              <a:gd name="csX8" fmla="*/ 572762 w 3099699"/>
+              <a:gd name="csY8" fmla="*/ 1542609 h 4429567"/>
+              <a:gd name="csX9" fmla="*/ 310212 w 3099699"/>
+              <a:gd name="csY9" fmla="*/ 1759894 h 4429567"/>
+              <a:gd name="csX10" fmla="*/ 346424 w 3099699"/>
+              <a:gd name="csY10" fmla="*/ 4059472 h 4429567"/>
+              <a:gd name="csX11" fmla="*/ 328319 w 3099699"/>
+              <a:gd name="csY11" fmla="*/ 4258649 h 4429567"/>
+              <a:gd name="csX12" fmla="*/ 47660 w 3099699"/>
+              <a:gd name="csY12" fmla="*/ 4258649 h 4429567"/>
+              <a:gd name="csX0" fmla="*/ 47660 w 3139317"/>
+              <a:gd name="csY0" fmla="*/ 4258649 h 4429567"/>
+              <a:gd name="csX1" fmla="*/ 2395 w 3139317"/>
+              <a:gd name="csY1" fmla="*/ 4095686 h 4429567"/>
+              <a:gd name="csX2" fmla="*/ 47660 w 3139317"/>
+              <a:gd name="csY2" fmla="*/ 311338 h 4429567"/>
+              <a:gd name="csX3" fmla="*/ 382640 w 3139317"/>
+              <a:gd name="csY3" fmla="*/ 211750 h 4429567"/>
+              <a:gd name="csX4" fmla="*/ 2908555 w 3139317"/>
+              <a:gd name="csY4" fmla="*/ 202696 h 4429567"/>
+              <a:gd name="csX5" fmla="*/ 3044360 w 3139317"/>
+              <a:gd name="csY5" fmla="*/ 329446 h 4429567"/>
+              <a:gd name="csX6" fmla="*/ 3062464 w 3139317"/>
+              <a:gd name="csY6" fmla="*/ 1524502 h 4429567"/>
+              <a:gd name="csX7" fmla="*/ 2926666 w 3139317"/>
+              <a:gd name="csY7" fmla="*/ 1615039 h 4429567"/>
+              <a:gd name="csX8" fmla="*/ 572762 w 3139317"/>
+              <a:gd name="csY8" fmla="*/ 1542609 h 4429567"/>
+              <a:gd name="csX9" fmla="*/ 310212 w 3139317"/>
+              <a:gd name="csY9" fmla="*/ 1759894 h 4429567"/>
+              <a:gd name="csX10" fmla="*/ 346424 w 3139317"/>
+              <a:gd name="csY10" fmla="*/ 4059472 h 4429567"/>
+              <a:gd name="csX11" fmla="*/ 328319 w 3139317"/>
+              <a:gd name="csY11" fmla="*/ 4258649 h 4429567"/>
+              <a:gd name="csX12" fmla="*/ 47660 w 3139317"/>
+              <a:gd name="csY12" fmla="*/ 4258649 h 4429567"/>
+              <a:gd name="csX0" fmla="*/ 47660 w 3144985"/>
+              <a:gd name="csY0" fmla="*/ 4258649 h 4429567"/>
+              <a:gd name="csX1" fmla="*/ 2395 w 3144985"/>
+              <a:gd name="csY1" fmla="*/ 4095686 h 4429567"/>
+              <a:gd name="csX2" fmla="*/ 47660 w 3144985"/>
+              <a:gd name="csY2" fmla="*/ 311338 h 4429567"/>
+              <a:gd name="csX3" fmla="*/ 382640 w 3144985"/>
+              <a:gd name="csY3" fmla="*/ 211750 h 4429567"/>
+              <a:gd name="csX4" fmla="*/ 2908555 w 3144985"/>
+              <a:gd name="csY4" fmla="*/ 202696 h 4429567"/>
+              <a:gd name="csX5" fmla="*/ 3044360 w 3144985"/>
+              <a:gd name="csY5" fmla="*/ 329446 h 4429567"/>
+              <a:gd name="csX6" fmla="*/ 3062464 w 3144985"/>
+              <a:gd name="csY6" fmla="*/ 1524502 h 4429567"/>
+              <a:gd name="csX7" fmla="*/ 2926666 w 3144985"/>
+              <a:gd name="csY7" fmla="*/ 1615039 h 4429567"/>
+              <a:gd name="csX8" fmla="*/ 572762 w 3144985"/>
+              <a:gd name="csY8" fmla="*/ 1542609 h 4429567"/>
+              <a:gd name="csX9" fmla="*/ 310212 w 3144985"/>
+              <a:gd name="csY9" fmla="*/ 1759894 h 4429567"/>
+              <a:gd name="csX10" fmla="*/ 346424 w 3144985"/>
+              <a:gd name="csY10" fmla="*/ 4059472 h 4429567"/>
+              <a:gd name="csX11" fmla="*/ 328319 w 3144985"/>
+              <a:gd name="csY11" fmla="*/ 4258649 h 4429567"/>
+              <a:gd name="csX12" fmla="*/ 47660 w 3144985"/>
+              <a:gd name="csY12" fmla="*/ 4258649 h 4429567"/>
+              <a:gd name="csX0" fmla="*/ 47660 w 3083569"/>
+              <a:gd name="csY0" fmla="*/ 4258649 h 4429567"/>
+              <a:gd name="csX1" fmla="*/ 2395 w 3083569"/>
+              <a:gd name="csY1" fmla="*/ 4095686 h 4429567"/>
+              <a:gd name="csX2" fmla="*/ 47660 w 3083569"/>
+              <a:gd name="csY2" fmla="*/ 311338 h 4429567"/>
+              <a:gd name="csX3" fmla="*/ 382640 w 3083569"/>
+              <a:gd name="csY3" fmla="*/ 211750 h 4429567"/>
+              <a:gd name="csX4" fmla="*/ 2908555 w 3083569"/>
+              <a:gd name="csY4" fmla="*/ 202696 h 4429567"/>
+              <a:gd name="csX5" fmla="*/ 3044360 w 3083569"/>
+              <a:gd name="csY5" fmla="*/ 329446 h 4429567"/>
+              <a:gd name="csX6" fmla="*/ 3062464 w 3083569"/>
+              <a:gd name="csY6" fmla="*/ 1524502 h 4429567"/>
+              <a:gd name="csX7" fmla="*/ 2709383 w 3083569"/>
+              <a:gd name="csY7" fmla="*/ 1578825 h 4429567"/>
+              <a:gd name="csX8" fmla="*/ 572762 w 3083569"/>
+              <a:gd name="csY8" fmla="*/ 1542609 h 4429567"/>
+              <a:gd name="csX9" fmla="*/ 310212 w 3083569"/>
+              <a:gd name="csY9" fmla="*/ 1759894 h 4429567"/>
+              <a:gd name="csX10" fmla="*/ 346424 w 3083569"/>
+              <a:gd name="csY10" fmla="*/ 4059472 h 4429567"/>
+              <a:gd name="csX11" fmla="*/ 328319 w 3083569"/>
+              <a:gd name="csY11" fmla="*/ 4258649 h 4429567"/>
+              <a:gd name="csX12" fmla="*/ 47660 w 3083569"/>
+              <a:gd name="csY12" fmla="*/ 4258649 h 4429567"/>
+              <a:gd name="csX0" fmla="*/ 47660 w 3083569"/>
+              <a:gd name="csY0" fmla="*/ 4258649 h 4429567"/>
+              <a:gd name="csX1" fmla="*/ 2395 w 3083569"/>
+              <a:gd name="csY1" fmla="*/ 4095686 h 4429567"/>
+              <a:gd name="csX2" fmla="*/ 47660 w 3083569"/>
+              <a:gd name="csY2" fmla="*/ 311338 h 4429567"/>
+              <a:gd name="csX3" fmla="*/ 382640 w 3083569"/>
+              <a:gd name="csY3" fmla="*/ 211750 h 4429567"/>
+              <a:gd name="csX4" fmla="*/ 2908555 w 3083569"/>
+              <a:gd name="csY4" fmla="*/ 202696 h 4429567"/>
+              <a:gd name="csX5" fmla="*/ 3044360 w 3083569"/>
+              <a:gd name="csY5" fmla="*/ 329446 h 4429567"/>
+              <a:gd name="csX6" fmla="*/ 3062464 w 3083569"/>
+              <a:gd name="csY6" fmla="*/ 1524502 h 4429567"/>
+              <a:gd name="csX7" fmla="*/ 2709383 w 3083569"/>
+              <a:gd name="csY7" fmla="*/ 1578825 h 4429567"/>
+              <a:gd name="csX8" fmla="*/ 572762 w 3083569"/>
+              <a:gd name="csY8" fmla="*/ 1542609 h 4429567"/>
+              <a:gd name="csX9" fmla="*/ 310212 w 3083569"/>
+              <a:gd name="csY9" fmla="*/ 1759894 h 4429567"/>
+              <a:gd name="csX10" fmla="*/ 346424 w 3083569"/>
+              <a:gd name="csY10" fmla="*/ 4059472 h 4429567"/>
+              <a:gd name="csX11" fmla="*/ 328319 w 3083569"/>
+              <a:gd name="csY11" fmla="*/ 4258649 h 4429567"/>
+              <a:gd name="csX12" fmla="*/ 47660 w 3083569"/>
+              <a:gd name="csY12" fmla="*/ 4258649 h 4429567"/>
+              <a:gd name="csX0" fmla="*/ 47660 w 3106605"/>
+              <a:gd name="csY0" fmla="*/ 4258649 h 4429567"/>
+              <a:gd name="csX1" fmla="*/ 2395 w 3106605"/>
+              <a:gd name="csY1" fmla="*/ 4095686 h 4429567"/>
+              <a:gd name="csX2" fmla="*/ 47660 w 3106605"/>
+              <a:gd name="csY2" fmla="*/ 311338 h 4429567"/>
+              <a:gd name="csX3" fmla="*/ 382640 w 3106605"/>
+              <a:gd name="csY3" fmla="*/ 211750 h 4429567"/>
+              <a:gd name="csX4" fmla="*/ 2908555 w 3106605"/>
+              <a:gd name="csY4" fmla="*/ 202696 h 4429567"/>
+              <a:gd name="csX5" fmla="*/ 3044360 w 3106605"/>
+              <a:gd name="csY5" fmla="*/ 329446 h 4429567"/>
+              <a:gd name="csX6" fmla="*/ 3089624 w 3106605"/>
+              <a:gd name="csY6" fmla="*/ 1397753 h 4429567"/>
+              <a:gd name="csX7" fmla="*/ 2709383 w 3106605"/>
+              <a:gd name="csY7" fmla="*/ 1578825 h 4429567"/>
+              <a:gd name="csX8" fmla="*/ 572762 w 3106605"/>
+              <a:gd name="csY8" fmla="*/ 1542609 h 4429567"/>
+              <a:gd name="csX9" fmla="*/ 310212 w 3106605"/>
+              <a:gd name="csY9" fmla="*/ 1759894 h 4429567"/>
+              <a:gd name="csX10" fmla="*/ 346424 w 3106605"/>
+              <a:gd name="csY10" fmla="*/ 4059472 h 4429567"/>
+              <a:gd name="csX11" fmla="*/ 328319 w 3106605"/>
+              <a:gd name="csY11" fmla="*/ 4258649 h 4429567"/>
+              <a:gd name="csX12" fmla="*/ 47660 w 3106605"/>
+              <a:gd name="csY12" fmla="*/ 4258649 h 4429567"/>
+              <a:gd name="csX0" fmla="*/ 47660 w 3090985"/>
+              <a:gd name="csY0" fmla="*/ 4258649 h 4429567"/>
+              <a:gd name="csX1" fmla="*/ 2395 w 3090985"/>
+              <a:gd name="csY1" fmla="*/ 4095686 h 4429567"/>
+              <a:gd name="csX2" fmla="*/ 47660 w 3090985"/>
+              <a:gd name="csY2" fmla="*/ 311338 h 4429567"/>
+              <a:gd name="csX3" fmla="*/ 382640 w 3090985"/>
+              <a:gd name="csY3" fmla="*/ 211750 h 4429567"/>
+              <a:gd name="csX4" fmla="*/ 2908555 w 3090985"/>
+              <a:gd name="csY4" fmla="*/ 202696 h 4429567"/>
+              <a:gd name="csX5" fmla="*/ 3044360 w 3090985"/>
+              <a:gd name="csY5" fmla="*/ 329446 h 4429567"/>
+              <a:gd name="csX6" fmla="*/ 3089624 w 3090985"/>
+              <a:gd name="csY6" fmla="*/ 1397753 h 4429567"/>
+              <a:gd name="csX7" fmla="*/ 2709383 w 3090985"/>
+              <a:gd name="csY7" fmla="*/ 1578825 h 4429567"/>
+              <a:gd name="csX8" fmla="*/ 572762 w 3090985"/>
+              <a:gd name="csY8" fmla="*/ 1542609 h 4429567"/>
+              <a:gd name="csX9" fmla="*/ 310212 w 3090985"/>
+              <a:gd name="csY9" fmla="*/ 1759894 h 4429567"/>
+              <a:gd name="csX10" fmla="*/ 346424 w 3090985"/>
+              <a:gd name="csY10" fmla="*/ 4059472 h 4429567"/>
+              <a:gd name="csX11" fmla="*/ 328319 w 3090985"/>
+              <a:gd name="csY11" fmla="*/ 4258649 h 4429567"/>
+              <a:gd name="csX12" fmla="*/ 47660 w 3090985"/>
+              <a:gd name="csY12" fmla="*/ 4258649 h 4429567"/>
+              <a:gd name="csX0" fmla="*/ 47660 w 3156177"/>
+              <a:gd name="csY0" fmla="*/ 4258649 h 4429567"/>
+              <a:gd name="csX1" fmla="*/ 2395 w 3156177"/>
+              <a:gd name="csY1" fmla="*/ 4095686 h 4429567"/>
+              <a:gd name="csX2" fmla="*/ 47660 w 3156177"/>
+              <a:gd name="csY2" fmla="*/ 311338 h 4429567"/>
+              <a:gd name="csX3" fmla="*/ 382640 w 3156177"/>
+              <a:gd name="csY3" fmla="*/ 211750 h 4429567"/>
+              <a:gd name="csX4" fmla="*/ 2908555 w 3156177"/>
+              <a:gd name="csY4" fmla="*/ 202696 h 4429567"/>
+              <a:gd name="csX5" fmla="*/ 3062467 w 3156177"/>
+              <a:gd name="csY5" fmla="*/ 374713 h 4429567"/>
+              <a:gd name="csX6" fmla="*/ 3089624 w 3156177"/>
+              <a:gd name="csY6" fmla="*/ 1397753 h 4429567"/>
+              <a:gd name="csX7" fmla="*/ 2709383 w 3156177"/>
+              <a:gd name="csY7" fmla="*/ 1578825 h 4429567"/>
+              <a:gd name="csX8" fmla="*/ 572762 w 3156177"/>
+              <a:gd name="csY8" fmla="*/ 1542609 h 4429567"/>
+              <a:gd name="csX9" fmla="*/ 310212 w 3156177"/>
+              <a:gd name="csY9" fmla="*/ 1759894 h 4429567"/>
+              <a:gd name="csX10" fmla="*/ 346424 w 3156177"/>
+              <a:gd name="csY10" fmla="*/ 4059472 h 4429567"/>
+              <a:gd name="csX11" fmla="*/ 328319 w 3156177"/>
+              <a:gd name="csY11" fmla="*/ 4258649 h 4429567"/>
+              <a:gd name="csX12" fmla="*/ 47660 w 3156177"/>
+              <a:gd name="csY12" fmla="*/ 4258649 h 4429567"/>
+              <a:gd name="csX0" fmla="*/ 47660 w 3159075"/>
+              <a:gd name="csY0" fmla="*/ 4258649 h 4429567"/>
+              <a:gd name="csX1" fmla="*/ 2395 w 3159075"/>
+              <a:gd name="csY1" fmla="*/ 4095686 h 4429567"/>
+              <a:gd name="csX2" fmla="*/ 47660 w 3159075"/>
+              <a:gd name="csY2" fmla="*/ 311338 h 4429567"/>
+              <a:gd name="csX3" fmla="*/ 382640 w 3159075"/>
+              <a:gd name="csY3" fmla="*/ 211750 h 4429567"/>
+              <a:gd name="csX4" fmla="*/ 2908555 w 3159075"/>
+              <a:gd name="csY4" fmla="*/ 202696 h 4429567"/>
+              <a:gd name="csX5" fmla="*/ 3062467 w 3159075"/>
+              <a:gd name="csY5" fmla="*/ 374713 h 4429567"/>
+              <a:gd name="csX6" fmla="*/ 3089624 w 3159075"/>
+              <a:gd name="csY6" fmla="*/ 1397753 h 4429567"/>
+              <a:gd name="csX7" fmla="*/ 2709383 w 3159075"/>
+              <a:gd name="csY7" fmla="*/ 1578825 h 4429567"/>
+              <a:gd name="csX8" fmla="*/ 572762 w 3159075"/>
+              <a:gd name="csY8" fmla="*/ 1542609 h 4429567"/>
+              <a:gd name="csX9" fmla="*/ 310212 w 3159075"/>
+              <a:gd name="csY9" fmla="*/ 1759894 h 4429567"/>
+              <a:gd name="csX10" fmla="*/ 346424 w 3159075"/>
+              <a:gd name="csY10" fmla="*/ 4059472 h 4429567"/>
+              <a:gd name="csX11" fmla="*/ 328319 w 3159075"/>
+              <a:gd name="csY11" fmla="*/ 4258649 h 4429567"/>
+              <a:gd name="csX12" fmla="*/ 47660 w 3159075"/>
+              <a:gd name="csY12" fmla="*/ 4258649 h 4429567"/>
+              <a:gd name="csX0" fmla="*/ 47660 w 3110434"/>
+              <a:gd name="csY0" fmla="*/ 4258649 h 4429567"/>
+              <a:gd name="csX1" fmla="*/ 2395 w 3110434"/>
+              <a:gd name="csY1" fmla="*/ 4095686 h 4429567"/>
+              <a:gd name="csX2" fmla="*/ 47660 w 3110434"/>
+              <a:gd name="csY2" fmla="*/ 311338 h 4429567"/>
+              <a:gd name="csX3" fmla="*/ 382640 w 3110434"/>
+              <a:gd name="csY3" fmla="*/ 211750 h 4429567"/>
+              <a:gd name="csX4" fmla="*/ 2908555 w 3110434"/>
+              <a:gd name="csY4" fmla="*/ 202696 h 4429567"/>
+              <a:gd name="csX5" fmla="*/ 3062467 w 3110434"/>
+              <a:gd name="csY5" fmla="*/ 374713 h 4429567"/>
+              <a:gd name="csX6" fmla="*/ 3089624 w 3110434"/>
+              <a:gd name="csY6" fmla="*/ 1397753 h 4429567"/>
+              <a:gd name="csX7" fmla="*/ 2709383 w 3110434"/>
+              <a:gd name="csY7" fmla="*/ 1578825 h 4429567"/>
+              <a:gd name="csX8" fmla="*/ 572762 w 3110434"/>
+              <a:gd name="csY8" fmla="*/ 1542609 h 4429567"/>
+              <a:gd name="csX9" fmla="*/ 310212 w 3110434"/>
+              <a:gd name="csY9" fmla="*/ 1759894 h 4429567"/>
+              <a:gd name="csX10" fmla="*/ 346424 w 3110434"/>
+              <a:gd name="csY10" fmla="*/ 4059472 h 4429567"/>
+              <a:gd name="csX11" fmla="*/ 328319 w 3110434"/>
+              <a:gd name="csY11" fmla="*/ 4258649 h 4429567"/>
+              <a:gd name="csX12" fmla="*/ 47660 w 3110434"/>
+              <a:gd name="csY12" fmla="*/ 4258649 h 4429567"/>
+              <a:gd name="csX0" fmla="*/ 47660 w 3172388"/>
+              <a:gd name="csY0" fmla="*/ 4258649 h 4429567"/>
+              <a:gd name="csX1" fmla="*/ 2395 w 3172388"/>
+              <a:gd name="csY1" fmla="*/ 4095686 h 4429567"/>
+              <a:gd name="csX2" fmla="*/ 47660 w 3172388"/>
+              <a:gd name="csY2" fmla="*/ 311338 h 4429567"/>
+              <a:gd name="csX3" fmla="*/ 382640 w 3172388"/>
+              <a:gd name="csY3" fmla="*/ 211750 h 4429567"/>
+              <a:gd name="csX4" fmla="*/ 2908555 w 3172388"/>
+              <a:gd name="csY4" fmla="*/ 202696 h 4429567"/>
+              <a:gd name="csX5" fmla="*/ 3089627 w 3172388"/>
+              <a:gd name="csY5" fmla="*/ 465248 h 4429567"/>
+              <a:gd name="csX6" fmla="*/ 3089624 w 3172388"/>
+              <a:gd name="csY6" fmla="*/ 1397753 h 4429567"/>
+              <a:gd name="csX7" fmla="*/ 2709383 w 3172388"/>
+              <a:gd name="csY7" fmla="*/ 1578825 h 4429567"/>
+              <a:gd name="csX8" fmla="*/ 572762 w 3172388"/>
+              <a:gd name="csY8" fmla="*/ 1542609 h 4429567"/>
+              <a:gd name="csX9" fmla="*/ 310212 w 3172388"/>
+              <a:gd name="csY9" fmla="*/ 1759894 h 4429567"/>
+              <a:gd name="csX10" fmla="*/ 346424 w 3172388"/>
+              <a:gd name="csY10" fmla="*/ 4059472 h 4429567"/>
+              <a:gd name="csX11" fmla="*/ 328319 w 3172388"/>
+              <a:gd name="csY11" fmla="*/ 4258649 h 4429567"/>
+              <a:gd name="csX12" fmla="*/ 47660 w 3172388"/>
+              <a:gd name="csY12" fmla="*/ 4258649 h 4429567"/>
+              <a:gd name="csX0" fmla="*/ 47660 w 3118129"/>
+              <a:gd name="csY0" fmla="*/ 4258265 h 4429183"/>
+              <a:gd name="csX1" fmla="*/ 2395 w 3118129"/>
+              <a:gd name="csY1" fmla="*/ 4095302 h 4429183"/>
+              <a:gd name="csX2" fmla="*/ 47660 w 3118129"/>
+              <a:gd name="csY2" fmla="*/ 310954 h 4429183"/>
+              <a:gd name="csX3" fmla="*/ 382640 w 3118129"/>
+              <a:gd name="csY3" fmla="*/ 211366 h 4429183"/>
+              <a:gd name="csX4" fmla="*/ 2709379 w 3118129"/>
+              <a:gd name="csY4" fmla="*/ 193258 h 4429183"/>
+              <a:gd name="csX5" fmla="*/ 3089627 w 3118129"/>
+              <a:gd name="csY5" fmla="*/ 464864 h 4429183"/>
+              <a:gd name="csX6" fmla="*/ 3089624 w 3118129"/>
+              <a:gd name="csY6" fmla="*/ 1397369 h 4429183"/>
+              <a:gd name="csX7" fmla="*/ 2709383 w 3118129"/>
+              <a:gd name="csY7" fmla="*/ 1578441 h 4429183"/>
+              <a:gd name="csX8" fmla="*/ 572762 w 3118129"/>
+              <a:gd name="csY8" fmla="*/ 1542225 h 4429183"/>
+              <a:gd name="csX9" fmla="*/ 310212 w 3118129"/>
+              <a:gd name="csY9" fmla="*/ 1759510 h 4429183"/>
+              <a:gd name="csX10" fmla="*/ 346424 w 3118129"/>
+              <a:gd name="csY10" fmla="*/ 4059088 h 4429183"/>
+              <a:gd name="csX11" fmla="*/ 328319 w 3118129"/>
+              <a:gd name="csY11" fmla="*/ 4258265 h 4429183"/>
+              <a:gd name="csX12" fmla="*/ 47660 w 3118129"/>
+              <a:gd name="csY12" fmla="*/ 4258265 h 4429183"/>
+              <a:gd name="csX0" fmla="*/ 47660 w 3118129"/>
+              <a:gd name="csY0" fmla="*/ 4258265 h 4429183"/>
+              <a:gd name="csX1" fmla="*/ 2395 w 3118129"/>
+              <a:gd name="csY1" fmla="*/ 4095302 h 4429183"/>
+              <a:gd name="csX2" fmla="*/ 47660 w 3118129"/>
+              <a:gd name="csY2" fmla="*/ 310954 h 4429183"/>
+              <a:gd name="csX3" fmla="*/ 382640 w 3118129"/>
+              <a:gd name="csY3" fmla="*/ 211366 h 4429183"/>
+              <a:gd name="csX4" fmla="*/ 2709379 w 3118129"/>
+              <a:gd name="csY4" fmla="*/ 193258 h 4429183"/>
+              <a:gd name="csX5" fmla="*/ 3089627 w 3118129"/>
+              <a:gd name="csY5" fmla="*/ 464864 h 4429183"/>
+              <a:gd name="csX6" fmla="*/ 3089624 w 3118129"/>
+              <a:gd name="csY6" fmla="*/ 1397369 h 4429183"/>
+              <a:gd name="csX7" fmla="*/ 2709383 w 3118129"/>
+              <a:gd name="csY7" fmla="*/ 1578441 h 4429183"/>
+              <a:gd name="csX8" fmla="*/ 572762 w 3118129"/>
+              <a:gd name="csY8" fmla="*/ 1542225 h 4429183"/>
+              <a:gd name="csX9" fmla="*/ 310212 w 3118129"/>
+              <a:gd name="csY9" fmla="*/ 1759510 h 4429183"/>
+              <a:gd name="csX10" fmla="*/ 346424 w 3118129"/>
+              <a:gd name="csY10" fmla="*/ 4059088 h 4429183"/>
+              <a:gd name="csX11" fmla="*/ 328319 w 3118129"/>
+              <a:gd name="csY11" fmla="*/ 4258265 h 4429183"/>
+              <a:gd name="csX12" fmla="*/ 47660 w 3118129"/>
+              <a:gd name="csY12" fmla="*/ 4258265 h 4429183"/>
+              <a:gd name="csX0" fmla="*/ 53819 w 3124288"/>
+              <a:gd name="csY0" fmla="*/ 4261697 h 4432615"/>
+              <a:gd name="csX1" fmla="*/ 8554 w 3124288"/>
+              <a:gd name="csY1" fmla="*/ 4098734 h 4432615"/>
+              <a:gd name="csX2" fmla="*/ 53819 w 3124288"/>
+              <a:gd name="csY2" fmla="*/ 314386 h 4432615"/>
+              <a:gd name="csX3" fmla="*/ 506494 w 3124288"/>
+              <a:gd name="csY3" fmla="*/ 205745 h 4432615"/>
+              <a:gd name="csX4" fmla="*/ 2715538 w 3124288"/>
+              <a:gd name="csY4" fmla="*/ 196690 h 4432615"/>
+              <a:gd name="csX5" fmla="*/ 3095786 w 3124288"/>
+              <a:gd name="csY5" fmla="*/ 468296 h 4432615"/>
+              <a:gd name="csX6" fmla="*/ 3095783 w 3124288"/>
+              <a:gd name="csY6" fmla="*/ 1400801 h 4432615"/>
+              <a:gd name="csX7" fmla="*/ 2715542 w 3124288"/>
+              <a:gd name="csY7" fmla="*/ 1581873 h 4432615"/>
+              <a:gd name="csX8" fmla="*/ 578921 w 3124288"/>
+              <a:gd name="csY8" fmla="*/ 1545657 h 4432615"/>
+              <a:gd name="csX9" fmla="*/ 316371 w 3124288"/>
+              <a:gd name="csY9" fmla="*/ 1762942 h 4432615"/>
+              <a:gd name="csX10" fmla="*/ 352583 w 3124288"/>
+              <a:gd name="csY10" fmla="*/ 4062520 h 4432615"/>
+              <a:gd name="csX11" fmla="*/ 334478 w 3124288"/>
+              <a:gd name="csY11" fmla="*/ 4261697 h 4432615"/>
+              <a:gd name="csX12" fmla="*/ 53819 w 3124288"/>
+              <a:gd name="csY12" fmla="*/ 4261697 h 4432615"/>
+              <a:gd name="csX0" fmla="*/ 53819 w 3124288"/>
+              <a:gd name="csY0" fmla="*/ 4261697 h 4432615"/>
+              <a:gd name="csX1" fmla="*/ 8554 w 3124288"/>
+              <a:gd name="csY1" fmla="*/ 4098734 h 4432615"/>
+              <a:gd name="csX2" fmla="*/ 53819 w 3124288"/>
+              <a:gd name="csY2" fmla="*/ 314386 h 4432615"/>
+              <a:gd name="csX3" fmla="*/ 506494 w 3124288"/>
+              <a:gd name="csY3" fmla="*/ 205745 h 4432615"/>
+              <a:gd name="csX4" fmla="*/ 2715538 w 3124288"/>
+              <a:gd name="csY4" fmla="*/ 196690 h 4432615"/>
+              <a:gd name="csX5" fmla="*/ 3095786 w 3124288"/>
+              <a:gd name="csY5" fmla="*/ 468296 h 4432615"/>
+              <a:gd name="csX6" fmla="*/ 3095783 w 3124288"/>
+              <a:gd name="csY6" fmla="*/ 1400801 h 4432615"/>
+              <a:gd name="csX7" fmla="*/ 2715542 w 3124288"/>
+              <a:gd name="csY7" fmla="*/ 1581873 h 4432615"/>
+              <a:gd name="csX8" fmla="*/ 578921 w 3124288"/>
+              <a:gd name="csY8" fmla="*/ 1545657 h 4432615"/>
+              <a:gd name="csX9" fmla="*/ 316371 w 3124288"/>
+              <a:gd name="csY9" fmla="*/ 1762942 h 4432615"/>
+              <a:gd name="csX10" fmla="*/ 352583 w 3124288"/>
+              <a:gd name="csY10" fmla="*/ 4062520 h 4432615"/>
+              <a:gd name="csX11" fmla="*/ 334478 w 3124288"/>
+              <a:gd name="csY11" fmla="*/ 4261697 h 4432615"/>
+              <a:gd name="csX12" fmla="*/ 53819 w 3124288"/>
+              <a:gd name="csY12" fmla="*/ 4261697 h 4432615"/>
+              <a:gd name="csX0" fmla="*/ 69404 w 3139873"/>
+              <a:gd name="csY0" fmla="*/ 4248474 h 4419392"/>
+              <a:gd name="csX1" fmla="*/ 24139 w 3139873"/>
+              <a:gd name="csY1" fmla="*/ 4085511 h 4419392"/>
+              <a:gd name="csX2" fmla="*/ 42243 w 3139873"/>
+              <a:gd name="csY2" fmla="*/ 319270 h 4419392"/>
+              <a:gd name="csX3" fmla="*/ 522079 w 3139873"/>
+              <a:gd name="csY3" fmla="*/ 192522 h 4419392"/>
+              <a:gd name="csX4" fmla="*/ 2731123 w 3139873"/>
+              <a:gd name="csY4" fmla="*/ 183467 h 4419392"/>
+              <a:gd name="csX5" fmla="*/ 3111371 w 3139873"/>
+              <a:gd name="csY5" fmla="*/ 455073 h 4419392"/>
+              <a:gd name="csX6" fmla="*/ 3111368 w 3139873"/>
+              <a:gd name="csY6" fmla="*/ 1387578 h 4419392"/>
+              <a:gd name="csX7" fmla="*/ 2731127 w 3139873"/>
+              <a:gd name="csY7" fmla="*/ 1568650 h 4419392"/>
+              <a:gd name="csX8" fmla="*/ 594506 w 3139873"/>
+              <a:gd name="csY8" fmla="*/ 1532434 h 4419392"/>
+              <a:gd name="csX9" fmla="*/ 331956 w 3139873"/>
+              <a:gd name="csY9" fmla="*/ 1749719 h 4419392"/>
+              <a:gd name="csX10" fmla="*/ 368168 w 3139873"/>
+              <a:gd name="csY10" fmla="*/ 4049297 h 4419392"/>
+              <a:gd name="csX11" fmla="*/ 350063 w 3139873"/>
+              <a:gd name="csY11" fmla="*/ 4248474 h 4419392"/>
+              <a:gd name="csX12" fmla="*/ 69404 w 3139873"/>
+              <a:gd name="csY12" fmla="*/ 4248474 h 4419392"/>
+              <a:gd name="csX0" fmla="*/ 45832 w 3116301"/>
+              <a:gd name="csY0" fmla="*/ 4087341 h 4258259"/>
+              <a:gd name="csX1" fmla="*/ 567 w 3116301"/>
+              <a:gd name="csY1" fmla="*/ 3924378 h 4258259"/>
+              <a:gd name="csX2" fmla="*/ 18671 w 3116301"/>
+              <a:gd name="csY2" fmla="*/ 158137 h 4258259"/>
+              <a:gd name="csX3" fmla="*/ 498507 w 3116301"/>
+              <a:gd name="csY3" fmla="*/ 31389 h 4258259"/>
+              <a:gd name="csX4" fmla="*/ 2707551 w 3116301"/>
+              <a:gd name="csY4" fmla="*/ 22334 h 4258259"/>
+              <a:gd name="csX5" fmla="*/ 3087799 w 3116301"/>
+              <a:gd name="csY5" fmla="*/ 293940 h 4258259"/>
+              <a:gd name="csX6" fmla="*/ 3087796 w 3116301"/>
+              <a:gd name="csY6" fmla="*/ 1226445 h 4258259"/>
+              <a:gd name="csX7" fmla="*/ 2707555 w 3116301"/>
+              <a:gd name="csY7" fmla="*/ 1407517 h 4258259"/>
+              <a:gd name="csX8" fmla="*/ 570934 w 3116301"/>
+              <a:gd name="csY8" fmla="*/ 1371301 h 4258259"/>
+              <a:gd name="csX9" fmla="*/ 308384 w 3116301"/>
+              <a:gd name="csY9" fmla="*/ 1588586 h 4258259"/>
+              <a:gd name="csX10" fmla="*/ 344596 w 3116301"/>
+              <a:gd name="csY10" fmla="*/ 3888164 h 4258259"/>
+              <a:gd name="csX11" fmla="*/ 326491 w 3116301"/>
+              <a:gd name="csY11" fmla="*/ 4087341 h 4258259"/>
+              <a:gd name="csX12" fmla="*/ 45832 w 3116301"/>
+              <a:gd name="csY12" fmla="*/ 4087341 h 4258259"/>
+              <a:gd name="csX0" fmla="*/ 55923 w 3126392"/>
+              <a:gd name="csY0" fmla="*/ 4091691 h 4262609"/>
+              <a:gd name="csX1" fmla="*/ 10658 w 3126392"/>
+              <a:gd name="csY1" fmla="*/ 3928728 h 4262609"/>
+              <a:gd name="csX2" fmla="*/ 1602 w 3126392"/>
+              <a:gd name="csY2" fmla="*/ 253021 h 4262609"/>
+              <a:gd name="csX3" fmla="*/ 508598 w 3126392"/>
+              <a:gd name="csY3" fmla="*/ 35739 h 4262609"/>
+              <a:gd name="csX4" fmla="*/ 2717642 w 3126392"/>
+              <a:gd name="csY4" fmla="*/ 26684 h 4262609"/>
+              <a:gd name="csX5" fmla="*/ 3097890 w 3126392"/>
+              <a:gd name="csY5" fmla="*/ 298290 h 4262609"/>
+              <a:gd name="csX6" fmla="*/ 3097887 w 3126392"/>
+              <a:gd name="csY6" fmla="*/ 1230795 h 4262609"/>
+              <a:gd name="csX7" fmla="*/ 2717646 w 3126392"/>
+              <a:gd name="csY7" fmla="*/ 1411867 h 4262609"/>
+              <a:gd name="csX8" fmla="*/ 581025 w 3126392"/>
+              <a:gd name="csY8" fmla="*/ 1375651 h 4262609"/>
+              <a:gd name="csX9" fmla="*/ 318475 w 3126392"/>
+              <a:gd name="csY9" fmla="*/ 1592936 h 4262609"/>
+              <a:gd name="csX10" fmla="*/ 354687 w 3126392"/>
+              <a:gd name="csY10" fmla="*/ 3892514 h 4262609"/>
+              <a:gd name="csX11" fmla="*/ 336582 w 3126392"/>
+              <a:gd name="csY11" fmla="*/ 4091691 h 4262609"/>
+              <a:gd name="csX12" fmla="*/ 55923 w 3126392"/>
+              <a:gd name="csY12" fmla="*/ 4091691 h 4262609"/>
+              <a:gd name="csX0" fmla="*/ 55158 w 3125627"/>
+              <a:gd name="csY0" fmla="*/ 4091691 h 4262609"/>
+              <a:gd name="csX1" fmla="*/ 9893 w 3125627"/>
+              <a:gd name="csY1" fmla="*/ 3928728 h 4262609"/>
+              <a:gd name="csX2" fmla="*/ 837 w 3125627"/>
+              <a:gd name="csY2" fmla="*/ 253021 h 4262609"/>
+              <a:gd name="csX3" fmla="*/ 507833 w 3125627"/>
+              <a:gd name="csY3" fmla="*/ 35739 h 4262609"/>
+              <a:gd name="csX4" fmla="*/ 2716877 w 3125627"/>
+              <a:gd name="csY4" fmla="*/ 26684 h 4262609"/>
+              <a:gd name="csX5" fmla="*/ 3097125 w 3125627"/>
+              <a:gd name="csY5" fmla="*/ 298290 h 4262609"/>
+              <a:gd name="csX6" fmla="*/ 3097122 w 3125627"/>
+              <a:gd name="csY6" fmla="*/ 1230795 h 4262609"/>
+              <a:gd name="csX7" fmla="*/ 2716881 w 3125627"/>
+              <a:gd name="csY7" fmla="*/ 1411867 h 4262609"/>
+              <a:gd name="csX8" fmla="*/ 580260 w 3125627"/>
+              <a:gd name="csY8" fmla="*/ 1375651 h 4262609"/>
+              <a:gd name="csX9" fmla="*/ 317710 w 3125627"/>
+              <a:gd name="csY9" fmla="*/ 1592936 h 4262609"/>
+              <a:gd name="csX10" fmla="*/ 353922 w 3125627"/>
+              <a:gd name="csY10" fmla="*/ 3892514 h 4262609"/>
+              <a:gd name="csX11" fmla="*/ 335817 w 3125627"/>
+              <a:gd name="csY11" fmla="*/ 4091691 h 4262609"/>
+              <a:gd name="csX12" fmla="*/ 55158 w 3125627"/>
+              <a:gd name="csY12" fmla="*/ 4091691 h 4262609"/>
+              <a:gd name="csX0" fmla="*/ 55158 w 3125627"/>
+              <a:gd name="csY0" fmla="*/ 4091691 h 4262609"/>
+              <a:gd name="csX1" fmla="*/ 9893 w 3125627"/>
+              <a:gd name="csY1" fmla="*/ 3928728 h 4262609"/>
+              <a:gd name="csX2" fmla="*/ 837 w 3125627"/>
+              <a:gd name="csY2" fmla="*/ 253021 h 4262609"/>
+              <a:gd name="csX3" fmla="*/ 507833 w 3125627"/>
+              <a:gd name="csY3" fmla="*/ 35739 h 4262609"/>
+              <a:gd name="csX4" fmla="*/ 2716877 w 3125627"/>
+              <a:gd name="csY4" fmla="*/ 26684 h 4262609"/>
+              <a:gd name="csX5" fmla="*/ 3097125 w 3125627"/>
+              <a:gd name="csY5" fmla="*/ 298290 h 4262609"/>
+              <a:gd name="csX6" fmla="*/ 3097122 w 3125627"/>
+              <a:gd name="csY6" fmla="*/ 1230795 h 4262609"/>
+              <a:gd name="csX7" fmla="*/ 2716881 w 3125627"/>
+              <a:gd name="csY7" fmla="*/ 1411867 h 4262609"/>
+              <a:gd name="csX8" fmla="*/ 616474 w 3125627"/>
+              <a:gd name="csY8" fmla="*/ 1420918 h 4262609"/>
+              <a:gd name="csX9" fmla="*/ 317710 w 3125627"/>
+              <a:gd name="csY9" fmla="*/ 1592936 h 4262609"/>
+              <a:gd name="csX10" fmla="*/ 353922 w 3125627"/>
+              <a:gd name="csY10" fmla="*/ 3892514 h 4262609"/>
+              <a:gd name="csX11" fmla="*/ 335817 w 3125627"/>
+              <a:gd name="csY11" fmla="*/ 4091691 h 4262609"/>
+              <a:gd name="csX12" fmla="*/ 55158 w 3125627"/>
+              <a:gd name="csY12" fmla="*/ 4091691 h 4262609"/>
+              <a:gd name="csX0" fmla="*/ 55158 w 3125627"/>
+              <a:gd name="csY0" fmla="*/ 4091691 h 4262609"/>
+              <a:gd name="csX1" fmla="*/ 9893 w 3125627"/>
+              <a:gd name="csY1" fmla="*/ 3928728 h 4262609"/>
+              <a:gd name="csX2" fmla="*/ 837 w 3125627"/>
+              <a:gd name="csY2" fmla="*/ 253021 h 4262609"/>
+              <a:gd name="csX3" fmla="*/ 507833 w 3125627"/>
+              <a:gd name="csY3" fmla="*/ 35739 h 4262609"/>
+              <a:gd name="csX4" fmla="*/ 2716877 w 3125627"/>
+              <a:gd name="csY4" fmla="*/ 26684 h 4262609"/>
+              <a:gd name="csX5" fmla="*/ 3097125 w 3125627"/>
+              <a:gd name="csY5" fmla="*/ 298290 h 4262609"/>
+              <a:gd name="csX6" fmla="*/ 3097122 w 3125627"/>
+              <a:gd name="csY6" fmla="*/ 1230795 h 4262609"/>
+              <a:gd name="csX7" fmla="*/ 2716881 w 3125627"/>
+              <a:gd name="csY7" fmla="*/ 1411867 h 4262609"/>
+              <a:gd name="csX8" fmla="*/ 616474 w 3125627"/>
+              <a:gd name="csY8" fmla="*/ 1420918 h 4262609"/>
+              <a:gd name="csX9" fmla="*/ 317710 w 3125627"/>
+              <a:gd name="csY9" fmla="*/ 1592936 h 4262609"/>
+              <a:gd name="csX10" fmla="*/ 353922 w 3125627"/>
+              <a:gd name="csY10" fmla="*/ 3892514 h 4262609"/>
+              <a:gd name="csX11" fmla="*/ 335817 w 3125627"/>
+              <a:gd name="csY11" fmla="*/ 4091691 h 4262609"/>
+              <a:gd name="csX12" fmla="*/ 55158 w 3125627"/>
+              <a:gd name="csY12" fmla="*/ 4091691 h 4262609"/>
+              <a:gd name="csX0" fmla="*/ 55158 w 3125627"/>
+              <a:gd name="csY0" fmla="*/ 4091691 h 4262609"/>
+              <a:gd name="csX1" fmla="*/ 9893 w 3125627"/>
+              <a:gd name="csY1" fmla="*/ 3928728 h 4262609"/>
+              <a:gd name="csX2" fmla="*/ 837 w 3125627"/>
+              <a:gd name="csY2" fmla="*/ 253021 h 4262609"/>
+              <a:gd name="csX3" fmla="*/ 507833 w 3125627"/>
+              <a:gd name="csY3" fmla="*/ 35739 h 4262609"/>
+              <a:gd name="csX4" fmla="*/ 2716877 w 3125627"/>
+              <a:gd name="csY4" fmla="*/ 26684 h 4262609"/>
+              <a:gd name="csX5" fmla="*/ 3097125 w 3125627"/>
+              <a:gd name="csY5" fmla="*/ 298290 h 4262609"/>
+              <a:gd name="csX6" fmla="*/ 3097122 w 3125627"/>
+              <a:gd name="csY6" fmla="*/ 1230795 h 4262609"/>
+              <a:gd name="csX7" fmla="*/ 2716881 w 3125627"/>
+              <a:gd name="csY7" fmla="*/ 1411867 h 4262609"/>
+              <a:gd name="csX8" fmla="*/ 616474 w 3125627"/>
+              <a:gd name="csY8" fmla="*/ 1420918 h 4262609"/>
+              <a:gd name="csX9" fmla="*/ 317710 w 3125627"/>
+              <a:gd name="csY9" fmla="*/ 1592936 h 4262609"/>
+              <a:gd name="csX10" fmla="*/ 353922 w 3125627"/>
+              <a:gd name="csY10" fmla="*/ 3892514 h 4262609"/>
+              <a:gd name="csX11" fmla="*/ 335817 w 3125627"/>
+              <a:gd name="csY11" fmla="*/ 4091691 h 4262609"/>
+              <a:gd name="csX12" fmla="*/ 55158 w 3125627"/>
+              <a:gd name="csY12" fmla="*/ 4091691 h 4262609"/>
+              <a:gd name="csX0" fmla="*/ 55158 w 3125627"/>
+              <a:gd name="csY0" fmla="*/ 4091691 h 4270298"/>
+              <a:gd name="csX1" fmla="*/ 9893 w 3125627"/>
+              <a:gd name="csY1" fmla="*/ 3928728 h 4270298"/>
+              <a:gd name="csX2" fmla="*/ 837 w 3125627"/>
+              <a:gd name="csY2" fmla="*/ 253021 h 4270298"/>
+              <a:gd name="csX3" fmla="*/ 507833 w 3125627"/>
+              <a:gd name="csY3" fmla="*/ 35739 h 4270298"/>
+              <a:gd name="csX4" fmla="*/ 2716877 w 3125627"/>
+              <a:gd name="csY4" fmla="*/ 26684 h 4270298"/>
+              <a:gd name="csX5" fmla="*/ 3097125 w 3125627"/>
+              <a:gd name="csY5" fmla="*/ 298290 h 4270298"/>
+              <a:gd name="csX6" fmla="*/ 3097122 w 3125627"/>
+              <a:gd name="csY6" fmla="*/ 1230795 h 4270298"/>
+              <a:gd name="csX7" fmla="*/ 2716881 w 3125627"/>
+              <a:gd name="csY7" fmla="*/ 1411867 h 4270298"/>
+              <a:gd name="csX8" fmla="*/ 616474 w 3125627"/>
+              <a:gd name="csY8" fmla="*/ 1420918 h 4270298"/>
+              <a:gd name="csX9" fmla="*/ 317710 w 3125627"/>
+              <a:gd name="csY9" fmla="*/ 1592936 h 4270298"/>
+              <a:gd name="csX10" fmla="*/ 353922 w 3125627"/>
+              <a:gd name="csY10" fmla="*/ 3892514 h 4270298"/>
+              <a:gd name="csX11" fmla="*/ 335817 w 3125627"/>
+              <a:gd name="csY11" fmla="*/ 4091691 h 4270298"/>
+              <a:gd name="csX12" fmla="*/ 55158 w 3125627"/>
+              <a:gd name="csY12" fmla="*/ 4091691 h 4270298"/>
+              <a:gd name="csX0" fmla="*/ 55158 w 3125627"/>
+              <a:gd name="csY0" fmla="*/ 4091691 h 4147794"/>
+              <a:gd name="csX1" fmla="*/ 9893 w 3125627"/>
+              <a:gd name="csY1" fmla="*/ 3928728 h 4147794"/>
+              <a:gd name="csX2" fmla="*/ 837 w 3125627"/>
+              <a:gd name="csY2" fmla="*/ 253021 h 4147794"/>
+              <a:gd name="csX3" fmla="*/ 507833 w 3125627"/>
+              <a:gd name="csY3" fmla="*/ 35739 h 4147794"/>
+              <a:gd name="csX4" fmla="*/ 2716877 w 3125627"/>
+              <a:gd name="csY4" fmla="*/ 26684 h 4147794"/>
+              <a:gd name="csX5" fmla="*/ 3097125 w 3125627"/>
+              <a:gd name="csY5" fmla="*/ 298290 h 4147794"/>
+              <a:gd name="csX6" fmla="*/ 3097122 w 3125627"/>
+              <a:gd name="csY6" fmla="*/ 1230795 h 4147794"/>
+              <a:gd name="csX7" fmla="*/ 2716881 w 3125627"/>
+              <a:gd name="csY7" fmla="*/ 1411867 h 4147794"/>
+              <a:gd name="csX8" fmla="*/ 616474 w 3125627"/>
+              <a:gd name="csY8" fmla="*/ 1420918 h 4147794"/>
+              <a:gd name="csX9" fmla="*/ 317710 w 3125627"/>
+              <a:gd name="csY9" fmla="*/ 1592936 h 4147794"/>
+              <a:gd name="csX10" fmla="*/ 353922 w 3125627"/>
+              <a:gd name="csY10" fmla="*/ 3892514 h 4147794"/>
+              <a:gd name="csX11" fmla="*/ 335817 w 3125627"/>
+              <a:gd name="csY11" fmla="*/ 4091691 h 4147794"/>
+              <a:gd name="csX12" fmla="*/ 55158 w 3125627"/>
+              <a:gd name="csY12" fmla="*/ 4091691 h 4147794"/>
+              <a:gd name="csX0" fmla="*/ 55158 w 3125627"/>
+              <a:gd name="csY0" fmla="*/ 4091691 h 4147794"/>
+              <a:gd name="csX1" fmla="*/ 9893 w 3125627"/>
+              <a:gd name="csY1" fmla="*/ 3928728 h 4147794"/>
+              <a:gd name="csX2" fmla="*/ 837 w 3125627"/>
+              <a:gd name="csY2" fmla="*/ 253021 h 4147794"/>
+              <a:gd name="csX3" fmla="*/ 507833 w 3125627"/>
+              <a:gd name="csY3" fmla="*/ 35739 h 4147794"/>
+              <a:gd name="csX4" fmla="*/ 2716877 w 3125627"/>
+              <a:gd name="csY4" fmla="*/ 26684 h 4147794"/>
+              <a:gd name="csX5" fmla="*/ 3097125 w 3125627"/>
+              <a:gd name="csY5" fmla="*/ 298290 h 4147794"/>
+              <a:gd name="csX6" fmla="*/ 3097122 w 3125627"/>
+              <a:gd name="csY6" fmla="*/ 1230795 h 4147794"/>
+              <a:gd name="csX7" fmla="*/ 2716881 w 3125627"/>
+              <a:gd name="csY7" fmla="*/ 1411867 h 4147794"/>
+              <a:gd name="csX8" fmla="*/ 616474 w 3125627"/>
+              <a:gd name="csY8" fmla="*/ 1420918 h 4147794"/>
+              <a:gd name="csX9" fmla="*/ 317710 w 3125627"/>
+              <a:gd name="csY9" fmla="*/ 1592936 h 4147794"/>
+              <a:gd name="csX10" fmla="*/ 353922 w 3125627"/>
+              <a:gd name="csY10" fmla="*/ 3892514 h 4147794"/>
+              <a:gd name="csX11" fmla="*/ 263389 w 3125627"/>
+              <a:gd name="csY11" fmla="*/ 4091691 h 4147794"/>
+              <a:gd name="csX12" fmla="*/ 55158 w 3125627"/>
+              <a:gd name="csY12" fmla="*/ 4091691 h 4147794"/>
+              <a:gd name="csX0" fmla="*/ 55158 w 3125627"/>
+              <a:gd name="csY0" fmla="*/ 4091691 h 4162453"/>
+              <a:gd name="csX1" fmla="*/ 9893 w 3125627"/>
+              <a:gd name="csY1" fmla="*/ 3928728 h 4162453"/>
+              <a:gd name="csX2" fmla="*/ 837 w 3125627"/>
+              <a:gd name="csY2" fmla="*/ 253021 h 4162453"/>
+              <a:gd name="csX3" fmla="*/ 507833 w 3125627"/>
+              <a:gd name="csY3" fmla="*/ 35739 h 4162453"/>
+              <a:gd name="csX4" fmla="*/ 2716877 w 3125627"/>
+              <a:gd name="csY4" fmla="*/ 26684 h 4162453"/>
+              <a:gd name="csX5" fmla="*/ 3097125 w 3125627"/>
+              <a:gd name="csY5" fmla="*/ 298290 h 4162453"/>
+              <a:gd name="csX6" fmla="*/ 3097122 w 3125627"/>
+              <a:gd name="csY6" fmla="*/ 1230795 h 4162453"/>
+              <a:gd name="csX7" fmla="*/ 2716881 w 3125627"/>
+              <a:gd name="csY7" fmla="*/ 1411867 h 4162453"/>
+              <a:gd name="csX8" fmla="*/ 616474 w 3125627"/>
+              <a:gd name="csY8" fmla="*/ 1420918 h 4162453"/>
+              <a:gd name="csX9" fmla="*/ 317710 w 3125627"/>
+              <a:gd name="csY9" fmla="*/ 1592936 h 4162453"/>
+              <a:gd name="csX10" fmla="*/ 335815 w 3125627"/>
+              <a:gd name="csY10" fmla="*/ 3919674 h 4162453"/>
+              <a:gd name="csX11" fmla="*/ 263389 w 3125627"/>
+              <a:gd name="csY11" fmla="*/ 4091691 h 4162453"/>
+              <a:gd name="csX12" fmla="*/ 55158 w 3125627"/>
+              <a:gd name="csY12" fmla="*/ 4091691 h 4162453"/>
+              <a:gd name="csX0" fmla="*/ 55158 w 3125627"/>
+              <a:gd name="csY0" fmla="*/ 4091691 h 4104104"/>
+              <a:gd name="csX1" fmla="*/ 9893 w 3125627"/>
+              <a:gd name="csY1" fmla="*/ 3928728 h 4104104"/>
+              <a:gd name="csX2" fmla="*/ 837 w 3125627"/>
+              <a:gd name="csY2" fmla="*/ 253021 h 4104104"/>
+              <a:gd name="csX3" fmla="*/ 507833 w 3125627"/>
+              <a:gd name="csY3" fmla="*/ 35739 h 4104104"/>
+              <a:gd name="csX4" fmla="*/ 2716877 w 3125627"/>
+              <a:gd name="csY4" fmla="*/ 26684 h 4104104"/>
+              <a:gd name="csX5" fmla="*/ 3097125 w 3125627"/>
+              <a:gd name="csY5" fmla="*/ 298290 h 4104104"/>
+              <a:gd name="csX6" fmla="*/ 3097122 w 3125627"/>
+              <a:gd name="csY6" fmla="*/ 1230795 h 4104104"/>
+              <a:gd name="csX7" fmla="*/ 2716881 w 3125627"/>
+              <a:gd name="csY7" fmla="*/ 1411867 h 4104104"/>
+              <a:gd name="csX8" fmla="*/ 616474 w 3125627"/>
+              <a:gd name="csY8" fmla="*/ 1420918 h 4104104"/>
+              <a:gd name="csX9" fmla="*/ 317710 w 3125627"/>
+              <a:gd name="csY9" fmla="*/ 1592936 h 4104104"/>
+              <a:gd name="csX10" fmla="*/ 335815 w 3125627"/>
+              <a:gd name="csY10" fmla="*/ 3919674 h 4104104"/>
+              <a:gd name="csX11" fmla="*/ 263389 w 3125627"/>
+              <a:gd name="csY11" fmla="*/ 4091691 h 4104104"/>
+              <a:gd name="csX12" fmla="*/ 55158 w 3125627"/>
+              <a:gd name="csY12" fmla="*/ 4091691 h 4104104"/>
+              <a:gd name="csX0" fmla="*/ 55158 w 3125627"/>
+              <a:gd name="csY0" fmla="*/ 4091691 h 4104104"/>
+              <a:gd name="csX1" fmla="*/ 9893 w 3125627"/>
+              <a:gd name="csY1" fmla="*/ 3928728 h 4104104"/>
+              <a:gd name="csX2" fmla="*/ 837 w 3125627"/>
+              <a:gd name="csY2" fmla="*/ 253021 h 4104104"/>
+              <a:gd name="csX3" fmla="*/ 507833 w 3125627"/>
+              <a:gd name="csY3" fmla="*/ 35739 h 4104104"/>
+              <a:gd name="csX4" fmla="*/ 2716877 w 3125627"/>
+              <a:gd name="csY4" fmla="*/ 26684 h 4104104"/>
+              <a:gd name="csX5" fmla="*/ 3097125 w 3125627"/>
+              <a:gd name="csY5" fmla="*/ 298290 h 4104104"/>
+              <a:gd name="csX6" fmla="*/ 3097122 w 3125627"/>
+              <a:gd name="csY6" fmla="*/ 1230795 h 4104104"/>
+              <a:gd name="csX7" fmla="*/ 2716881 w 3125627"/>
+              <a:gd name="csY7" fmla="*/ 1411867 h 4104104"/>
+              <a:gd name="csX8" fmla="*/ 616474 w 3125627"/>
+              <a:gd name="csY8" fmla="*/ 1420918 h 4104104"/>
+              <a:gd name="csX9" fmla="*/ 317710 w 3125627"/>
+              <a:gd name="csY9" fmla="*/ 1592936 h 4104104"/>
+              <a:gd name="csX10" fmla="*/ 335815 w 3125627"/>
+              <a:gd name="csY10" fmla="*/ 3919674 h 4104104"/>
+              <a:gd name="csX11" fmla="*/ 263389 w 3125627"/>
+              <a:gd name="csY11" fmla="*/ 4091691 h 4104104"/>
+              <a:gd name="csX12" fmla="*/ 55158 w 3125627"/>
+              <a:gd name="csY12" fmla="*/ 4091691 h 4104104"/>
+              <a:gd name="csX0" fmla="*/ 55158 w 3125627"/>
+              <a:gd name="csY0" fmla="*/ 4079295 h 4091708"/>
+              <a:gd name="csX1" fmla="*/ 9893 w 3125627"/>
+              <a:gd name="csY1" fmla="*/ 3916332 h 4091708"/>
+              <a:gd name="csX2" fmla="*/ 837 w 3125627"/>
+              <a:gd name="csY2" fmla="*/ 240625 h 4091708"/>
+              <a:gd name="csX3" fmla="*/ 507833 w 3125627"/>
+              <a:gd name="csY3" fmla="*/ 23343 h 4091708"/>
+              <a:gd name="csX4" fmla="*/ 2716877 w 3125627"/>
+              <a:gd name="csY4" fmla="*/ 14288 h 4091708"/>
+              <a:gd name="csX5" fmla="*/ 3097125 w 3125627"/>
+              <a:gd name="csY5" fmla="*/ 285894 h 4091708"/>
+              <a:gd name="csX6" fmla="*/ 3097122 w 3125627"/>
+              <a:gd name="csY6" fmla="*/ 1218399 h 4091708"/>
+              <a:gd name="csX7" fmla="*/ 2716881 w 3125627"/>
+              <a:gd name="csY7" fmla="*/ 1399471 h 4091708"/>
+              <a:gd name="csX8" fmla="*/ 616474 w 3125627"/>
+              <a:gd name="csY8" fmla="*/ 1408522 h 4091708"/>
+              <a:gd name="csX9" fmla="*/ 317710 w 3125627"/>
+              <a:gd name="csY9" fmla="*/ 1580540 h 4091708"/>
+              <a:gd name="csX10" fmla="*/ 335815 w 3125627"/>
+              <a:gd name="csY10" fmla="*/ 3907278 h 4091708"/>
+              <a:gd name="csX11" fmla="*/ 263389 w 3125627"/>
+              <a:gd name="csY11" fmla="*/ 4079295 h 4091708"/>
+              <a:gd name="csX12" fmla="*/ 55158 w 3125627"/>
+              <a:gd name="csY12" fmla="*/ 4079295 h 4091708"/>
+              <a:gd name="csX0" fmla="*/ 55158 w 3125627"/>
+              <a:gd name="csY0" fmla="*/ 4067644 h 4080057"/>
+              <a:gd name="csX1" fmla="*/ 9893 w 3125627"/>
+              <a:gd name="csY1" fmla="*/ 3904681 h 4080057"/>
+              <a:gd name="csX2" fmla="*/ 837 w 3125627"/>
+              <a:gd name="csY2" fmla="*/ 228974 h 4080057"/>
+              <a:gd name="csX3" fmla="*/ 507833 w 3125627"/>
+              <a:gd name="csY3" fmla="*/ 11692 h 4080057"/>
+              <a:gd name="csX4" fmla="*/ 2716877 w 3125627"/>
+              <a:gd name="csY4" fmla="*/ 2637 h 4080057"/>
+              <a:gd name="csX5" fmla="*/ 3097125 w 3125627"/>
+              <a:gd name="csY5" fmla="*/ 274243 h 4080057"/>
+              <a:gd name="csX6" fmla="*/ 3097122 w 3125627"/>
+              <a:gd name="csY6" fmla="*/ 1206748 h 4080057"/>
+              <a:gd name="csX7" fmla="*/ 2716881 w 3125627"/>
+              <a:gd name="csY7" fmla="*/ 1387820 h 4080057"/>
+              <a:gd name="csX8" fmla="*/ 616474 w 3125627"/>
+              <a:gd name="csY8" fmla="*/ 1396871 h 4080057"/>
+              <a:gd name="csX9" fmla="*/ 317710 w 3125627"/>
+              <a:gd name="csY9" fmla="*/ 1568889 h 4080057"/>
+              <a:gd name="csX10" fmla="*/ 335815 w 3125627"/>
+              <a:gd name="csY10" fmla="*/ 3895627 h 4080057"/>
+              <a:gd name="csX11" fmla="*/ 263389 w 3125627"/>
+              <a:gd name="csY11" fmla="*/ 4067644 h 4080057"/>
+              <a:gd name="csX12" fmla="*/ 55158 w 3125627"/>
+              <a:gd name="csY12" fmla="*/ 4067644 h 4080057"/>
+              <a:gd name="csX0" fmla="*/ 55158 w 3125627"/>
+              <a:gd name="csY0" fmla="*/ 4065007 h 4077420"/>
+              <a:gd name="csX1" fmla="*/ 9893 w 3125627"/>
+              <a:gd name="csY1" fmla="*/ 3902044 h 4077420"/>
+              <a:gd name="csX2" fmla="*/ 837 w 3125627"/>
+              <a:gd name="csY2" fmla="*/ 226337 h 4077420"/>
+              <a:gd name="csX3" fmla="*/ 507833 w 3125627"/>
+              <a:gd name="csY3" fmla="*/ 9055 h 4077420"/>
+              <a:gd name="csX4" fmla="*/ 2716877 w 3125627"/>
+              <a:gd name="csY4" fmla="*/ 0 h 4077420"/>
+              <a:gd name="csX5" fmla="*/ 3097125 w 3125627"/>
+              <a:gd name="csY5" fmla="*/ 271606 h 4077420"/>
+              <a:gd name="csX6" fmla="*/ 3097122 w 3125627"/>
+              <a:gd name="csY6" fmla="*/ 1204111 h 4077420"/>
+              <a:gd name="csX7" fmla="*/ 2716881 w 3125627"/>
+              <a:gd name="csY7" fmla="*/ 1385183 h 4077420"/>
+              <a:gd name="csX8" fmla="*/ 616474 w 3125627"/>
+              <a:gd name="csY8" fmla="*/ 1394234 h 4077420"/>
+              <a:gd name="csX9" fmla="*/ 317710 w 3125627"/>
+              <a:gd name="csY9" fmla="*/ 1566252 h 4077420"/>
+              <a:gd name="csX10" fmla="*/ 335815 w 3125627"/>
+              <a:gd name="csY10" fmla="*/ 3892990 h 4077420"/>
+              <a:gd name="csX11" fmla="*/ 263389 w 3125627"/>
+              <a:gd name="csY11" fmla="*/ 4065007 h 4077420"/>
+              <a:gd name="csX12" fmla="*/ 55158 w 3125627"/>
+              <a:gd name="csY12" fmla="*/ 4065007 h 4077420"/>
+              <a:gd name="csX0" fmla="*/ 55158 w 3125627"/>
+              <a:gd name="csY0" fmla="*/ 4065007 h 4077420"/>
+              <a:gd name="csX1" fmla="*/ 9893 w 3125627"/>
+              <a:gd name="csY1" fmla="*/ 3902044 h 4077420"/>
+              <a:gd name="csX2" fmla="*/ 837 w 3125627"/>
+              <a:gd name="csY2" fmla="*/ 226337 h 4077420"/>
+              <a:gd name="csX3" fmla="*/ 507833 w 3125627"/>
+              <a:gd name="csY3" fmla="*/ 9055 h 4077420"/>
+              <a:gd name="csX4" fmla="*/ 2716877 w 3125627"/>
+              <a:gd name="csY4" fmla="*/ 0 h 4077420"/>
+              <a:gd name="csX5" fmla="*/ 3097125 w 3125627"/>
+              <a:gd name="csY5" fmla="*/ 271606 h 4077420"/>
+              <a:gd name="csX6" fmla="*/ 3097122 w 3125627"/>
+              <a:gd name="csY6" fmla="*/ 1204111 h 4077420"/>
+              <a:gd name="csX7" fmla="*/ 2716881 w 3125627"/>
+              <a:gd name="csY7" fmla="*/ 1385183 h 4077420"/>
+              <a:gd name="csX8" fmla="*/ 616474 w 3125627"/>
+              <a:gd name="csY8" fmla="*/ 1394234 h 4077420"/>
+              <a:gd name="csX9" fmla="*/ 317710 w 3125627"/>
+              <a:gd name="csY9" fmla="*/ 1566252 h 4077420"/>
+              <a:gd name="csX10" fmla="*/ 308655 w 3125627"/>
+              <a:gd name="csY10" fmla="*/ 3883936 h 4077420"/>
+              <a:gd name="csX11" fmla="*/ 263389 w 3125627"/>
+              <a:gd name="csY11" fmla="*/ 4065007 h 4077420"/>
+              <a:gd name="csX12" fmla="*/ 55158 w 3125627"/>
+              <a:gd name="csY12" fmla="*/ 4065007 h 4077420"/>
+              <a:gd name="csX0" fmla="*/ 55158 w 3125627"/>
+              <a:gd name="csY0" fmla="*/ 4065007 h 4135506"/>
+              <a:gd name="csX1" fmla="*/ 9893 w 3125627"/>
+              <a:gd name="csY1" fmla="*/ 3902044 h 4135506"/>
+              <a:gd name="csX2" fmla="*/ 837 w 3125627"/>
+              <a:gd name="csY2" fmla="*/ 226337 h 4135506"/>
+              <a:gd name="csX3" fmla="*/ 507833 w 3125627"/>
+              <a:gd name="csY3" fmla="*/ 9055 h 4135506"/>
+              <a:gd name="csX4" fmla="*/ 2716877 w 3125627"/>
+              <a:gd name="csY4" fmla="*/ 0 h 4135506"/>
+              <a:gd name="csX5" fmla="*/ 3097125 w 3125627"/>
+              <a:gd name="csY5" fmla="*/ 271606 h 4135506"/>
+              <a:gd name="csX6" fmla="*/ 3097122 w 3125627"/>
+              <a:gd name="csY6" fmla="*/ 1204111 h 4135506"/>
+              <a:gd name="csX7" fmla="*/ 2716881 w 3125627"/>
+              <a:gd name="csY7" fmla="*/ 1385183 h 4135506"/>
+              <a:gd name="csX8" fmla="*/ 616474 w 3125627"/>
+              <a:gd name="csY8" fmla="*/ 1394234 h 4135506"/>
+              <a:gd name="csX9" fmla="*/ 317710 w 3125627"/>
+              <a:gd name="csY9" fmla="*/ 1566252 h 4135506"/>
+              <a:gd name="csX10" fmla="*/ 308655 w 3125627"/>
+              <a:gd name="csY10" fmla="*/ 3883936 h 4135506"/>
+              <a:gd name="csX11" fmla="*/ 218121 w 3125627"/>
+              <a:gd name="csY11" fmla="*/ 4074061 h 4135506"/>
+              <a:gd name="csX12" fmla="*/ 55158 w 3125627"/>
+              <a:gd name="csY12" fmla="*/ 4065007 h 4135506"/>
+              <a:gd name="csX0" fmla="*/ 55158 w 3125627"/>
+              <a:gd name="csY0" fmla="*/ 4065007 h 4081083"/>
+              <a:gd name="csX1" fmla="*/ 9893 w 3125627"/>
+              <a:gd name="csY1" fmla="*/ 3902044 h 4081083"/>
+              <a:gd name="csX2" fmla="*/ 837 w 3125627"/>
+              <a:gd name="csY2" fmla="*/ 226337 h 4081083"/>
+              <a:gd name="csX3" fmla="*/ 507833 w 3125627"/>
+              <a:gd name="csY3" fmla="*/ 9055 h 4081083"/>
+              <a:gd name="csX4" fmla="*/ 2716877 w 3125627"/>
+              <a:gd name="csY4" fmla="*/ 0 h 4081083"/>
+              <a:gd name="csX5" fmla="*/ 3097125 w 3125627"/>
+              <a:gd name="csY5" fmla="*/ 271606 h 4081083"/>
+              <a:gd name="csX6" fmla="*/ 3097122 w 3125627"/>
+              <a:gd name="csY6" fmla="*/ 1204111 h 4081083"/>
+              <a:gd name="csX7" fmla="*/ 2716881 w 3125627"/>
+              <a:gd name="csY7" fmla="*/ 1385183 h 4081083"/>
+              <a:gd name="csX8" fmla="*/ 616474 w 3125627"/>
+              <a:gd name="csY8" fmla="*/ 1394234 h 4081083"/>
+              <a:gd name="csX9" fmla="*/ 317710 w 3125627"/>
+              <a:gd name="csY9" fmla="*/ 1566252 h 4081083"/>
+              <a:gd name="csX10" fmla="*/ 308655 w 3125627"/>
+              <a:gd name="csY10" fmla="*/ 3883936 h 4081083"/>
+              <a:gd name="csX11" fmla="*/ 218121 w 3125627"/>
+              <a:gd name="csY11" fmla="*/ 4074061 h 4081083"/>
+              <a:gd name="csX12" fmla="*/ 55158 w 3125627"/>
+              <a:gd name="csY12" fmla="*/ 4065007 h 4081083"/>
+              <a:gd name="csX0" fmla="*/ 55158 w 3125627"/>
+              <a:gd name="csY0" fmla="*/ 4065007 h 4081083"/>
+              <a:gd name="csX1" fmla="*/ 9893 w 3125627"/>
+              <a:gd name="csY1" fmla="*/ 3902044 h 4081083"/>
+              <a:gd name="csX2" fmla="*/ 837 w 3125627"/>
+              <a:gd name="csY2" fmla="*/ 226337 h 4081083"/>
+              <a:gd name="csX3" fmla="*/ 507833 w 3125627"/>
+              <a:gd name="csY3" fmla="*/ 9055 h 4081083"/>
+              <a:gd name="csX4" fmla="*/ 2716877 w 3125627"/>
+              <a:gd name="csY4" fmla="*/ 0 h 4081083"/>
+              <a:gd name="csX5" fmla="*/ 3097125 w 3125627"/>
+              <a:gd name="csY5" fmla="*/ 271606 h 4081083"/>
+              <a:gd name="csX6" fmla="*/ 3097122 w 3125627"/>
+              <a:gd name="csY6" fmla="*/ 1204111 h 4081083"/>
+              <a:gd name="csX7" fmla="*/ 2716881 w 3125627"/>
+              <a:gd name="csY7" fmla="*/ 1385183 h 4081083"/>
+              <a:gd name="csX8" fmla="*/ 616474 w 3125627"/>
+              <a:gd name="csY8" fmla="*/ 1394234 h 4081083"/>
+              <a:gd name="csX9" fmla="*/ 317710 w 3125627"/>
+              <a:gd name="csY9" fmla="*/ 1566252 h 4081083"/>
+              <a:gd name="csX10" fmla="*/ 308655 w 3125627"/>
+              <a:gd name="csY10" fmla="*/ 3883936 h 4081083"/>
+              <a:gd name="csX11" fmla="*/ 218121 w 3125627"/>
+              <a:gd name="csY11" fmla="*/ 4074061 h 4081083"/>
+              <a:gd name="csX12" fmla="*/ 55158 w 3125627"/>
+              <a:gd name="csY12" fmla="*/ 4065007 h 4081083"/>
+              <a:gd name="csX0" fmla="*/ 55158 w 3125627"/>
+              <a:gd name="csY0" fmla="*/ 4065007 h 4081083"/>
+              <a:gd name="csX1" fmla="*/ 9893 w 3125627"/>
+              <a:gd name="csY1" fmla="*/ 3902044 h 4081083"/>
+              <a:gd name="csX2" fmla="*/ 837 w 3125627"/>
+              <a:gd name="csY2" fmla="*/ 226337 h 4081083"/>
+              <a:gd name="csX3" fmla="*/ 507833 w 3125627"/>
+              <a:gd name="csY3" fmla="*/ 9055 h 4081083"/>
+              <a:gd name="csX4" fmla="*/ 2716877 w 3125627"/>
+              <a:gd name="csY4" fmla="*/ 0 h 4081083"/>
+              <a:gd name="csX5" fmla="*/ 3097125 w 3125627"/>
+              <a:gd name="csY5" fmla="*/ 271606 h 4081083"/>
+              <a:gd name="csX6" fmla="*/ 3097122 w 3125627"/>
+              <a:gd name="csY6" fmla="*/ 1204111 h 4081083"/>
+              <a:gd name="csX7" fmla="*/ 2716881 w 3125627"/>
+              <a:gd name="csY7" fmla="*/ 1385183 h 4081083"/>
+              <a:gd name="csX8" fmla="*/ 616474 w 3125627"/>
+              <a:gd name="csY8" fmla="*/ 1394234 h 4081083"/>
+              <a:gd name="csX9" fmla="*/ 317710 w 3125627"/>
+              <a:gd name="csY9" fmla="*/ 1566252 h 4081083"/>
+              <a:gd name="csX10" fmla="*/ 308655 w 3125627"/>
+              <a:gd name="csY10" fmla="*/ 3883936 h 4081083"/>
+              <a:gd name="csX11" fmla="*/ 218121 w 3125627"/>
+              <a:gd name="csY11" fmla="*/ 4074061 h 4081083"/>
+              <a:gd name="csX12" fmla="*/ 55158 w 3125627"/>
+              <a:gd name="csY12" fmla="*/ 4065007 h 4081083"/>
+              <a:gd name="csX0" fmla="*/ 218121 w 3125627"/>
+              <a:gd name="csY0" fmla="*/ 4074061 h 4240567"/>
+              <a:gd name="csX1" fmla="*/ 9893 w 3125627"/>
+              <a:gd name="csY1" fmla="*/ 3902044 h 4240567"/>
+              <a:gd name="csX2" fmla="*/ 837 w 3125627"/>
+              <a:gd name="csY2" fmla="*/ 226337 h 4240567"/>
+              <a:gd name="csX3" fmla="*/ 507833 w 3125627"/>
+              <a:gd name="csY3" fmla="*/ 9055 h 4240567"/>
+              <a:gd name="csX4" fmla="*/ 2716877 w 3125627"/>
+              <a:gd name="csY4" fmla="*/ 0 h 4240567"/>
+              <a:gd name="csX5" fmla="*/ 3097125 w 3125627"/>
+              <a:gd name="csY5" fmla="*/ 271606 h 4240567"/>
+              <a:gd name="csX6" fmla="*/ 3097122 w 3125627"/>
+              <a:gd name="csY6" fmla="*/ 1204111 h 4240567"/>
+              <a:gd name="csX7" fmla="*/ 2716881 w 3125627"/>
+              <a:gd name="csY7" fmla="*/ 1385183 h 4240567"/>
+              <a:gd name="csX8" fmla="*/ 616474 w 3125627"/>
+              <a:gd name="csY8" fmla="*/ 1394234 h 4240567"/>
+              <a:gd name="csX9" fmla="*/ 317710 w 3125627"/>
+              <a:gd name="csY9" fmla="*/ 1566252 h 4240567"/>
+              <a:gd name="csX10" fmla="*/ 308655 w 3125627"/>
+              <a:gd name="csY10" fmla="*/ 3883936 h 4240567"/>
+              <a:gd name="csX11" fmla="*/ 218121 w 3125627"/>
+              <a:gd name="csY11" fmla="*/ 4074061 h 4240567"/>
+              <a:gd name="csX0" fmla="*/ 149064 w 3125627"/>
+              <a:gd name="csY0" fmla="*/ 4074061 h 4240567"/>
+              <a:gd name="csX1" fmla="*/ 9893 w 3125627"/>
+              <a:gd name="csY1" fmla="*/ 3902044 h 4240567"/>
+              <a:gd name="csX2" fmla="*/ 837 w 3125627"/>
+              <a:gd name="csY2" fmla="*/ 226337 h 4240567"/>
+              <a:gd name="csX3" fmla="*/ 507833 w 3125627"/>
+              <a:gd name="csY3" fmla="*/ 9055 h 4240567"/>
+              <a:gd name="csX4" fmla="*/ 2716877 w 3125627"/>
+              <a:gd name="csY4" fmla="*/ 0 h 4240567"/>
+              <a:gd name="csX5" fmla="*/ 3097125 w 3125627"/>
+              <a:gd name="csY5" fmla="*/ 271606 h 4240567"/>
+              <a:gd name="csX6" fmla="*/ 3097122 w 3125627"/>
+              <a:gd name="csY6" fmla="*/ 1204111 h 4240567"/>
+              <a:gd name="csX7" fmla="*/ 2716881 w 3125627"/>
+              <a:gd name="csY7" fmla="*/ 1385183 h 4240567"/>
+              <a:gd name="csX8" fmla="*/ 616474 w 3125627"/>
+              <a:gd name="csY8" fmla="*/ 1394234 h 4240567"/>
+              <a:gd name="csX9" fmla="*/ 317710 w 3125627"/>
+              <a:gd name="csY9" fmla="*/ 1566252 h 4240567"/>
+              <a:gd name="csX10" fmla="*/ 308655 w 3125627"/>
+              <a:gd name="csY10" fmla="*/ 3883936 h 4240567"/>
+              <a:gd name="csX11" fmla="*/ 149064 w 3125627"/>
+              <a:gd name="csY11" fmla="*/ 4074061 h 4240567"/>
+              <a:gd name="csX0" fmla="*/ 149064 w 3125627"/>
+              <a:gd name="csY0" fmla="*/ 4074061 h 4240567"/>
+              <a:gd name="csX1" fmla="*/ 9893 w 3125627"/>
+              <a:gd name="csY1" fmla="*/ 3902044 h 4240567"/>
+              <a:gd name="csX2" fmla="*/ 837 w 3125627"/>
+              <a:gd name="csY2" fmla="*/ 226337 h 4240567"/>
+              <a:gd name="csX3" fmla="*/ 507833 w 3125627"/>
+              <a:gd name="csY3" fmla="*/ 9055 h 4240567"/>
+              <a:gd name="csX4" fmla="*/ 2716877 w 3125627"/>
+              <a:gd name="csY4" fmla="*/ 0 h 4240567"/>
+              <a:gd name="csX5" fmla="*/ 3097125 w 3125627"/>
+              <a:gd name="csY5" fmla="*/ 271606 h 4240567"/>
+              <a:gd name="csX6" fmla="*/ 3097122 w 3125627"/>
+              <a:gd name="csY6" fmla="*/ 1204111 h 4240567"/>
+              <a:gd name="csX7" fmla="*/ 2716881 w 3125627"/>
+              <a:gd name="csY7" fmla="*/ 1385183 h 4240567"/>
+              <a:gd name="csX8" fmla="*/ 616474 w 3125627"/>
+              <a:gd name="csY8" fmla="*/ 1394234 h 4240567"/>
+              <a:gd name="csX9" fmla="*/ 317710 w 3125627"/>
+              <a:gd name="csY9" fmla="*/ 1566252 h 4240567"/>
+              <a:gd name="csX10" fmla="*/ 308655 w 3125627"/>
+              <a:gd name="csY10" fmla="*/ 3883936 h 4240567"/>
+              <a:gd name="csX11" fmla="*/ 149064 w 3125627"/>
+              <a:gd name="csY11" fmla="*/ 4074061 h 4240567"/>
+              <a:gd name="csX0" fmla="*/ 149064 w 3125627"/>
+              <a:gd name="csY0" fmla="*/ 4074061 h 4240567"/>
+              <a:gd name="csX1" fmla="*/ 9893 w 3125627"/>
+              <a:gd name="csY1" fmla="*/ 3902044 h 4240567"/>
+              <a:gd name="csX2" fmla="*/ 837 w 3125627"/>
+              <a:gd name="csY2" fmla="*/ 226337 h 4240567"/>
+              <a:gd name="csX3" fmla="*/ 507833 w 3125627"/>
+              <a:gd name="csY3" fmla="*/ 9055 h 4240567"/>
+              <a:gd name="csX4" fmla="*/ 2716877 w 3125627"/>
+              <a:gd name="csY4" fmla="*/ 0 h 4240567"/>
+              <a:gd name="csX5" fmla="*/ 3097125 w 3125627"/>
+              <a:gd name="csY5" fmla="*/ 271606 h 4240567"/>
+              <a:gd name="csX6" fmla="*/ 3097122 w 3125627"/>
+              <a:gd name="csY6" fmla="*/ 1204111 h 4240567"/>
+              <a:gd name="csX7" fmla="*/ 2716881 w 3125627"/>
+              <a:gd name="csY7" fmla="*/ 1385183 h 4240567"/>
+              <a:gd name="csX8" fmla="*/ 616474 w 3125627"/>
+              <a:gd name="csY8" fmla="*/ 1394234 h 4240567"/>
+              <a:gd name="csX9" fmla="*/ 317710 w 3125627"/>
+              <a:gd name="csY9" fmla="*/ 1566252 h 4240567"/>
+              <a:gd name="csX10" fmla="*/ 308655 w 3125627"/>
+              <a:gd name="csY10" fmla="*/ 3883936 h 4240567"/>
+              <a:gd name="csX11" fmla="*/ 149064 w 3125627"/>
+              <a:gd name="csY11" fmla="*/ 4074061 h 4240567"/>
+              <a:gd name="csX0" fmla="*/ 149064 w 3125627"/>
+              <a:gd name="csY0" fmla="*/ 4074061 h 4241006"/>
+              <a:gd name="csX1" fmla="*/ 9893 w 3125627"/>
+              <a:gd name="csY1" fmla="*/ 3902044 h 4241006"/>
+              <a:gd name="csX2" fmla="*/ 837 w 3125627"/>
+              <a:gd name="csY2" fmla="*/ 226337 h 4241006"/>
+              <a:gd name="csX3" fmla="*/ 507833 w 3125627"/>
+              <a:gd name="csY3" fmla="*/ 9055 h 4241006"/>
+              <a:gd name="csX4" fmla="*/ 2716877 w 3125627"/>
+              <a:gd name="csY4" fmla="*/ 0 h 4241006"/>
+              <a:gd name="csX5" fmla="*/ 3097125 w 3125627"/>
+              <a:gd name="csY5" fmla="*/ 271606 h 4241006"/>
+              <a:gd name="csX6" fmla="*/ 3097122 w 3125627"/>
+              <a:gd name="csY6" fmla="*/ 1204111 h 4241006"/>
+              <a:gd name="csX7" fmla="*/ 2716881 w 3125627"/>
+              <a:gd name="csY7" fmla="*/ 1385183 h 4241006"/>
+              <a:gd name="csX8" fmla="*/ 616474 w 3125627"/>
+              <a:gd name="csY8" fmla="*/ 1394234 h 4241006"/>
+              <a:gd name="csX9" fmla="*/ 317710 w 3125627"/>
+              <a:gd name="csY9" fmla="*/ 1566252 h 4241006"/>
+              <a:gd name="csX10" fmla="*/ 308655 w 3125627"/>
+              <a:gd name="csY10" fmla="*/ 3883936 h 4241006"/>
+              <a:gd name="csX11" fmla="*/ 149064 w 3125627"/>
+              <a:gd name="csY11" fmla="*/ 4074061 h 4241006"/>
+              <a:gd name="csX0" fmla="*/ 154142 w 3130705"/>
+              <a:gd name="csY0" fmla="*/ 4074061 h 4074210"/>
+              <a:gd name="csX1" fmla="*/ 14971 w 3130705"/>
+              <a:gd name="csY1" fmla="*/ 3902044 h 4074210"/>
+              <a:gd name="csX2" fmla="*/ 5915 w 3130705"/>
+              <a:gd name="csY2" fmla="*/ 226337 h 4074210"/>
+              <a:gd name="csX3" fmla="*/ 512911 w 3130705"/>
+              <a:gd name="csY3" fmla="*/ 9055 h 4074210"/>
+              <a:gd name="csX4" fmla="*/ 2721955 w 3130705"/>
+              <a:gd name="csY4" fmla="*/ 0 h 4074210"/>
+              <a:gd name="csX5" fmla="*/ 3102203 w 3130705"/>
+              <a:gd name="csY5" fmla="*/ 271606 h 4074210"/>
+              <a:gd name="csX6" fmla="*/ 3102200 w 3130705"/>
+              <a:gd name="csY6" fmla="*/ 1204111 h 4074210"/>
+              <a:gd name="csX7" fmla="*/ 2721959 w 3130705"/>
+              <a:gd name="csY7" fmla="*/ 1385183 h 4074210"/>
+              <a:gd name="csX8" fmla="*/ 621552 w 3130705"/>
+              <a:gd name="csY8" fmla="*/ 1394234 h 4074210"/>
+              <a:gd name="csX9" fmla="*/ 322788 w 3130705"/>
+              <a:gd name="csY9" fmla="*/ 1566252 h 4074210"/>
+              <a:gd name="csX10" fmla="*/ 313733 w 3130705"/>
+              <a:gd name="csY10" fmla="*/ 3883936 h 4074210"/>
+              <a:gd name="csX11" fmla="*/ 154142 w 3130705"/>
+              <a:gd name="csY11" fmla="*/ 4074061 h 4074210"/>
+              <a:gd name="csX0" fmla="*/ 149358 w 3125921"/>
+              <a:gd name="csY0" fmla="*/ 4074061 h 4074210"/>
+              <a:gd name="csX1" fmla="*/ 10187 w 3125921"/>
+              <a:gd name="csY1" fmla="*/ 3902044 h 4074210"/>
+              <a:gd name="csX2" fmla="*/ 1131 w 3125921"/>
+              <a:gd name="csY2" fmla="*/ 226337 h 4074210"/>
+              <a:gd name="csX3" fmla="*/ 508127 w 3125921"/>
+              <a:gd name="csY3" fmla="*/ 9055 h 4074210"/>
+              <a:gd name="csX4" fmla="*/ 2717171 w 3125921"/>
+              <a:gd name="csY4" fmla="*/ 0 h 4074210"/>
+              <a:gd name="csX5" fmla="*/ 3097419 w 3125921"/>
+              <a:gd name="csY5" fmla="*/ 271606 h 4074210"/>
+              <a:gd name="csX6" fmla="*/ 3097416 w 3125921"/>
+              <a:gd name="csY6" fmla="*/ 1204111 h 4074210"/>
+              <a:gd name="csX7" fmla="*/ 2717175 w 3125921"/>
+              <a:gd name="csY7" fmla="*/ 1385183 h 4074210"/>
+              <a:gd name="csX8" fmla="*/ 616768 w 3125921"/>
+              <a:gd name="csY8" fmla="*/ 1394234 h 4074210"/>
+              <a:gd name="csX9" fmla="*/ 318004 w 3125921"/>
+              <a:gd name="csY9" fmla="*/ 1566252 h 4074210"/>
+              <a:gd name="csX10" fmla="*/ 308949 w 3125921"/>
+              <a:gd name="csY10" fmla="*/ 3883936 h 4074210"/>
+              <a:gd name="csX11" fmla="*/ 149358 w 3125921"/>
+              <a:gd name="csY11" fmla="*/ 4074061 h 4074210"/>
+              <a:gd name="csX0" fmla="*/ 149358 w 3125921"/>
+              <a:gd name="csY0" fmla="*/ 4074061 h 4074482"/>
+              <a:gd name="csX1" fmla="*/ 10187 w 3125921"/>
+              <a:gd name="csY1" fmla="*/ 3902044 h 4074482"/>
+              <a:gd name="csX2" fmla="*/ 1131 w 3125921"/>
+              <a:gd name="csY2" fmla="*/ 226337 h 4074482"/>
+              <a:gd name="csX3" fmla="*/ 508127 w 3125921"/>
+              <a:gd name="csY3" fmla="*/ 9055 h 4074482"/>
+              <a:gd name="csX4" fmla="*/ 2717171 w 3125921"/>
+              <a:gd name="csY4" fmla="*/ 0 h 4074482"/>
+              <a:gd name="csX5" fmla="*/ 3097419 w 3125921"/>
+              <a:gd name="csY5" fmla="*/ 271606 h 4074482"/>
+              <a:gd name="csX6" fmla="*/ 3097416 w 3125921"/>
+              <a:gd name="csY6" fmla="*/ 1204111 h 4074482"/>
+              <a:gd name="csX7" fmla="*/ 2717175 w 3125921"/>
+              <a:gd name="csY7" fmla="*/ 1385183 h 4074482"/>
+              <a:gd name="csX8" fmla="*/ 616768 w 3125921"/>
+              <a:gd name="csY8" fmla="*/ 1394234 h 4074482"/>
+              <a:gd name="csX9" fmla="*/ 318004 w 3125921"/>
+              <a:gd name="csY9" fmla="*/ 1566252 h 4074482"/>
+              <a:gd name="csX10" fmla="*/ 308949 w 3125921"/>
+              <a:gd name="csY10" fmla="*/ 3883936 h 4074482"/>
+              <a:gd name="csX11" fmla="*/ 149358 w 3125921"/>
+              <a:gd name="csY11" fmla="*/ 4074061 h 4074482"/>
+              <a:gd name="csX0" fmla="*/ 149358 w 3125921"/>
+              <a:gd name="csY0" fmla="*/ 4074061 h 4074210"/>
+              <a:gd name="csX1" fmla="*/ 10187 w 3125921"/>
+              <a:gd name="csY1" fmla="*/ 3902044 h 4074210"/>
+              <a:gd name="csX2" fmla="*/ 1131 w 3125921"/>
+              <a:gd name="csY2" fmla="*/ 226337 h 4074210"/>
+              <a:gd name="csX3" fmla="*/ 508127 w 3125921"/>
+              <a:gd name="csY3" fmla="*/ 9055 h 4074210"/>
+              <a:gd name="csX4" fmla="*/ 2717171 w 3125921"/>
+              <a:gd name="csY4" fmla="*/ 0 h 4074210"/>
+              <a:gd name="csX5" fmla="*/ 3097419 w 3125921"/>
+              <a:gd name="csY5" fmla="*/ 271606 h 4074210"/>
+              <a:gd name="csX6" fmla="*/ 3097416 w 3125921"/>
+              <a:gd name="csY6" fmla="*/ 1204111 h 4074210"/>
+              <a:gd name="csX7" fmla="*/ 2717175 w 3125921"/>
+              <a:gd name="csY7" fmla="*/ 1385183 h 4074210"/>
+              <a:gd name="csX8" fmla="*/ 616768 w 3125921"/>
+              <a:gd name="csY8" fmla="*/ 1394234 h 4074210"/>
+              <a:gd name="csX9" fmla="*/ 318004 w 3125921"/>
+              <a:gd name="csY9" fmla="*/ 1566252 h 4074210"/>
+              <a:gd name="csX10" fmla="*/ 308949 w 3125921"/>
+              <a:gd name="csY10" fmla="*/ 3883936 h 4074210"/>
+              <a:gd name="csX11" fmla="*/ 149358 w 3125921"/>
+              <a:gd name="csY11" fmla="*/ 4074061 h 4074210"/>
+              <a:gd name="csX0" fmla="*/ 149358 w 3125921"/>
+              <a:gd name="csY0" fmla="*/ 4074061 h 4074068"/>
+              <a:gd name="csX1" fmla="*/ 10187 w 3125921"/>
+              <a:gd name="csY1" fmla="*/ 3902044 h 4074068"/>
+              <a:gd name="csX2" fmla="*/ 1131 w 3125921"/>
+              <a:gd name="csY2" fmla="*/ 226337 h 4074068"/>
+              <a:gd name="csX3" fmla="*/ 508127 w 3125921"/>
+              <a:gd name="csY3" fmla="*/ 9055 h 4074068"/>
+              <a:gd name="csX4" fmla="*/ 2717171 w 3125921"/>
+              <a:gd name="csY4" fmla="*/ 0 h 4074068"/>
+              <a:gd name="csX5" fmla="*/ 3097419 w 3125921"/>
+              <a:gd name="csY5" fmla="*/ 271606 h 4074068"/>
+              <a:gd name="csX6" fmla="*/ 3097416 w 3125921"/>
+              <a:gd name="csY6" fmla="*/ 1204111 h 4074068"/>
+              <a:gd name="csX7" fmla="*/ 2717175 w 3125921"/>
+              <a:gd name="csY7" fmla="*/ 1385183 h 4074068"/>
+              <a:gd name="csX8" fmla="*/ 616768 w 3125921"/>
+              <a:gd name="csY8" fmla="*/ 1394234 h 4074068"/>
+              <a:gd name="csX9" fmla="*/ 318004 w 3125921"/>
+              <a:gd name="csY9" fmla="*/ 1566252 h 4074068"/>
+              <a:gd name="csX10" fmla="*/ 308949 w 3125921"/>
+              <a:gd name="csY10" fmla="*/ 3883936 h 4074068"/>
+              <a:gd name="csX11" fmla="*/ 149358 w 3125921"/>
+              <a:gd name="csY11" fmla="*/ 4074061 h 4074068"/>
+              <a:gd name="csX0" fmla="*/ 149358 w 3125921"/>
+              <a:gd name="csY0" fmla="*/ 4074061 h 4074068"/>
+              <a:gd name="csX1" fmla="*/ 10187 w 3125921"/>
+              <a:gd name="csY1" fmla="*/ 3902044 h 4074068"/>
+              <a:gd name="csX2" fmla="*/ 1131 w 3125921"/>
+              <a:gd name="csY2" fmla="*/ 226337 h 4074068"/>
+              <a:gd name="csX3" fmla="*/ 508127 w 3125921"/>
+              <a:gd name="csY3" fmla="*/ 9055 h 4074068"/>
+              <a:gd name="csX4" fmla="*/ 2717171 w 3125921"/>
+              <a:gd name="csY4" fmla="*/ 0 h 4074068"/>
+              <a:gd name="csX5" fmla="*/ 3097419 w 3125921"/>
+              <a:gd name="csY5" fmla="*/ 271606 h 4074068"/>
+              <a:gd name="csX6" fmla="*/ 3097416 w 3125921"/>
+              <a:gd name="csY6" fmla="*/ 1204111 h 4074068"/>
+              <a:gd name="csX7" fmla="*/ 2717175 w 3125921"/>
+              <a:gd name="csY7" fmla="*/ 1385183 h 4074068"/>
+              <a:gd name="csX8" fmla="*/ 616768 w 3125921"/>
+              <a:gd name="csY8" fmla="*/ 1394234 h 4074068"/>
+              <a:gd name="csX9" fmla="*/ 318004 w 3125921"/>
+              <a:gd name="csY9" fmla="*/ 1566252 h 4074068"/>
+              <a:gd name="csX10" fmla="*/ 306568 w 3125921"/>
+              <a:gd name="csY10" fmla="*/ 3898223 h 4074068"/>
+              <a:gd name="csX11" fmla="*/ 149358 w 3125921"/>
+              <a:gd name="csY11" fmla="*/ 4074061 h 4074068"/>
+              <a:gd name="csX0" fmla="*/ 164722 w 3131760"/>
+              <a:gd name="csY0" fmla="*/ 4074061 h 4239866"/>
+              <a:gd name="csX1" fmla="*/ 16026 w 3131760"/>
+              <a:gd name="csY1" fmla="*/ 3902044 h 4239866"/>
+              <a:gd name="csX2" fmla="*/ 6970 w 3131760"/>
+              <a:gd name="csY2" fmla="*/ 226337 h 4239866"/>
+              <a:gd name="csX3" fmla="*/ 513966 w 3131760"/>
+              <a:gd name="csY3" fmla="*/ 9055 h 4239866"/>
+              <a:gd name="csX4" fmla="*/ 2723010 w 3131760"/>
+              <a:gd name="csY4" fmla="*/ 0 h 4239866"/>
+              <a:gd name="csX5" fmla="*/ 3103258 w 3131760"/>
+              <a:gd name="csY5" fmla="*/ 271606 h 4239866"/>
+              <a:gd name="csX6" fmla="*/ 3103255 w 3131760"/>
+              <a:gd name="csY6" fmla="*/ 1204111 h 4239866"/>
+              <a:gd name="csX7" fmla="*/ 2723014 w 3131760"/>
+              <a:gd name="csY7" fmla="*/ 1385183 h 4239866"/>
+              <a:gd name="csX8" fmla="*/ 622607 w 3131760"/>
+              <a:gd name="csY8" fmla="*/ 1394234 h 4239866"/>
+              <a:gd name="csX9" fmla="*/ 323843 w 3131760"/>
+              <a:gd name="csY9" fmla="*/ 1566252 h 4239866"/>
+              <a:gd name="csX10" fmla="*/ 312407 w 3131760"/>
+              <a:gd name="csY10" fmla="*/ 3898223 h 4239866"/>
+              <a:gd name="csX11" fmla="*/ 164722 w 3131760"/>
+              <a:gd name="csY11" fmla="*/ 4074061 h 4239866"/>
+              <a:gd name="csX0" fmla="*/ 158299 w 3125337"/>
+              <a:gd name="csY0" fmla="*/ 4074061 h 4143595"/>
+              <a:gd name="csX1" fmla="*/ 9603 w 3125337"/>
+              <a:gd name="csY1" fmla="*/ 3902044 h 4143595"/>
+              <a:gd name="csX2" fmla="*/ 547 w 3125337"/>
+              <a:gd name="csY2" fmla="*/ 226337 h 4143595"/>
+              <a:gd name="csX3" fmla="*/ 507543 w 3125337"/>
+              <a:gd name="csY3" fmla="*/ 9055 h 4143595"/>
+              <a:gd name="csX4" fmla="*/ 2716587 w 3125337"/>
+              <a:gd name="csY4" fmla="*/ 0 h 4143595"/>
+              <a:gd name="csX5" fmla="*/ 3096835 w 3125337"/>
+              <a:gd name="csY5" fmla="*/ 271606 h 4143595"/>
+              <a:gd name="csX6" fmla="*/ 3096832 w 3125337"/>
+              <a:gd name="csY6" fmla="*/ 1204111 h 4143595"/>
+              <a:gd name="csX7" fmla="*/ 2716591 w 3125337"/>
+              <a:gd name="csY7" fmla="*/ 1385183 h 4143595"/>
+              <a:gd name="csX8" fmla="*/ 616184 w 3125337"/>
+              <a:gd name="csY8" fmla="*/ 1394234 h 4143595"/>
+              <a:gd name="csX9" fmla="*/ 317420 w 3125337"/>
+              <a:gd name="csY9" fmla="*/ 1566252 h 4143595"/>
+              <a:gd name="csX10" fmla="*/ 305984 w 3125337"/>
+              <a:gd name="csY10" fmla="*/ 3898223 h 4143595"/>
+              <a:gd name="csX11" fmla="*/ 158299 w 3125337"/>
+              <a:gd name="csY11" fmla="*/ 4074061 h 4143595"/>
+              <a:gd name="csX0" fmla="*/ 158511 w 3125549"/>
+              <a:gd name="csY0" fmla="*/ 4074061 h 4143595"/>
+              <a:gd name="csX1" fmla="*/ 9815 w 3125549"/>
+              <a:gd name="csY1" fmla="*/ 3902044 h 4143595"/>
+              <a:gd name="csX2" fmla="*/ 759 w 3125549"/>
+              <a:gd name="csY2" fmla="*/ 226337 h 4143595"/>
+              <a:gd name="csX3" fmla="*/ 507755 w 3125549"/>
+              <a:gd name="csY3" fmla="*/ 9055 h 4143595"/>
+              <a:gd name="csX4" fmla="*/ 2716799 w 3125549"/>
+              <a:gd name="csY4" fmla="*/ 0 h 4143595"/>
+              <a:gd name="csX5" fmla="*/ 3097047 w 3125549"/>
+              <a:gd name="csY5" fmla="*/ 271606 h 4143595"/>
+              <a:gd name="csX6" fmla="*/ 3097044 w 3125549"/>
+              <a:gd name="csY6" fmla="*/ 1204111 h 4143595"/>
+              <a:gd name="csX7" fmla="*/ 2716803 w 3125549"/>
+              <a:gd name="csY7" fmla="*/ 1385183 h 4143595"/>
+              <a:gd name="csX8" fmla="*/ 616396 w 3125549"/>
+              <a:gd name="csY8" fmla="*/ 1394234 h 4143595"/>
+              <a:gd name="csX9" fmla="*/ 317632 w 3125549"/>
+              <a:gd name="csY9" fmla="*/ 1566252 h 4143595"/>
+              <a:gd name="csX10" fmla="*/ 306196 w 3125549"/>
+              <a:gd name="csY10" fmla="*/ 3898223 h 4143595"/>
+              <a:gd name="csX11" fmla="*/ 158511 w 3125549"/>
+              <a:gd name="csY11" fmla="*/ 4074061 h 4143595"/>
+              <a:gd name="csX0" fmla="*/ 158511 w 3125549"/>
+              <a:gd name="csY0" fmla="*/ 4074061 h 4074092"/>
+              <a:gd name="csX1" fmla="*/ 9815 w 3125549"/>
+              <a:gd name="csY1" fmla="*/ 3902044 h 4074092"/>
+              <a:gd name="csX2" fmla="*/ 759 w 3125549"/>
+              <a:gd name="csY2" fmla="*/ 226337 h 4074092"/>
+              <a:gd name="csX3" fmla="*/ 507755 w 3125549"/>
+              <a:gd name="csY3" fmla="*/ 9055 h 4074092"/>
+              <a:gd name="csX4" fmla="*/ 2716799 w 3125549"/>
+              <a:gd name="csY4" fmla="*/ 0 h 4074092"/>
+              <a:gd name="csX5" fmla="*/ 3097047 w 3125549"/>
+              <a:gd name="csY5" fmla="*/ 271606 h 4074092"/>
+              <a:gd name="csX6" fmla="*/ 3097044 w 3125549"/>
+              <a:gd name="csY6" fmla="*/ 1204111 h 4074092"/>
+              <a:gd name="csX7" fmla="*/ 2716803 w 3125549"/>
+              <a:gd name="csY7" fmla="*/ 1385183 h 4074092"/>
+              <a:gd name="csX8" fmla="*/ 616396 w 3125549"/>
+              <a:gd name="csY8" fmla="*/ 1394234 h 4074092"/>
+              <a:gd name="csX9" fmla="*/ 317632 w 3125549"/>
+              <a:gd name="csY9" fmla="*/ 1566252 h 4074092"/>
+              <a:gd name="csX10" fmla="*/ 306196 w 3125549"/>
+              <a:gd name="csY10" fmla="*/ 3898223 h 4074092"/>
+              <a:gd name="csX11" fmla="*/ 158511 w 3125549"/>
+              <a:gd name="csY11" fmla="*/ 4074061 h 4074092"/>
+              <a:gd name="csX0" fmla="*/ 158511 w 3125549"/>
+              <a:gd name="csY0" fmla="*/ 4074061 h 4074092"/>
+              <a:gd name="csX1" fmla="*/ 9815 w 3125549"/>
+              <a:gd name="csY1" fmla="*/ 3902044 h 4074092"/>
+              <a:gd name="csX2" fmla="*/ 759 w 3125549"/>
+              <a:gd name="csY2" fmla="*/ 226337 h 4074092"/>
+              <a:gd name="csX3" fmla="*/ 507755 w 3125549"/>
+              <a:gd name="csY3" fmla="*/ 9055 h 4074092"/>
+              <a:gd name="csX4" fmla="*/ 2716799 w 3125549"/>
+              <a:gd name="csY4" fmla="*/ 0 h 4074092"/>
+              <a:gd name="csX5" fmla="*/ 3097047 w 3125549"/>
+              <a:gd name="csY5" fmla="*/ 271606 h 4074092"/>
+              <a:gd name="csX6" fmla="*/ 3097044 w 3125549"/>
+              <a:gd name="csY6" fmla="*/ 1204111 h 4074092"/>
+              <a:gd name="csX7" fmla="*/ 2716803 w 3125549"/>
+              <a:gd name="csY7" fmla="*/ 1385183 h 4074092"/>
+              <a:gd name="csX8" fmla="*/ 616396 w 3125549"/>
+              <a:gd name="csY8" fmla="*/ 1394234 h 4074092"/>
+              <a:gd name="csX9" fmla="*/ 317632 w 3125549"/>
+              <a:gd name="csY9" fmla="*/ 1566252 h 4074092"/>
+              <a:gd name="csX10" fmla="*/ 306196 w 3125549"/>
+              <a:gd name="csY10" fmla="*/ 3898223 h 4074092"/>
+              <a:gd name="csX11" fmla="*/ 158511 w 3125549"/>
+              <a:gd name="csY11" fmla="*/ 4074061 h 4074092"/>
+            </a:gdLst>
+            <a:ahLst/>
+            <a:cxnLst>
+              <a:cxn ang="0">
+                <a:pos x="csX0" y="csY0"/>
+              </a:cxn>
+              <a:cxn ang="0">
+                <a:pos x="csX1" y="csY1"/>
+              </a:cxn>
+              <a:cxn ang="0">
+                <a:pos x="csX2" y="csY2"/>
+              </a:cxn>
+              <a:cxn ang="0">
+                <a:pos x="csX3" y="csY3"/>
+              </a:cxn>
+              <a:cxn ang="0">
+                <a:pos x="csX4" y="csY4"/>
+              </a:cxn>
+              <a:cxn ang="0">
+                <a:pos x="csX5" y="csY5"/>
+              </a:cxn>
+              <a:cxn ang="0">
+                <a:pos x="csX6" y="csY6"/>
+              </a:cxn>
+              <a:cxn ang="0">
+                <a:pos x="csX7" y="csY7"/>
+              </a:cxn>
+              <a:cxn ang="0">
+                <a:pos x="csX8" y="csY8"/>
+              </a:cxn>
+              <a:cxn ang="0">
+                <a:pos x="csX9" y="csY9"/>
+              </a:cxn>
+              <a:cxn ang="0">
+                <a:pos x="csX10" y="csY10"/>
+              </a:cxn>
+              <a:cxn ang="0">
+                <a:pos x="csX11" y="csY11"/>
+              </a:cxn>
+            </a:cxnLst>
+            <a:rect l="l" t="t" r="r" b="b"/>
+            <a:pathLst>
+              <a:path w="3125549" h="4074092">
+                <a:moveTo>
+                  <a:pt x="158511" y="4074061"/>
+                </a:moveTo>
+                <a:cubicBezTo>
+                  <a:pt x="109114" y="4074698"/>
+                  <a:pt x="9369" y="4067096"/>
+                  <a:pt x="9815" y="3902044"/>
+                </a:cubicBezTo>
+                <a:cubicBezTo>
+                  <a:pt x="11549" y="3260280"/>
+                  <a:pt x="-3489" y="880440"/>
+                  <a:pt x="759" y="226337"/>
+                </a:cubicBezTo>
+                <a:cubicBezTo>
+                  <a:pt x="2268" y="-6035"/>
+                  <a:pt x="254156" y="6790"/>
+                  <a:pt x="507755" y="9055"/>
+                </a:cubicBezTo>
+                <a:lnTo>
+                  <a:pt x="2716799" y="0"/>
+                </a:lnTo>
+                <a:cubicBezTo>
+                  <a:pt x="2985385" y="7545"/>
+                  <a:pt x="3104592" y="102608"/>
+                  <a:pt x="3097047" y="271606"/>
+                </a:cubicBezTo>
+                <a:cubicBezTo>
+                  <a:pt x="3098556" y="476818"/>
+                  <a:pt x="3160418" y="1018515"/>
+                  <a:pt x="3097044" y="1204111"/>
+                </a:cubicBezTo>
+                <a:cubicBezTo>
+                  <a:pt x="3033670" y="1389707"/>
+                  <a:pt x="2893346" y="1376130"/>
+                  <a:pt x="2716803" y="1385183"/>
+                </a:cubicBezTo>
+                <a:lnTo>
+                  <a:pt x="616396" y="1394234"/>
+                </a:lnTo>
+                <a:cubicBezTo>
+                  <a:pt x="369982" y="1395176"/>
+                  <a:pt x="307070" y="1364058"/>
+                  <a:pt x="317632" y="1566252"/>
+                </a:cubicBezTo>
+                <a:cubicBezTo>
+                  <a:pt x="319141" y="1985729"/>
+                  <a:pt x="319444" y="3467718"/>
+                  <a:pt x="306196" y="3898223"/>
+                </a:cubicBezTo>
+                <a:cubicBezTo>
+                  <a:pt x="301248" y="4059020"/>
+                  <a:pt x="207908" y="4073424"/>
+                  <a:pt x="158511" y="4074061"/>
+                </a:cubicBezTo>
+                <a:close/>
+              </a:path>
+            </a:pathLst>
+          </a:custGeom>
+          <a:noFill/>
+          <a:ln>
+            <a:solidFill>
+              <a:srgbClr val="FF0000"/>
+            </a:solidFill>
+          </a:ln>
+        </p:spPr>
+        <p:style>
+          <a:lnRef idx="2">
+            <a:schemeClr val="accent1">
+              <a:shade val="15000"/>
+            </a:schemeClr>
+          </a:lnRef>
+          <a:fillRef idx="1">
+            <a:schemeClr val="accent1"/>
+          </a:fillRef>
+          <a:effectRef idx="0">
+            <a:schemeClr val="accent1"/>
+          </a:effectRef>
+          <a:fontRef idx="minor">
+            <a:schemeClr val="lt1"/>
+          </a:fontRef>
+        </p:style>
+        <p:txBody>
+          <a:bodyPr rtlCol="0" anchor="ctr"/>
+          <a:lstStyle/>
+          <a:p>
+            <a:pPr algn="ctr"/>
+            <a:endParaRPr lang="de-DE"/>
+          </a:p>
+        </p:txBody>
+      </p:sp>
+      <p:sp>
+        <p:nvSpPr>
+          <p:cNvPr id="12" name="Ellipse 11">
+            <a:extLst>
+              <a:ext uri="{FF2B5EF4-FFF2-40B4-BE49-F238E27FC236}">
+                <a16:creationId xmlns:a16="http://schemas.microsoft.com/office/drawing/2014/main" id="{73420A3C-79A8-E16F-9A6F-BA3D087B5391}"/>
+              </a:ext>
+            </a:extLst>
+          </p:cNvPr>
+          <p:cNvSpPr/>
+          <p:nvPr/>
+        </p:nvSpPr>
+        <p:spPr>
+          <a:xfrm>
+            <a:off x="6882737" y="1167897"/>
+            <a:ext cx="199176" cy="199176"/>
+          </a:xfrm>
+          <a:prstGeom prst="ellipse">
+            <a:avLst/>
+          </a:prstGeom>
+          <a:solidFill>
+            <a:schemeClr val="accent2">
+              <a:lumMod val="20000"/>
+              <a:lumOff val="80000"/>
+            </a:schemeClr>
+          </a:solidFill>
+          <a:ln>
+            <a:solidFill>
+              <a:schemeClr val="tx1"/>
+            </a:solidFill>
+          </a:ln>
+        </p:spPr>
+        <p:style>
+          <a:lnRef idx="2">
+            <a:schemeClr val="accent1">
+              <a:shade val="15000"/>
+            </a:schemeClr>
+          </a:lnRef>
+          <a:fillRef idx="1">
+            <a:schemeClr val="accent1"/>
+          </a:fillRef>
+          <a:effectRef idx="0">
+            <a:schemeClr val="accent1"/>
+          </a:effectRef>
+          <a:fontRef idx="minor">
+            <a:schemeClr val="lt1"/>
+          </a:fontRef>
+        </p:style>
+        <p:txBody>
+          <a:bodyPr rtlCol="0" anchor="ctr"/>
+          <a:lstStyle/>
+          <a:p>
+            <a:pPr algn="ctr"/>
+            <a:endParaRPr lang="de-DE"/>
+          </a:p>
+        </p:txBody>
+      </p:sp>
+      <p:sp>
+        <p:nvSpPr>
+          <p:cNvPr id="13" name="Ellipse 12">
+            <a:extLst>
+              <a:ext uri="{FF2B5EF4-FFF2-40B4-BE49-F238E27FC236}">
+                <a16:creationId xmlns:a16="http://schemas.microsoft.com/office/drawing/2014/main" id="{4F17A945-F19B-661B-E69C-FF21249F21B1}"/>
+              </a:ext>
+            </a:extLst>
+          </p:cNvPr>
+          <p:cNvSpPr/>
+          <p:nvPr/>
+        </p:nvSpPr>
+        <p:spPr>
+          <a:xfrm>
+            <a:off x="4149203" y="1167897"/>
+            <a:ext cx="199176" cy="199176"/>
+          </a:xfrm>
+          <a:prstGeom prst="ellipse">
+            <a:avLst/>
+          </a:prstGeom>
+          <a:solidFill>
+            <a:schemeClr val="accent2">
+              <a:lumMod val="20000"/>
+              <a:lumOff val="80000"/>
+            </a:schemeClr>
+          </a:solidFill>
+          <a:ln>
+            <a:solidFill>
+              <a:schemeClr val="tx1"/>
+            </a:solidFill>
+          </a:ln>
+        </p:spPr>
+        <p:style>
+          <a:lnRef idx="2">
+            <a:schemeClr val="accent1">
+              <a:shade val="15000"/>
+            </a:schemeClr>
+          </a:lnRef>
+          <a:fillRef idx="1">
+            <a:schemeClr val="accent1"/>
+          </a:fillRef>
+          <a:effectRef idx="0">
+            <a:schemeClr val="accent1"/>
+          </a:effectRef>
+          <a:fontRef idx="minor">
+            <a:schemeClr val="lt1"/>
+          </a:fontRef>
+        </p:style>
+        <p:txBody>
+          <a:bodyPr rtlCol="0" anchor="ctr"/>
+          <a:lstStyle/>
+          <a:p>
+            <a:pPr algn="ctr"/>
+            <a:endParaRPr lang="de-DE"/>
+          </a:p>
+        </p:txBody>
+      </p:sp>
+      <p:sp>
+        <p:nvSpPr>
+          <p:cNvPr id="14" name="Ellipse 13">
+            <a:extLst>
+              <a:ext uri="{FF2B5EF4-FFF2-40B4-BE49-F238E27FC236}">
+                <a16:creationId xmlns:a16="http://schemas.microsoft.com/office/drawing/2014/main" id="{2D89EC53-E1DD-33DB-3DE8-1ED7B2B1C938}"/>
+              </a:ext>
+            </a:extLst>
+          </p:cNvPr>
+          <p:cNvSpPr/>
+          <p:nvPr/>
+        </p:nvSpPr>
+        <p:spPr>
+          <a:xfrm>
+            <a:off x="6882737" y="4934485"/>
+            <a:ext cx="199176" cy="199176"/>
+          </a:xfrm>
+          <a:prstGeom prst="ellipse">
+            <a:avLst/>
+          </a:prstGeom>
+          <a:solidFill>
+            <a:schemeClr val="accent2">
+              <a:lumMod val="20000"/>
+              <a:lumOff val="80000"/>
+            </a:schemeClr>
+          </a:solidFill>
+          <a:ln>
+            <a:solidFill>
+              <a:schemeClr val="tx1"/>
+            </a:solidFill>
+          </a:ln>
+        </p:spPr>
+        <p:style>
+          <a:lnRef idx="2">
+            <a:schemeClr val="accent1">
+              <a:shade val="15000"/>
+            </a:schemeClr>
+          </a:lnRef>
+          <a:fillRef idx="1">
+            <a:schemeClr val="accent1"/>
+          </a:fillRef>
+          <a:effectRef idx="0">
+            <a:schemeClr val="accent1"/>
+          </a:effectRef>
+          <a:fontRef idx="minor">
+            <a:schemeClr val="lt1"/>
+          </a:fontRef>
+        </p:style>
+        <p:txBody>
+          <a:bodyPr rtlCol="0" anchor="ctr"/>
+          <a:lstStyle/>
+          <a:p>
+            <a:pPr algn="ctr"/>
+            <a:endParaRPr lang="de-DE"/>
+          </a:p>
+        </p:txBody>
+      </p:sp>
+      <p:sp>
+        <p:nvSpPr>
+          <p:cNvPr id="15" name="Ellipse 14">
+            <a:extLst>
+              <a:ext uri="{FF2B5EF4-FFF2-40B4-BE49-F238E27FC236}">
+                <a16:creationId xmlns:a16="http://schemas.microsoft.com/office/drawing/2014/main" id="{E6607A72-7911-9EED-0181-44176112C716}"/>
+              </a:ext>
+            </a:extLst>
+          </p:cNvPr>
+          <p:cNvSpPr/>
+          <p:nvPr/>
+        </p:nvSpPr>
+        <p:spPr>
+          <a:xfrm>
+            <a:off x="6560958" y="2559113"/>
+            <a:ext cx="199176" cy="199176"/>
+          </a:xfrm>
+          <a:prstGeom prst="ellipse">
+            <a:avLst/>
+          </a:prstGeom>
+          <a:solidFill>
+            <a:schemeClr val="accent2">
+              <a:lumMod val="20000"/>
+              <a:lumOff val="80000"/>
+            </a:schemeClr>
+          </a:solidFill>
+          <a:ln>
+            <a:solidFill>
+              <a:schemeClr val="tx1"/>
+            </a:solidFill>
+          </a:ln>
+        </p:spPr>
+        <p:style>
+          <a:lnRef idx="2">
+            <a:schemeClr val="accent1">
+              <a:shade val="15000"/>
+            </a:schemeClr>
+          </a:lnRef>
+          <a:fillRef idx="1">
+            <a:schemeClr val="accent1"/>
+          </a:fillRef>
+          <a:effectRef idx="0">
+            <a:schemeClr val="accent1"/>
+          </a:effectRef>
+          <a:fontRef idx="minor">
+            <a:schemeClr val="lt1"/>
+          </a:fontRef>
+        </p:style>
+        <p:txBody>
+          <a:bodyPr rtlCol="0" anchor="ctr"/>
+          <a:lstStyle/>
+          <a:p>
+            <a:pPr algn="ctr"/>
+            <a:endParaRPr lang="de-DE"/>
+          </a:p>
+        </p:txBody>
+      </p:sp>
+      <p:sp>
+        <p:nvSpPr>
+          <p:cNvPr id="16" name="Ellipse 15">
+            <a:extLst>
+              <a:ext uri="{FF2B5EF4-FFF2-40B4-BE49-F238E27FC236}">
+                <a16:creationId xmlns:a16="http://schemas.microsoft.com/office/drawing/2014/main" id="{C524FC39-EBA8-57E0-EB30-9CA606D3BABF}"/>
+              </a:ext>
+            </a:extLst>
+          </p:cNvPr>
+          <p:cNvSpPr/>
+          <p:nvPr/>
+        </p:nvSpPr>
+        <p:spPr>
+          <a:xfrm>
+            <a:off x="4149203" y="2207694"/>
+            <a:ext cx="199176" cy="199176"/>
+          </a:xfrm>
+          <a:prstGeom prst="ellipse">
+            <a:avLst/>
+          </a:prstGeom>
+          <a:solidFill>
+            <a:schemeClr val="accent2">
+              <a:lumMod val="20000"/>
+              <a:lumOff val="80000"/>
+            </a:schemeClr>
+          </a:solidFill>
+          <a:ln>
+            <a:solidFill>
+              <a:schemeClr val="tx1"/>
+            </a:solidFill>
+          </a:ln>
+        </p:spPr>
+        <p:style>
+          <a:lnRef idx="2">
+            <a:schemeClr val="accent1">
+              <a:shade val="15000"/>
+            </a:schemeClr>
+          </a:lnRef>
+          <a:fillRef idx="1">
+            <a:schemeClr val="accent1"/>
+          </a:fillRef>
+          <a:effectRef idx="0">
+            <a:schemeClr val="accent1"/>
+          </a:effectRef>
+          <a:fontRef idx="minor">
+            <a:schemeClr val="lt1"/>
+          </a:fontRef>
+        </p:style>
+        <p:txBody>
+          <a:bodyPr rtlCol="0" anchor="ctr"/>
+          <a:lstStyle/>
+          <a:p>
+            <a:pPr algn="ctr"/>
+            <a:endParaRPr lang="de-DE"/>
+          </a:p>
+        </p:txBody>
+      </p:sp>
+      <p:sp>
+        <p:nvSpPr>
+          <p:cNvPr id="17" name="Rechteck 16">
+            <a:extLst>
+              <a:ext uri="{FF2B5EF4-FFF2-40B4-BE49-F238E27FC236}">
+                <a16:creationId xmlns:a16="http://schemas.microsoft.com/office/drawing/2014/main" id="{2B4A7D98-BDA6-FE4D-FA3B-8FD67F95AC2C}"/>
+              </a:ext>
+            </a:extLst>
+          </p:cNvPr>
+          <p:cNvSpPr/>
+          <p:nvPr/>
+        </p:nvSpPr>
+        <p:spPr>
+          <a:xfrm>
+            <a:off x="5143681" y="2241851"/>
+            <a:ext cx="578003" cy="505485"/>
+          </a:xfrm>
+          <a:prstGeom prst="rect">
+            <a:avLst/>
+          </a:prstGeom>
+          <a:pattFill prst="wdDnDiag">
+            <a:fgClr>
+              <a:schemeClr val="accent1"/>
+            </a:fgClr>
+            <a:bgClr>
+              <a:schemeClr val="bg1"/>
+            </a:bgClr>
+          </a:pattFill>
+          <a:ln>
+            <a:solidFill>
+              <a:schemeClr val="accent1"/>
+            </a:solidFill>
+          </a:ln>
+        </p:spPr>
+        <p:style>
+          <a:lnRef idx="2">
+            <a:schemeClr val="accent1">
+              <a:shade val="15000"/>
+            </a:schemeClr>
+          </a:lnRef>
+          <a:fillRef idx="1">
+            <a:schemeClr val="accent1"/>
+          </a:fillRef>
+          <a:effectRef idx="0">
+            <a:schemeClr val="accent1"/>
+          </a:effectRef>
+          <a:fontRef idx="minor">
+            <a:schemeClr val="lt1"/>
+          </a:fontRef>
+        </p:style>
+        <p:txBody>
+          <a:bodyPr rtlCol="0" anchor="ctr"/>
+          <a:lstStyle/>
+          <a:p>
+            <a:pPr algn="ctr"/>
+            <a:endParaRPr lang="de-DE"/>
+          </a:p>
+        </p:txBody>
+      </p:sp>
+      <p:cxnSp>
+        <p:nvCxnSpPr>
+          <p:cNvPr id="19" name="Gerade Verbindung mit Pfeil 18">
+            <a:extLst>
+              <a:ext uri="{FF2B5EF4-FFF2-40B4-BE49-F238E27FC236}">
+                <a16:creationId xmlns:a16="http://schemas.microsoft.com/office/drawing/2014/main" id="{7BF364F5-018A-C55E-C939-E3E0A39A3EA1}"/>
+              </a:ext>
+            </a:extLst>
+          </p:cNvPr>
+          <p:cNvCxnSpPr>
+            <a:cxnSpLocks/>
+          </p:cNvCxnSpPr>
+          <p:nvPr/>
+        </p:nvCxnSpPr>
+        <p:spPr>
+          <a:xfrm>
+            <a:off x="4493491" y="1995054"/>
+            <a:ext cx="1828800" cy="0"/>
+          </a:xfrm>
+          <a:prstGeom prst="straightConnector1">
+            <a:avLst/>
+          </a:prstGeom>
+          <a:ln>
+            <a:headEnd type="triangle"/>
+            <a:tailEnd type="triangle"/>
+          </a:ln>
+        </p:spPr>
+        <p:style>
+          <a:lnRef idx="2">
+            <a:schemeClr val="dk1"/>
+          </a:lnRef>
+          <a:fillRef idx="0">
+            <a:schemeClr val="dk1"/>
+          </a:fillRef>
+          <a:effectRef idx="1">
+            <a:schemeClr val="dk1"/>
+          </a:effectRef>
+          <a:fontRef idx="minor">
+            <a:schemeClr val="tx1"/>
+          </a:fontRef>
+        </p:style>
+      </p:cxnSp>
+      <p:cxnSp>
+        <p:nvCxnSpPr>
+          <p:cNvPr id="21" name="Gerade Verbindung mit Pfeil 20">
+            <a:extLst>
+              <a:ext uri="{FF2B5EF4-FFF2-40B4-BE49-F238E27FC236}">
+                <a16:creationId xmlns:a16="http://schemas.microsoft.com/office/drawing/2014/main" id="{8B62B66C-B673-3E3A-8016-61DB6846EA24}"/>
+              </a:ext>
+            </a:extLst>
+          </p:cNvPr>
+          <p:cNvCxnSpPr>
+            <a:cxnSpLocks/>
+          </p:cNvCxnSpPr>
+          <p:nvPr/>
+        </p:nvCxnSpPr>
+        <p:spPr>
+          <a:xfrm>
+            <a:off x="7536873" y="1607127"/>
+            <a:ext cx="0" cy="2022764"/>
+          </a:xfrm>
+          <a:prstGeom prst="straightConnector1">
+            <a:avLst/>
+          </a:prstGeom>
+          <a:ln>
+            <a:headEnd type="triangle"/>
+            <a:tailEnd type="triangle"/>
+          </a:ln>
+        </p:spPr>
+        <p:style>
+          <a:lnRef idx="2">
+            <a:schemeClr val="dk1"/>
+          </a:lnRef>
+          <a:fillRef idx="0">
+            <a:schemeClr val="dk1"/>
+          </a:fillRef>
+          <a:effectRef idx="1">
+            <a:schemeClr val="dk1"/>
+          </a:effectRef>
+          <a:fontRef idx="minor">
+            <a:schemeClr val="tx1"/>
+          </a:fontRef>
+        </p:style>
+      </p:cxnSp>
+      <p:sp>
+        <p:nvSpPr>
+          <p:cNvPr id="22" name="Rechteck 21">
+            <a:extLst>
+              <a:ext uri="{FF2B5EF4-FFF2-40B4-BE49-F238E27FC236}">
+                <a16:creationId xmlns:a16="http://schemas.microsoft.com/office/drawing/2014/main" id="{9C0D8197-59C6-9899-92C6-761602067A94}"/>
+              </a:ext>
+            </a:extLst>
+          </p:cNvPr>
+          <p:cNvSpPr/>
+          <p:nvPr/>
+        </p:nvSpPr>
+        <p:spPr>
+          <a:xfrm>
+            <a:off x="3435927" y="2180538"/>
+            <a:ext cx="3943928" cy="622702"/>
+          </a:xfrm>
+          <a:prstGeom prst="rect">
+            <a:avLst/>
+          </a:prstGeom>
+          <a:noFill/>
+          <a:ln>
+            <a:solidFill>
+              <a:schemeClr val="accent1"/>
+            </a:solidFill>
+          </a:ln>
+        </p:spPr>
+        <p:style>
+          <a:lnRef idx="2">
+            <a:schemeClr val="accent1">
+              <a:shade val="15000"/>
+            </a:schemeClr>
+          </a:lnRef>
+          <a:fillRef idx="1">
+            <a:schemeClr val="accent1"/>
+          </a:fillRef>
+          <a:effectRef idx="0">
+            <a:schemeClr val="accent1"/>
+          </a:effectRef>
+          <a:fontRef idx="minor">
+            <a:schemeClr val="lt1"/>
+          </a:fontRef>
+        </p:style>
+        <p:txBody>
+          <a:bodyPr rtlCol="0" anchor="ctr"/>
+          <a:lstStyle/>
+          <a:p>
+            <a:pPr algn="ctr"/>
+            <a:endParaRPr lang="de-DE"/>
+          </a:p>
+        </p:txBody>
+      </p:sp>
+      <p:sp>
+        <p:nvSpPr>
+          <p:cNvPr id="28" name="Freihandform: Form 27">
+            <a:extLst>
+              <a:ext uri="{FF2B5EF4-FFF2-40B4-BE49-F238E27FC236}">
+                <a16:creationId xmlns:a16="http://schemas.microsoft.com/office/drawing/2014/main" id="{E3D271DD-C072-E0ED-1601-6D418BF83173}"/>
+              </a:ext>
+            </a:extLst>
+          </p:cNvPr>
+          <p:cNvSpPr/>
+          <p:nvPr/>
+        </p:nvSpPr>
+        <p:spPr>
+          <a:xfrm>
+            <a:off x="5153221" y="2678545"/>
+            <a:ext cx="224950" cy="1071419"/>
+          </a:xfrm>
+          <a:custGeom>
+            <a:avLst/>
+            <a:gdLst>
+              <a:gd name="csX0" fmla="*/ 166924 w 224950"/>
+              <a:gd name="csY0" fmla="*/ 0 h 1071419"/>
+              <a:gd name="csX1" fmla="*/ 670 w 224950"/>
+              <a:gd name="csY1" fmla="*/ 683491 h 1071419"/>
+              <a:gd name="csX2" fmla="*/ 222343 w 224950"/>
+              <a:gd name="csY2" fmla="*/ 628073 h 1071419"/>
+              <a:gd name="csX3" fmla="*/ 102270 w 224950"/>
+              <a:gd name="csY3" fmla="*/ 1071419 h 1071419"/>
+            </a:gdLst>
+            <a:ahLst/>
+            <a:cxnLst>
+              <a:cxn ang="0">
+                <a:pos x="csX0" y="csY0"/>
+              </a:cxn>
+              <a:cxn ang="0">
+                <a:pos x="csX1" y="csY1"/>
+              </a:cxn>
+              <a:cxn ang="0">
+                <a:pos x="csX2" y="csY2"/>
+              </a:cxn>
+              <a:cxn ang="0">
+                <a:pos x="csX3" y="csY3"/>
+              </a:cxn>
+            </a:cxnLst>
+            <a:rect l="l" t="t" r="r" b="b"/>
+            <a:pathLst>
+              <a:path w="224950" h="1071419">
+                <a:moveTo>
+                  <a:pt x="166924" y="0"/>
+                </a:moveTo>
+                <a:cubicBezTo>
+                  <a:pt x="79179" y="289406"/>
+                  <a:pt x="-8566" y="578812"/>
+                  <a:pt x="670" y="683491"/>
+                </a:cubicBezTo>
+                <a:cubicBezTo>
+                  <a:pt x="9906" y="788170"/>
+                  <a:pt x="205410" y="563418"/>
+                  <a:pt x="222343" y="628073"/>
+                </a:cubicBezTo>
+                <a:cubicBezTo>
+                  <a:pt x="239276" y="692728"/>
+                  <a:pt x="170773" y="882073"/>
+                  <a:pt x="102270" y="1071419"/>
+                </a:cubicBezTo>
+              </a:path>
+            </a:pathLst>
+          </a:custGeom>
+          <a:noFill/>
+        </p:spPr>
+        <p:style>
+          <a:lnRef idx="2">
+            <a:schemeClr val="accent1">
+              <a:shade val="15000"/>
+            </a:schemeClr>
+          </a:lnRef>
+          <a:fillRef idx="1">
+            <a:schemeClr val="accent1"/>
+          </a:fillRef>
+          <a:effectRef idx="0">
+            <a:schemeClr val="accent1"/>
+          </a:effectRef>
+          <a:fontRef idx="minor">
+            <a:schemeClr val="lt1"/>
+          </a:fontRef>
+        </p:style>
+        <p:txBody>
+          <a:bodyPr rtlCol="0" anchor="ctr"/>
+          <a:lstStyle/>
+          <a:p>
+            <a:pPr algn="ctr"/>
+            <a:endParaRPr lang="de-DE"/>
+          </a:p>
+        </p:txBody>
+      </p:sp>
+      <p:sp>
+        <p:nvSpPr>
+          <p:cNvPr id="29" name="Textfeld 28">
+            <a:extLst>
+              <a:ext uri="{FF2B5EF4-FFF2-40B4-BE49-F238E27FC236}">
+                <a16:creationId xmlns:a16="http://schemas.microsoft.com/office/drawing/2014/main" id="{AD5A94EE-65A3-123F-6B12-37CE36B15A41}"/>
+              </a:ext>
+            </a:extLst>
+          </p:cNvPr>
+          <p:cNvSpPr txBox="1"/>
+          <p:nvPr/>
+        </p:nvSpPr>
+        <p:spPr>
+          <a:xfrm>
+            <a:off x="4588462" y="3749964"/>
+            <a:ext cx="1579418" cy="369332"/>
+          </a:xfrm>
+          <a:prstGeom prst="rect">
+            <a:avLst/>
+          </a:prstGeom>
+          <a:noFill/>
+        </p:spPr>
+        <p:txBody>
+          <a:bodyPr wrap="square" rtlCol="0">
+            <a:spAutoFit/>
+          </a:bodyPr>
+          <a:lstStyle/>
+          <a:p>
+            <a:r>
+              <a:rPr lang="de-AT" dirty="0"/>
+              <a:t>Stifthalterung</a:t>
+            </a:r>
+            <a:endParaRPr lang="de-DE" dirty="0"/>
+          </a:p>
+        </p:txBody>
+      </p:sp>
+      <p:sp>
+        <p:nvSpPr>
+          <p:cNvPr id="30" name="Bogen 29">
+            <a:extLst>
+              <a:ext uri="{FF2B5EF4-FFF2-40B4-BE49-F238E27FC236}">
+                <a16:creationId xmlns:a16="http://schemas.microsoft.com/office/drawing/2014/main" id="{5776E427-B5AB-4BA6-DED5-635C32376C42}"/>
+              </a:ext>
+            </a:extLst>
+          </p:cNvPr>
+          <p:cNvSpPr/>
+          <p:nvPr/>
+        </p:nvSpPr>
+        <p:spPr>
+          <a:xfrm rot="7324303" flipV="1">
+            <a:off x="3562948" y="4779473"/>
+            <a:ext cx="592319" cy="599730"/>
+          </a:xfrm>
+          <a:prstGeom prst="arc">
+            <a:avLst>
+              <a:gd name="adj1" fmla="val 16200000"/>
+              <a:gd name="adj2" fmla="val 9199929"/>
+            </a:avLst>
+          </a:prstGeom>
+          <a:ln>
+            <a:headEnd type="triangle"/>
+            <a:tailEnd type="triangle"/>
+          </a:ln>
+        </p:spPr>
+        <p:style>
+          <a:lnRef idx="2">
+            <a:schemeClr val="dk1"/>
+          </a:lnRef>
+          <a:fillRef idx="0">
+            <a:schemeClr val="dk1"/>
+          </a:fillRef>
+          <a:effectRef idx="1">
+            <a:schemeClr val="dk1"/>
+          </a:effectRef>
+          <a:fontRef idx="minor">
+            <a:schemeClr val="tx1"/>
+          </a:fontRef>
+        </p:style>
+        <p:txBody>
+          <a:bodyPr rtlCol="0" anchor="ctr"/>
+          <a:lstStyle/>
+          <a:p>
+            <a:pPr algn="ctr"/>
+            <a:endParaRPr lang="de-DE"/>
+          </a:p>
+        </p:txBody>
+      </p:sp>
+      <p:sp>
+        <p:nvSpPr>
+          <p:cNvPr id="31" name="Bogen 30">
+            <a:extLst>
+              <a:ext uri="{FF2B5EF4-FFF2-40B4-BE49-F238E27FC236}">
+                <a16:creationId xmlns:a16="http://schemas.microsoft.com/office/drawing/2014/main" id="{9D804514-EDDD-1EF3-0D82-5A2377904B3B}"/>
+              </a:ext>
+            </a:extLst>
+          </p:cNvPr>
+          <p:cNvSpPr/>
+          <p:nvPr/>
+        </p:nvSpPr>
+        <p:spPr>
+          <a:xfrm rot="7324303" flipV="1">
+            <a:off x="6678700" y="4729757"/>
+            <a:ext cx="592319" cy="599730"/>
+          </a:xfrm>
+          <a:prstGeom prst="arc">
+            <a:avLst>
+              <a:gd name="adj1" fmla="val 16200000"/>
+              <a:gd name="adj2" fmla="val 9199929"/>
+            </a:avLst>
+          </a:prstGeom>
+          <a:ln>
+            <a:headEnd type="triangle"/>
+            <a:tailEnd type="triangle"/>
+          </a:ln>
+        </p:spPr>
+        <p:style>
+          <a:lnRef idx="2">
+            <a:schemeClr val="dk1"/>
+          </a:lnRef>
+          <a:fillRef idx="0">
+            <a:schemeClr val="dk1"/>
+          </a:fillRef>
+          <a:effectRef idx="1">
+            <a:schemeClr val="dk1"/>
+          </a:effectRef>
+          <a:fontRef idx="minor">
+            <a:schemeClr val="tx1"/>
+          </a:fontRef>
+        </p:style>
+        <p:txBody>
+          <a:bodyPr rtlCol="0" anchor="ctr"/>
+          <a:lstStyle/>
+          <a:p>
+            <a:pPr algn="ctr"/>
+            <a:endParaRPr lang="de-DE"/>
+          </a:p>
+        </p:txBody>
+      </p:sp>
+    </p:spTree>
+    <p:extLst>
+      <p:ext uri="{BB962C8B-B14F-4D97-AF65-F5344CB8AC3E}">
+        <p14:creationId xmlns:p14="http://schemas.microsoft.com/office/powerpoint/2010/main" val="1439896925"/>
       </p:ext>
     </p:extLst>
   </p:cSld>
